--- a/content/05-teaching-resources/slides/specialism/07-design-approaches.pptx
+++ b/content/05-teaching-resources/slides/specialism/07-design-approaches.pptx
@@ -10,10 +10,16 @@
     <p:sldId id="258" r:id="rId9"/>
     <p:sldId id="259" r:id="rId10"/>
     <p:sldId id="260" r:id="rId11"/>
-    <p:sldId id="261" r:id="rId12"/>
+    <p:sldId id="261" r:id="rId13"/>
     <p:sldId id="262" r:id="rId14"/>
     <p:sldId id="263" r:id="rId15"/>
     <p:sldId id="264" r:id="rId16"/>
+    <p:sldId id="265" r:id="rId17"/>
+    <p:sldId id="266" r:id="rId18"/>
+    <p:sldId id="267" r:id="rId19"/>
+    <p:sldId id="268" r:id="rId20"/>
+    <p:sldId id="269" r:id="rId21"/>
+    <p:sldId id="270" r:id="rId22"/>
   </p:sldIdLst>
   <p:sldSz cx="12191695" cy="6858000" type="screen4x3"/>
   <p:notesSz cx="6858000" cy="9144000"/>
@@ -510,7 +516,22 @@
           <a:lstStyle/>
           <a:p>
             <a:r>
-              <a:t>Give students a few minutes to answer on mini whiteboards or paper, then reveal the answers on the next slide.</a:t>
+              <a:t>Answers:</a:t>
+            </a:r>
+          </a:p>
+          <a:p>
+            <a:r>
+              <a:t>1. A class reusing a parent class's code.</a:t>
+            </a:r>
+          </a:p>
+          <a:p>
+            <a:r>
+              <a:t>2. Keeping an object's data private inside it.</a:t>
+            </a:r>
+          </a:p>
+          <a:p>
+            <a:r>
+              <a:t>3. E-R models and UML.</a:t>
             </a:r>
           </a:p>
         </p:txBody>
@@ -580,7 +601,22 @@
           <a:lstStyle/>
           <a:p>
             <a:r>
-              <a:t>Talk through any answers the class found difficult.</a:t>
+              <a:t>Answers:</a:t>
+            </a:r>
+          </a:p>
+          <a:p>
+            <a:r>
+              <a:t>1. The test.</a:t>
+            </a:r>
+          </a:p>
+          <a:p>
+            <a:r>
+              <a:t>2. The feature doesn't exist yet.</a:t>
+            </a:r>
+          </a:p>
+          <a:p>
+            <a:r>
+              <a:t>3. Tidying code without changing what it does.</a:t>
             </a:r>
           </a:p>
         </p:txBody>
@@ -606,6 +642,231 @@
 </file>
 
 <file path=ppt/notesSlides/notesSlide3.xml><?xml version="1.0" encoding="utf-8"?>
+<p:notes xmlns:a="http://schemas.openxmlformats.org/drawingml/2006/main" xmlns:p="http://schemas.openxmlformats.org/presentationml/2006/main" xmlns:r="http://schemas.openxmlformats.org/officeDocument/2006/relationships">
+  <p:cSld>
+    <p:spTree>
+      <p:nvGrpSpPr>
+        <p:cNvPr id="1" name=""/>
+        <p:cNvGrpSpPr/>
+        <p:nvPr/>
+      </p:nvGrpSpPr>
+      <p:grpSpPr>
+        <a:xfrm>
+          <a:off x="0" y="0"/>
+          <a:ext cx="0" cy="0"/>
+          <a:chOff x="0" y="0"/>
+          <a:chExt cx="0" cy="0"/>
+        </a:xfrm>
+      </p:grpSpPr>
+      <p:sp>
+        <p:nvSpPr>
+          <p:cNvPr id="2" name="Slide Image Placeholder 1"/>
+          <p:cNvSpPr>
+            <a:spLocks noGrp="1"/>
+          </p:cNvSpPr>
+          <p:nvPr>
+            <p:ph type="sldImg" idx="2"/>
+          </p:nvPr>
+        </p:nvSpPr>
+        <p:spPr/>
+      </p:sp>
+      <p:sp>
+        <p:nvSpPr>
+          <p:cNvPr id="3" name="Notes Placeholder 2"/>
+          <p:cNvSpPr>
+            <a:spLocks noGrp="1"/>
+          </p:cNvSpPr>
+          <p:nvPr>
+            <p:ph type="body" idx="3" sz="quarter"/>
+          </p:nvPr>
+        </p:nvSpPr>
+        <p:spPr/>
+        <p:txBody>
+          <a:bodyPr/>
+          <a:lstStyle/>
+          <a:p>
+            <a:r>
+              <a:t>Answers:</a:t>
+            </a:r>
+          </a:p>
+          <a:p>
+            <a:r>
+              <a:t>1. Given... When... Then...</a:t>
+            </a:r>
+          </a:p>
+          <a:p>
+            <a:r>
+              <a:t>2. A function that calls itself.</a:t>
+            </a:r>
+          </a:p>
+          <a:p>
+            <a:r>
+              <a:t>3. A function that takes or returns another function.</a:t>
+            </a:r>
+          </a:p>
+        </p:txBody>
+      </p:sp>
+      <p:sp>
+        <p:nvSpPr>
+          <p:cNvPr id="4" name="Slide Number Placeholder 3"/>
+          <p:cNvSpPr>
+            <a:spLocks noGrp="1"/>
+          </p:cNvSpPr>
+          <p:nvPr>
+            <p:ph type="sldNum" idx="5" sz="quarter"/>
+          </p:nvPr>
+        </p:nvSpPr>
+        <p:spPr/>
+      </p:sp>
+    </p:spTree>
+  </p:cSld>
+  <p:clrMapOvr>
+    <a:masterClrMapping/>
+  </p:clrMapOvr>
+</p:notes>
+</file>
+
+<file path=ppt/notesSlides/notesSlide4.xml><?xml version="1.0" encoding="utf-8"?>
+<p:notes xmlns:a="http://schemas.openxmlformats.org/drawingml/2006/main" xmlns:p="http://schemas.openxmlformats.org/presentationml/2006/main" xmlns:r="http://schemas.openxmlformats.org/officeDocument/2006/relationships">
+  <p:cSld>
+    <p:spTree>
+      <p:nvGrpSpPr>
+        <p:cNvPr id="1" name=""/>
+        <p:cNvGrpSpPr/>
+        <p:nvPr/>
+      </p:nvGrpSpPr>
+      <p:grpSpPr>
+        <a:xfrm>
+          <a:off x="0" y="0"/>
+          <a:ext cx="0" cy="0"/>
+          <a:chOff x="0" y="0"/>
+          <a:chExt cx="0" cy="0"/>
+        </a:xfrm>
+      </p:grpSpPr>
+      <p:sp>
+        <p:nvSpPr>
+          <p:cNvPr id="2" name="Slide Image Placeholder 1"/>
+          <p:cNvSpPr>
+            <a:spLocks noGrp="1"/>
+          </p:cNvSpPr>
+          <p:nvPr>
+            <p:ph type="sldImg" idx="2"/>
+          </p:nvPr>
+        </p:nvSpPr>
+        <p:spPr/>
+      </p:sp>
+      <p:sp>
+        <p:nvSpPr>
+          <p:cNvPr id="3" name="Notes Placeholder 2"/>
+          <p:cNvSpPr>
+            <a:spLocks noGrp="1"/>
+          </p:cNvSpPr>
+          <p:nvPr>
+            <p:ph type="body" idx="3" sz="quarter"/>
+          </p:nvPr>
+        </p:nvSpPr>
+        <p:spPr/>
+        <p:txBody>
+          <a:bodyPr/>
+          <a:lstStyle/>
+          <a:p>
+            <a:r>
+              <a:t>Give students a few minutes to answer on mini whiteboards or paper, then reveal the answers on the next slide.</a:t>
+            </a:r>
+          </a:p>
+        </p:txBody>
+      </p:sp>
+      <p:sp>
+        <p:nvSpPr>
+          <p:cNvPr id="4" name="Slide Number Placeholder 3"/>
+          <p:cNvSpPr>
+            <a:spLocks noGrp="1"/>
+          </p:cNvSpPr>
+          <p:nvPr>
+            <p:ph type="sldNum" idx="5" sz="quarter"/>
+          </p:nvPr>
+        </p:nvSpPr>
+        <p:spPr/>
+      </p:sp>
+    </p:spTree>
+  </p:cSld>
+  <p:clrMapOvr>
+    <a:masterClrMapping/>
+  </p:clrMapOvr>
+</p:notes>
+</file>
+
+<file path=ppt/notesSlides/notesSlide5.xml><?xml version="1.0" encoding="utf-8"?>
+<p:notes xmlns:a="http://schemas.openxmlformats.org/drawingml/2006/main" xmlns:p="http://schemas.openxmlformats.org/presentationml/2006/main" xmlns:r="http://schemas.openxmlformats.org/officeDocument/2006/relationships">
+  <p:cSld>
+    <p:spTree>
+      <p:nvGrpSpPr>
+        <p:cNvPr id="1" name=""/>
+        <p:cNvGrpSpPr/>
+        <p:nvPr/>
+      </p:nvGrpSpPr>
+      <p:grpSpPr>
+        <a:xfrm>
+          <a:off x="0" y="0"/>
+          <a:ext cx="0" cy="0"/>
+          <a:chOff x="0" y="0"/>
+          <a:chExt cx="0" cy="0"/>
+        </a:xfrm>
+      </p:grpSpPr>
+      <p:sp>
+        <p:nvSpPr>
+          <p:cNvPr id="2" name="Slide Image Placeholder 1"/>
+          <p:cNvSpPr>
+            <a:spLocks noGrp="1"/>
+          </p:cNvSpPr>
+          <p:nvPr>
+            <p:ph type="sldImg" idx="2"/>
+          </p:nvPr>
+        </p:nvSpPr>
+        <p:spPr/>
+      </p:sp>
+      <p:sp>
+        <p:nvSpPr>
+          <p:cNvPr id="3" name="Notes Placeholder 2"/>
+          <p:cNvSpPr>
+            <a:spLocks noGrp="1"/>
+          </p:cNvSpPr>
+          <p:nvPr>
+            <p:ph type="body" idx="3" sz="quarter"/>
+          </p:nvPr>
+        </p:nvSpPr>
+        <p:spPr/>
+        <p:txBody>
+          <a:bodyPr/>
+          <a:lstStyle/>
+          <a:p>
+            <a:r>
+              <a:t>Talk through any answers the class found difficult.</a:t>
+            </a:r>
+          </a:p>
+        </p:txBody>
+      </p:sp>
+      <p:sp>
+        <p:nvSpPr>
+          <p:cNvPr id="4" name="Slide Number Placeholder 3"/>
+          <p:cNvSpPr>
+            <a:spLocks noGrp="1"/>
+          </p:cNvSpPr>
+          <p:nvPr>
+            <p:ph type="sldNum" idx="5" sz="quarter"/>
+          </p:nvPr>
+        </p:nvSpPr>
+        <p:spPr/>
+      </p:sp>
+    </p:spTree>
+  </p:cSld>
+  <p:clrMapOvr>
+    <a:masterClrMapping/>
+  </p:clrMapOvr>
+</p:notes>
+</file>
+
+<file path=ppt/notesSlides/notesSlide6.xml><?xml version="1.0" encoding="utf-8"?>
 <p:notes xmlns:a="http://schemas.openxmlformats.org/drawingml/2006/main" xmlns:p="http://schemas.openxmlformats.org/presentationml/2006/main" xmlns:r="http://schemas.openxmlformats.org/officeDocument/2006/relationships">
   <p:cSld>
     <p:spTree>
@@ -3975,6 +4236,3397 @@
 </p:sld>
 </file>
 
+<file path=ppt/slides/slide10.xml><?xml version="1.0" encoding="utf-8"?>
+<p:sld xmlns:a="http://schemas.openxmlformats.org/drawingml/2006/main" xmlns:p="http://schemas.openxmlformats.org/presentationml/2006/main" xmlns:r="http://schemas.openxmlformats.org/officeDocument/2006/relationships">
+  <p:cSld>
+    <p:bg>
+      <p:bgPr>
+        <a:solidFill>
+          <a:srgbClr val="FFFFFF"/>
+        </a:solidFill>
+        <a:effectLst/>
+      </p:bgPr>
+    </p:bg>
+    <p:spTree>
+      <p:nvGrpSpPr>
+        <p:cNvPr id="1" name=""/>
+        <p:cNvGrpSpPr/>
+        <p:nvPr/>
+      </p:nvGrpSpPr>
+      <p:grpSpPr/>
+      <p:sp>
+        <p:nvSpPr>
+          <p:cNvPr id="2" name="TextBox 1"/>
+          <p:cNvSpPr txBox="1"/>
+          <p:nvPr/>
+        </p:nvSpPr>
+        <p:spPr>
+          <a:xfrm>
+            <a:off x="548640" y="320040"/>
+            <a:ext cx="11094415" cy="274320"/>
+          </a:xfrm>
+          <a:prstGeom prst="rect">
+            <a:avLst/>
+          </a:prstGeom>
+          <a:noFill/>
+        </p:spPr>
+        <p:txBody>
+          <a:bodyPr wrap="square" anchor="t" lIns="0" rIns="0" tIns="0" bIns="0"/>
+          <a:lstStyle/>
+          <a:p>
+            <a:pPr algn="l"/>
+            <a:r>
+              <a:rPr sz="1100" b="1" i="0">
+                <a:solidFill>
+                  <a:srgbClr val="54595D"/>
+                </a:solidFill>
+                <a:latin typeface="Calibri"/>
+              </a:rPr>
+              <a:t>OCCUPATIONAL SPECIALISM  ·  Specialism Content Area 4</a:t>
+            </a:r>
+          </a:p>
+        </p:txBody>
+      </p:sp>
+      <p:sp>
+        <p:nvSpPr>
+          <p:cNvPr id="3" name="TextBox 2"/>
+          <p:cNvSpPr txBox="1"/>
+          <p:nvPr/>
+        </p:nvSpPr>
+        <p:spPr>
+          <a:xfrm>
+            <a:off x="548640" y="566928"/>
+            <a:ext cx="11094415" cy="822960"/>
+          </a:xfrm>
+          <a:prstGeom prst="rect">
+            <a:avLst/>
+          </a:prstGeom>
+          <a:noFill/>
+        </p:spPr>
+        <p:txBody>
+          <a:bodyPr wrap="square" anchor="ctr" lIns="0" rIns="0" tIns="0" bIns="0"/>
+          <a:lstStyle/>
+          <a:p>
+            <a:pPr algn="l"/>
+            <a:r>
+              <a:rPr sz="3200" b="1" i="0">
+                <a:solidFill>
+                  <a:srgbClr val="03306E"/>
+                </a:solidFill>
+                <a:latin typeface="Cambria"/>
+              </a:rPr>
+              <a:t>BDD and functional design</a:t>
+            </a:r>
+          </a:p>
+        </p:txBody>
+      </p:sp>
+      <p:sp>
+        <p:nvSpPr>
+          <p:cNvPr id="4" name="TextBox 3"/>
+          <p:cNvSpPr txBox="1"/>
+          <p:nvPr/>
+        </p:nvSpPr>
+        <p:spPr>
+          <a:xfrm>
+            <a:off x="548640" y="6446520"/>
+            <a:ext cx="8229600" cy="274320"/>
+          </a:xfrm>
+          <a:prstGeom prst="rect">
+            <a:avLst/>
+          </a:prstGeom>
+          <a:noFill/>
+        </p:spPr>
+        <p:txBody>
+          <a:bodyPr wrap="square" anchor="t" lIns="0" rIns="0" tIns="0" bIns="0"/>
+          <a:lstStyle/>
+          <a:p>
+            <a:pPr algn="l"/>
+            <a:r>
+              <a:rPr sz="1000" b="0" i="0">
+                <a:solidFill>
+                  <a:srgbClr val="54595D"/>
+                </a:solidFill>
+                <a:latin typeface="Calibri"/>
+              </a:rPr>
+              <a:t>Digital Software Development T Level  ·  Software Design Approaches</a:t>
+            </a:r>
+          </a:p>
+        </p:txBody>
+      </p:sp>
+      <p:sp>
+        <p:nvSpPr>
+          <p:cNvPr id="5" name="TextBox 4"/>
+          <p:cNvSpPr txBox="1"/>
+          <p:nvPr/>
+        </p:nvSpPr>
+        <p:spPr>
+          <a:xfrm>
+            <a:off x="10728655" y="6446520"/>
+            <a:ext cx="914400" cy="274320"/>
+          </a:xfrm>
+          <a:prstGeom prst="rect">
+            <a:avLst/>
+          </a:prstGeom>
+          <a:noFill/>
+        </p:spPr>
+        <p:txBody>
+          <a:bodyPr wrap="square" anchor="t" lIns="0" rIns="0" tIns="0" bIns="0"/>
+          <a:lstStyle/>
+          <a:p>
+            <a:pPr algn="r"/>
+            <a:r>
+              <a:rPr sz="1000" b="0" i="0">
+                <a:solidFill>
+                  <a:srgbClr val="54595D"/>
+                </a:solidFill>
+                <a:latin typeface="Calibri"/>
+              </a:rPr>
+              <a:t>10</a:t>
+            </a:r>
+          </a:p>
+        </p:txBody>
+      </p:sp>
+      <p:sp>
+        <p:nvSpPr>
+          <p:cNvPr id="6" name="Rounded Rectangle 5"/>
+          <p:cNvSpPr/>
+          <p:nvPr/>
+        </p:nvSpPr>
+        <p:spPr>
+          <a:xfrm>
+            <a:off x="548640" y="1600200"/>
+            <a:ext cx="5364327" cy="640080"/>
+          </a:xfrm>
+          <a:prstGeom prst="roundRect">
+            <a:avLst>
+              <a:gd name="adj" fmla="val 15000"/>
+            </a:avLst>
+          </a:prstGeom>
+          <a:solidFill>
+            <a:srgbClr val="03306E"/>
+          </a:solidFill>
+          <a:ln>
+            <a:noFill/>
+          </a:ln>
+          <a:effectLst/>
+        </p:spPr>
+        <p:style>
+          <a:lnRef idx="1">
+            <a:schemeClr val="accent1"/>
+          </a:lnRef>
+          <a:fillRef idx="3">
+            <a:schemeClr val="accent1"/>
+          </a:fillRef>
+          <a:effectRef idx="2">
+            <a:schemeClr val="accent1"/>
+          </a:effectRef>
+          <a:fontRef idx="minor">
+            <a:schemeClr val="lt1"/>
+          </a:fontRef>
+        </p:style>
+        <p:txBody>
+          <a:bodyPr rtlCol="0" anchor="ctr"/>
+          <a:lstStyle/>
+          <a:p/>
+        </p:txBody>
+      </p:sp>
+      <p:sp>
+        <p:nvSpPr>
+          <p:cNvPr id="7" name="TextBox 6"/>
+          <p:cNvSpPr txBox="1"/>
+          <p:nvPr/>
+        </p:nvSpPr>
+        <p:spPr>
+          <a:xfrm>
+            <a:off x="777240" y="1600200"/>
+            <a:ext cx="4907127" cy="640080"/>
+          </a:xfrm>
+          <a:prstGeom prst="rect">
+            <a:avLst/>
+          </a:prstGeom>
+          <a:noFill/>
+        </p:spPr>
+        <p:txBody>
+          <a:bodyPr wrap="square" anchor="ctr" lIns="0" rIns="0" tIns="0" bIns="0"/>
+          <a:lstStyle/>
+          <a:p>
+            <a:pPr algn="l"/>
+            <a:r>
+              <a:rPr sz="2000" b="1" i="0">
+                <a:solidFill>
+                  <a:srgbClr val="FFFFFF"/>
+                </a:solidFill>
+                <a:latin typeface="Calibri"/>
+              </a:rPr>
+              <a:t>Behaviour-driven development</a:t>
+            </a:r>
+          </a:p>
+        </p:txBody>
+      </p:sp>
+      <p:sp>
+        <p:nvSpPr>
+          <p:cNvPr id="8" name="Rounded Rectangle 7"/>
+          <p:cNvSpPr/>
+          <p:nvPr/>
+        </p:nvSpPr>
+        <p:spPr>
+          <a:xfrm>
+            <a:off x="548640" y="2377440"/>
+            <a:ext cx="5364327" cy="3794760"/>
+          </a:xfrm>
+          <a:prstGeom prst="roundRect">
+            <a:avLst>
+              <a:gd name="adj" fmla="val 4000"/>
+            </a:avLst>
+          </a:prstGeom>
+          <a:solidFill>
+            <a:srgbClr val="EAF3FF"/>
+          </a:solidFill>
+          <a:ln>
+            <a:noFill/>
+          </a:ln>
+          <a:effectLst/>
+        </p:spPr>
+        <p:style>
+          <a:lnRef idx="1">
+            <a:schemeClr val="accent1"/>
+          </a:lnRef>
+          <a:fillRef idx="3">
+            <a:schemeClr val="accent1"/>
+          </a:fillRef>
+          <a:effectRef idx="2">
+            <a:schemeClr val="accent1"/>
+          </a:effectRef>
+          <a:fontRef idx="minor">
+            <a:schemeClr val="lt1"/>
+          </a:fontRef>
+        </p:style>
+        <p:txBody>
+          <a:bodyPr rtlCol="0" anchor="ctr"/>
+          <a:lstStyle/>
+          <a:p/>
+        </p:txBody>
+      </p:sp>
+      <p:sp>
+        <p:nvSpPr>
+          <p:cNvPr id="9" name="TextBox 8"/>
+          <p:cNvSpPr txBox="1"/>
+          <p:nvPr/>
+        </p:nvSpPr>
+        <p:spPr>
+          <a:xfrm>
+            <a:off x="822959" y="2606040"/>
+            <a:ext cx="4815687" cy="3337560"/>
+          </a:xfrm>
+          <a:prstGeom prst="rect">
+            <a:avLst/>
+          </a:prstGeom>
+          <a:noFill/>
+        </p:spPr>
+        <p:txBody>
+          <a:bodyPr wrap="square" lIns="0" rIns="0" tIns="0" bIns="0">
+            <a:spAutoFit/>
+          </a:bodyPr>
+          <a:lstStyle/>
+          <a:p>
+            <a:pPr marL="274320" indent="-274320">
+              <a:spcAft>
+                <a:spcPts val="990"/>
+              </a:spcAft>
+              <a:buClr>
+                <a:srgbClr val="0645AD"/>
+              </a:buClr>
+              <a:buFont typeface="Arial"/>
+              <a:buChar char="•"/>
+            </a:pPr>
+            <a:r>
+              <a:rPr sz="2200" b="0">
+                <a:solidFill>
+                  <a:srgbClr val="202122"/>
+                </a:solidFill>
+                <a:latin typeface="Calibri"/>
+              </a:rPr>
+              <a:t>Required behaviour specified before coding</a:t>
+            </a:r>
+          </a:p>
+          <a:p>
+            <a:pPr marL="274320" indent="-274320">
+              <a:spcAft>
+                <a:spcPts val="990"/>
+              </a:spcAft>
+              <a:buClr>
+                <a:srgbClr val="0645AD"/>
+              </a:buClr>
+              <a:buFont typeface="Arial"/>
+              <a:buChar char="•"/>
+            </a:pPr>
+            <a:r>
+              <a:rPr sz="2200" b="0">
+                <a:solidFill>
+                  <a:srgbClr val="202122"/>
+                </a:solidFill>
+                <a:latin typeface="Calibri"/>
+              </a:rPr>
+              <a:t>Behaviours must have business value</a:t>
+            </a:r>
+          </a:p>
+          <a:p>
+            <a:pPr marL="274320" indent="-274320">
+              <a:spcAft>
+                <a:spcPts val="990"/>
+              </a:spcAft>
+              <a:buClr>
+                <a:srgbClr val="0645AD"/>
+              </a:buClr>
+              <a:buFont typeface="Arial"/>
+              <a:buChar char="•"/>
+            </a:pPr>
+            <a:r>
+              <a:rPr sz="2200" b="0">
+                <a:solidFill>
+                  <a:srgbClr val="202122"/>
+                </a:solidFill>
+                <a:latin typeface="Calibri"/>
+              </a:rPr>
+              <a:t>Title, narrative, acceptance criteria</a:t>
+            </a:r>
+          </a:p>
+        </p:txBody>
+      </p:sp>
+      <p:sp>
+        <p:nvSpPr>
+          <p:cNvPr id="10" name="Rounded Rectangle 9"/>
+          <p:cNvSpPr/>
+          <p:nvPr/>
+        </p:nvSpPr>
+        <p:spPr>
+          <a:xfrm>
+            <a:off x="6278727" y="1600200"/>
+            <a:ext cx="5364327" cy="640080"/>
+          </a:xfrm>
+          <a:prstGeom prst="roundRect">
+            <a:avLst>
+              <a:gd name="adj" fmla="val 15000"/>
+            </a:avLst>
+          </a:prstGeom>
+          <a:solidFill>
+            <a:srgbClr val="0645AD"/>
+          </a:solidFill>
+          <a:ln>
+            <a:noFill/>
+          </a:ln>
+          <a:effectLst/>
+        </p:spPr>
+        <p:style>
+          <a:lnRef idx="1">
+            <a:schemeClr val="accent1"/>
+          </a:lnRef>
+          <a:fillRef idx="3">
+            <a:schemeClr val="accent1"/>
+          </a:fillRef>
+          <a:effectRef idx="2">
+            <a:schemeClr val="accent1"/>
+          </a:effectRef>
+          <a:fontRef idx="minor">
+            <a:schemeClr val="lt1"/>
+          </a:fontRef>
+        </p:style>
+        <p:txBody>
+          <a:bodyPr rtlCol="0" anchor="ctr"/>
+          <a:lstStyle/>
+          <a:p/>
+        </p:txBody>
+      </p:sp>
+      <p:sp>
+        <p:nvSpPr>
+          <p:cNvPr id="11" name="TextBox 10"/>
+          <p:cNvSpPr txBox="1"/>
+          <p:nvPr/>
+        </p:nvSpPr>
+        <p:spPr>
+          <a:xfrm>
+            <a:off x="6507327" y="1600200"/>
+            <a:ext cx="4907127" cy="640080"/>
+          </a:xfrm>
+          <a:prstGeom prst="rect">
+            <a:avLst/>
+          </a:prstGeom>
+          <a:noFill/>
+        </p:spPr>
+        <p:txBody>
+          <a:bodyPr wrap="square" anchor="ctr" lIns="0" rIns="0" tIns="0" bIns="0"/>
+          <a:lstStyle/>
+          <a:p>
+            <a:pPr algn="l"/>
+            <a:r>
+              <a:rPr sz="2000" b="1" i="0">
+                <a:solidFill>
+                  <a:srgbClr val="FFFFFF"/>
+                </a:solidFill>
+                <a:latin typeface="Calibri"/>
+              </a:rPr>
+              <a:t>Functional design</a:t>
+            </a:r>
+          </a:p>
+        </p:txBody>
+      </p:sp>
+      <p:sp>
+        <p:nvSpPr>
+          <p:cNvPr id="12" name="Rounded Rectangle 11"/>
+          <p:cNvSpPr/>
+          <p:nvPr/>
+        </p:nvSpPr>
+        <p:spPr>
+          <a:xfrm>
+            <a:off x="6278727" y="2377440"/>
+            <a:ext cx="5364327" cy="3794760"/>
+          </a:xfrm>
+          <a:prstGeom prst="roundRect">
+            <a:avLst>
+              <a:gd name="adj" fmla="val 4000"/>
+            </a:avLst>
+          </a:prstGeom>
+          <a:solidFill>
+            <a:srgbClr val="EAF3FF"/>
+          </a:solidFill>
+          <a:ln>
+            <a:noFill/>
+          </a:ln>
+          <a:effectLst/>
+        </p:spPr>
+        <p:style>
+          <a:lnRef idx="1">
+            <a:schemeClr val="accent1"/>
+          </a:lnRef>
+          <a:fillRef idx="3">
+            <a:schemeClr val="accent1"/>
+          </a:fillRef>
+          <a:effectRef idx="2">
+            <a:schemeClr val="accent1"/>
+          </a:effectRef>
+          <a:fontRef idx="minor">
+            <a:schemeClr val="lt1"/>
+          </a:fontRef>
+        </p:style>
+        <p:txBody>
+          <a:bodyPr rtlCol="0" anchor="ctr"/>
+          <a:lstStyle/>
+          <a:p/>
+        </p:txBody>
+      </p:sp>
+      <p:sp>
+        <p:nvSpPr>
+          <p:cNvPr id="13" name="TextBox 12"/>
+          <p:cNvSpPr txBox="1"/>
+          <p:nvPr/>
+        </p:nvSpPr>
+        <p:spPr>
+          <a:xfrm>
+            <a:off x="6553047" y="2606040"/>
+            <a:ext cx="4815687" cy="3337560"/>
+          </a:xfrm>
+          <a:prstGeom prst="rect">
+            <a:avLst/>
+          </a:prstGeom>
+          <a:noFill/>
+        </p:spPr>
+        <p:txBody>
+          <a:bodyPr wrap="square" lIns="0" rIns="0" tIns="0" bIns="0">
+            <a:spAutoFit/>
+          </a:bodyPr>
+          <a:lstStyle/>
+          <a:p>
+            <a:pPr marL="274320" indent="-274320">
+              <a:spcAft>
+                <a:spcPts val="990"/>
+              </a:spcAft>
+              <a:buClr>
+                <a:srgbClr val="0645AD"/>
+              </a:buClr>
+              <a:buFont typeface="Arial"/>
+              <a:buChar char="•"/>
+            </a:pPr>
+            <a:r>
+              <a:rPr sz="2200" b="0">
+                <a:solidFill>
+                  <a:srgbClr val="202122"/>
+                </a:solidFill>
+                <a:latin typeface="Calibri"/>
+              </a:rPr>
+              <a:t>Modules each perform one function</a:t>
+            </a:r>
+          </a:p>
+          <a:p>
+            <a:pPr marL="274320" indent="-274320">
+              <a:spcAft>
+                <a:spcPts val="990"/>
+              </a:spcAft>
+              <a:buClr>
+                <a:srgbClr val="0645AD"/>
+              </a:buClr>
+              <a:buFont typeface="Arial"/>
+              <a:buChar char="•"/>
+            </a:pPr>
+            <a:r>
+              <a:rPr sz="2200" b="0">
+                <a:solidFill>
+                  <a:srgbClr val="202122"/>
+                </a:solidFill>
+                <a:latin typeface="Calibri"/>
+              </a:rPr>
+              <a:t>Recursion and closures</a:t>
+            </a:r>
+          </a:p>
+          <a:p>
+            <a:pPr marL="274320" indent="-274320">
+              <a:spcAft>
+                <a:spcPts val="990"/>
+              </a:spcAft>
+              <a:buClr>
+                <a:srgbClr val="0645AD"/>
+              </a:buClr>
+              <a:buFont typeface="Arial"/>
+              <a:buChar char="•"/>
+            </a:pPr>
+            <a:r>
+              <a:rPr sz="2200" b="0">
+                <a:solidFill>
+                  <a:srgbClr val="202122"/>
+                </a:solidFill>
+                <a:latin typeface="Calibri"/>
+              </a:rPr>
+              <a:t>First-class, higher-order and anonymous functions</a:t>
+            </a:r>
+          </a:p>
+          <a:p>
+            <a:pPr marL="274320" indent="-274320">
+              <a:spcAft>
+                <a:spcPts val="990"/>
+              </a:spcAft>
+              <a:buClr>
+                <a:srgbClr val="0645AD"/>
+              </a:buClr>
+              <a:buFont typeface="Arial"/>
+              <a:buChar char="•"/>
+            </a:pPr>
+            <a:r>
+              <a:rPr sz="2200" b="0">
+                <a:solidFill>
+                  <a:srgbClr val="202122"/>
+                </a:solidFill>
+                <a:latin typeface="Calibri"/>
+              </a:rPr>
+              <a:t>Currying</a:t>
+            </a:r>
+          </a:p>
+        </p:txBody>
+      </p:sp>
+    </p:spTree>
+  </p:cSld>
+  <p:clrMapOvr>
+    <a:masterClrMapping/>
+  </p:clrMapOvr>
+</p:sld>
+</file>
+
+<file path=ppt/slides/slide11.xml><?xml version="1.0" encoding="utf-8"?>
+<p:sld xmlns:a="http://schemas.openxmlformats.org/drawingml/2006/main" xmlns:p="http://schemas.openxmlformats.org/presentationml/2006/main" xmlns:r="http://schemas.openxmlformats.org/officeDocument/2006/relationships">
+  <p:cSld>
+    <p:bg>
+      <p:bgPr>
+        <a:solidFill>
+          <a:srgbClr val="FFFFFF"/>
+        </a:solidFill>
+        <a:effectLst/>
+      </p:bgPr>
+    </p:bg>
+    <p:spTree>
+      <p:nvGrpSpPr>
+        <p:cNvPr id="1" name=""/>
+        <p:cNvGrpSpPr/>
+        <p:nvPr/>
+      </p:nvGrpSpPr>
+      <p:grpSpPr/>
+      <p:sp>
+        <p:nvSpPr>
+          <p:cNvPr id="2" name="TextBox 1"/>
+          <p:cNvSpPr txBox="1"/>
+          <p:nvPr/>
+        </p:nvSpPr>
+        <p:spPr>
+          <a:xfrm>
+            <a:off x="548640" y="320040"/>
+            <a:ext cx="11094415" cy="274320"/>
+          </a:xfrm>
+          <a:prstGeom prst="rect">
+            <a:avLst/>
+          </a:prstGeom>
+          <a:noFill/>
+        </p:spPr>
+        <p:txBody>
+          <a:bodyPr wrap="square" anchor="t" lIns="0" rIns="0" tIns="0" bIns="0"/>
+          <a:lstStyle/>
+          <a:p>
+            <a:pPr algn="l"/>
+            <a:r>
+              <a:rPr sz="1100" b="1" i="0">
+                <a:solidFill>
+                  <a:srgbClr val="54595D"/>
+                </a:solidFill>
+                <a:latin typeface="Calibri"/>
+              </a:rPr>
+              <a:t>OCCUPATIONAL SPECIALISM  ·  Specialism Content Area 4</a:t>
+            </a:r>
+          </a:p>
+        </p:txBody>
+      </p:sp>
+      <p:sp>
+        <p:nvSpPr>
+          <p:cNvPr id="3" name="TextBox 2"/>
+          <p:cNvSpPr txBox="1"/>
+          <p:nvPr/>
+        </p:nvSpPr>
+        <p:spPr>
+          <a:xfrm>
+            <a:off x="548640" y="566928"/>
+            <a:ext cx="11094415" cy="822960"/>
+          </a:xfrm>
+          <a:prstGeom prst="rect">
+            <a:avLst/>
+          </a:prstGeom>
+          <a:noFill/>
+        </p:spPr>
+        <p:txBody>
+          <a:bodyPr wrap="square" anchor="ctr" lIns="0" rIns="0" tIns="0" bIns="0"/>
+          <a:lstStyle/>
+          <a:p>
+            <a:pPr algn="l"/>
+            <a:r>
+              <a:rPr sz="3200" b="1" i="0">
+                <a:solidFill>
+                  <a:srgbClr val="03306E"/>
+                </a:solidFill>
+                <a:latin typeface="Cambria"/>
+              </a:rPr>
+              <a:t>Quick check: BDD and functional design</a:t>
+            </a:r>
+          </a:p>
+        </p:txBody>
+      </p:sp>
+      <p:sp>
+        <p:nvSpPr>
+          <p:cNvPr id="4" name="TextBox 3"/>
+          <p:cNvSpPr txBox="1"/>
+          <p:nvPr/>
+        </p:nvSpPr>
+        <p:spPr>
+          <a:xfrm>
+            <a:off x="548640" y="6446520"/>
+            <a:ext cx="8229600" cy="274320"/>
+          </a:xfrm>
+          <a:prstGeom prst="rect">
+            <a:avLst/>
+          </a:prstGeom>
+          <a:noFill/>
+        </p:spPr>
+        <p:txBody>
+          <a:bodyPr wrap="square" anchor="t" lIns="0" rIns="0" tIns="0" bIns="0"/>
+          <a:lstStyle/>
+          <a:p>
+            <a:pPr algn="l"/>
+            <a:r>
+              <a:rPr sz="1000" b="0" i="0">
+                <a:solidFill>
+                  <a:srgbClr val="54595D"/>
+                </a:solidFill>
+                <a:latin typeface="Calibri"/>
+              </a:rPr>
+              <a:t>Digital Software Development T Level  ·  Software Design Approaches</a:t>
+            </a:r>
+          </a:p>
+        </p:txBody>
+      </p:sp>
+      <p:sp>
+        <p:nvSpPr>
+          <p:cNvPr id="5" name="TextBox 4"/>
+          <p:cNvSpPr txBox="1"/>
+          <p:nvPr/>
+        </p:nvSpPr>
+        <p:spPr>
+          <a:xfrm>
+            <a:off x="10728655" y="6446520"/>
+            <a:ext cx="914400" cy="274320"/>
+          </a:xfrm>
+          <a:prstGeom prst="rect">
+            <a:avLst/>
+          </a:prstGeom>
+          <a:noFill/>
+        </p:spPr>
+        <p:txBody>
+          <a:bodyPr wrap="square" anchor="t" lIns="0" rIns="0" tIns="0" bIns="0"/>
+          <a:lstStyle/>
+          <a:p>
+            <a:pPr algn="r"/>
+            <a:r>
+              <a:rPr sz="1000" b="0" i="0">
+                <a:solidFill>
+                  <a:srgbClr val="54595D"/>
+                </a:solidFill>
+                <a:latin typeface="Calibri"/>
+              </a:rPr>
+              <a:t>11</a:t>
+            </a:r>
+          </a:p>
+        </p:txBody>
+      </p:sp>
+      <p:sp>
+        <p:nvSpPr>
+          <p:cNvPr id="6" name="Oval 5"/>
+          <p:cNvSpPr/>
+          <p:nvPr/>
+        </p:nvSpPr>
+        <p:spPr>
+          <a:xfrm>
+            <a:off x="548640" y="1691640"/>
+            <a:ext cx="502920" cy="502920"/>
+          </a:xfrm>
+          <a:prstGeom prst="ellipse">
+            <a:avLst/>
+          </a:prstGeom>
+          <a:solidFill>
+            <a:srgbClr val="33C17A"/>
+          </a:solidFill>
+          <a:ln>
+            <a:noFill/>
+          </a:ln>
+          <a:effectLst/>
+        </p:spPr>
+        <p:style>
+          <a:lnRef idx="1">
+            <a:schemeClr val="accent1"/>
+          </a:lnRef>
+          <a:fillRef idx="3">
+            <a:schemeClr val="accent1"/>
+          </a:fillRef>
+          <a:effectRef idx="2">
+            <a:schemeClr val="accent1"/>
+          </a:effectRef>
+          <a:fontRef idx="minor">
+            <a:schemeClr val="lt1"/>
+          </a:fontRef>
+        </p:style>
+        <p:txBody>
+          <a:bodyPr rtlCol="0" anchor="ctr" lIns="0" rIns="0" tIns="0" bIns="0"/>
+          <a:lstStyle/>
+          <a:p>
+            <a:pPr algn="ctr"/>
+            <a:r>
+              <a:rPr sz="1600" b="1">
+                <a:solidFill>
+                  <a:srgbClr val="202122"/>
+                </a:solidFill>
+                <a:latin typeface="Calibri"/>
+              </a:rPr>
+              <a:t>1</a:t>
+            </a:r>
+          </a:p>
+        </p:txBody>
+      </p:sp>
+      <p:sp>
+        <p:nvSpPr>
+          <p:cNvPr id="7" name="TextBox 6"/>
+          <p:cNvSpPr txBox="1"/>
+          <p:nvPr/>
+        </p:nvSpPr>
+        <p:spPr>
+          <a:xfrm>
+            <a:off x="1371600" y="1645920"/>
+            <a:ext cx="10271455" cy="1188720"/>
+          </a:xfrm>
+          <a:prstGeom prst="rect">
+            <a:avLst/>
+          </a:prstGeom>
+          <a:noFill/>
+        </p:spPr>
+        <p:txBody>
+          <a:bodyPr wrap="square" anchor="t" lIns="0" rIns="0" tIns="0" bIns="0"/>
+          <a:lstStyle/>
+          <a:p>
+            <a:pPr algn="l"/>
+            <a:r>
+              <a:rPr sz="2400" b="0" i="0">
+                <a:solidFill>
+                  <a:srgbClr val="202122"/>
+                </a:solidFill>
+                <a:latin typeface="Calibri"/>
+              </a:rPr>
+              <a:t>What format do BDD scenarios often use?</a:t>
+            </a:r>
+          </a:p>
+        </p:txBody>
+      </p:sp>
+      <p:sp>
+        <p:nvSpPr>
+          <p:cNvPr id="8" name="Oval 7"/>
+          <p:cNvSpPr/>
+          <p:nvPr/>
+        </p:nvSpPr>
+        <p:spPr>
+          <a:xfrm>
+            <a:off x="548640" y="3108960"/>
+            <a:ext cx="502920" cy="502920"/>
+          </a:xfrm>
+          <a:prstGeom prst="ellipse">
+            <a:avLst/>
+          </a:prstGeom>
+          <a:solidFill>
+            <a:srgbClr val="33C17A"/>
+          </a:solidFill>
+          <a:ln>
+            <a:noFill/>
+          </a:ln>
+          <a:effectLst/>
+        </p:spPr>
+        <p:style>
+          <a:lnRef idx="1">
+            <a:schemeClr val="accent1"/>
+          </a:lnRef>
+          <a:fillRef idx="3">
+            <a:schemeClr val="accent1"/>
+          </a:fillRef>
+          <a:effectRef idx="2">
+            <a:schemeClr val="accent1"/>
+          </a:effectRef>
+          <a:fontRef idx="minor">
+            <a:schemeClr val="lt1"/>
+          </a:fontRef>
+        </p:style>
+        <p:txBody>
+          <a:bodyPr rtlCol="0" anchor="ctr" lIns="0" rIns="0" tIns="0" bIns="0"/>
+          <a:lstStyle/>
+          <a:p>
+            <a:pPr algn="ctr"/>
+            <a:r>
+              <a:rPr sz="1600" b="1">
+                <a:solidFill>
+                  <a:srgbClr val="202122"/>
+                </a:solidFill>
+                <a:latin typeface="Calibri"/>
+              </a:rPr>
+              <a:t>2</a:t>
+            </a:r>
+          </a:p>
+        </p:txBody>
+      </p:sp>
+      <p:sp>
+        <p:nvSpPr>
+          <p:cNvPr id="9" name="TextBox 8"/>
+          <p:cNvSpPr txBox="1"/>
+          <p:nvPr/>
+        </p:nvSpPr>
+        <p:spPr>
+          <a:xfrm>
+            <a:off x="1371600" y="3063240"/>
+            <a:ext cx="10271455" cy="1188720"/>
+          </a:xfrm>
+          <a:prstGeom prst="rect">
+            <a:avLst/>
+          </a:prstGeom>
+          <a:noFill/>
+        </p:spPr>
+        <p:txBody>
+          <a:bodyPr wrap="square" anchor="t" lIns="0" rIns="0" tIns="0" bIns="0"/>
+          <a:lstStyle/>
+          <a:p>
+            <a:pPr algn="l"/>
+            <a:r>
+              <a:rPr sz="2400" b="0" i="0">
+                <a:solidFill>
+                  <a:srgbClr val="202122"/>
+                </a:solidFill>
+                <a:latin typeface="Calibri"/>
+              </a:rPr>
+              <a:t>What is recursion?</a:t>
+            </a:r>
+          </a:p>
+        </p:txBody>
+      </p:sp>
+      <p:sp>
+        <p:nvSpPr>
+          <p:cNvPr id="10" name="Oval 9"/>
+          <p:cNvSpPr/>
+          <p:nvPr/>
+        </p:nvSpPr>
+        <p:spPr>
+          <a:xfrm>
+            <a:off x="548640" y="4526280"/>
+            <a:ext cx="502920" cy="502920"/>
+          </a:xfrm>
+          <a:prstGeom prst="ellipse">
+            <a:avLst/>
+          </a:prstGeom>
+          <a:solidFill>
+            <a:srgbClr val="33C17A"/>
+          </a:solidFill>
+          <a:ln>
+            <a:noFill/>
+          </a:ln>
+          <a:effectLst/>
+        </p:spPr>
+        <p:style>
+          <a:lnRef idx="1">
+            <a:schemeClr val="accent1"/>
+          </a:lnRef>
+          <a:fillRef idx="3">
+            <a:schemeClr val="accent1"/>
+          </a:fillRef>
+          <a:effectRef idx="2">
+            <a:schemeClr val="accent1"/>
+          </a:effectRef>
+          <a:fontRef idx="minor">
+            <a:schemeClr val="lt1"/>
+          </a:fontRef>
+        </p:style>
+        <p:txBody>
+          <a:bodyPr rtlCol="0" anchor="ctr" lIns="0" rIns="0" tIns="0" bIns="0"/>
+          <a:lstStyle/>
+          <a:p>
+            <a:pPr algn="ctr"/>
+            <a:r>
+              <a:rPr sz="1600" b="1">
+                <a:solidFill>
+                  <a:srgbClr val="202122"/>
+                </a:solidFill>
+                <a:latin typeface="Calibri"/>
+              </a:rPr>
+              <a:t>3</a:t>
+            </a:r>
+          </a:p>
+        </p:txBody>
+      </p:sp>
+      <p:sp>
+        <p:nvSpPr>
+          <p:cNvPr id="11" name="TextBox 10"/>
+          <p:cNvSpPr txBox="1"/>
+          <p:nvPr/>
+        </p:nvSpPr>
+        <p:spPr>
+          <a:xfrm>
+            <a:off x="1371600" y="4480560"/>
+            <a:ext cx="10271455" cy="1188720"/>
+          </a:xfrm>
+          <a:prstGeom prst="rect">
+            <a:avLst/>
+          </a:prstGeom>
+          <a:noFill/>
+        </p:spPr>
+        <p:txBody>
+          <a:bodyPr wrap="square" anchor="t" lIns="0" rIns="0" tIns="0" bIns="0"/>
+          <a:lstStyle/>
+          <a:p>
+            <a:pPr algn="l"/>
+            <a:r>
+              <a:rPr sz="2400" b="0" i="0">
+                <a:solidFill>
+                  <a:srgbClr val="202122"/>
+                </a:solidFill>
+                <a:latin typeface="Calibri"/>
+              </a:rPr>
+              <a:t>What is a higher-order function?</a:t>
+            </a:r>
+          </a:p>
+        </p:txBody>
+      </p:sp>
+      <p:sp>
+        <p:nvSpPr>
+          <p:cNvPr id="12" name="TextBox 11"/>
+          <p:cNvSpPr txBox="1"/>
+          <p:nvPr/>
+        </p:nvSpPr>
+        <p:spPr>
+          <a:xfrm>
+            <a:off x="548640" y="5852160"/>
+            <a:ext cx="11094415" cy="365760"/>
+          </a:xfrm>
+          <a:prstGeom prst="rect">
+            <a:avLst/>
+          </a:prstGeom>
+          <a:noFill/>
+        </p:spPr>
+        <p:txBody>
+          <a:bodyPr wrap="square" anchor="t" lIns="0" rIns="0" tIns="0" bIns="0"/>
+          <a:lstStyle/>
+          <a:p>
+            <a:pPr algn="l"/>
+            <a:r>
+              <a:rPr sz="1300" b="0" i="1">
+                <a:solidFill>
+                  <a:srgbClr val="54595D"/>
+                </a:solidFill>
+                <a:latin typeface="Calibri"/>
+              </a:rPr>
+              <a:t>Answer on mini whiteboards or in your book. Answers are in the speaker notes.</a:t>
+            </a:r>
+          </a:p>
+        </p:txBody>
+      </p:sp>
+    </p:spTree>
+  </p:cSld>
+  <p:clrMapOvr>
+    <a:masterClrMapping/>
+  </p:clrMapOvr>
+</p:sld>
+</file>
+
+<file path=ppt/slides/slide12.xml><?xml version="1.0" encoding="utf-8"?>
+<p:sld xmlns:a="http://schemas.openxmlformats.org/drawingml/2006/main" xmlns:p="http://schemas.openxmlformats.org/presentationml/2006/main" xmlns:r="http://schemas.openxmlformats.org/officeDocument/2006/relationships">
+  <p:cSld>
+    <p:bg>
+      <p:bgPr>
+        <a:solidFill>
+          <a:srgbClr val="FFFFFF"/>
+        </a:solidFill>
+        <a:effectLst/>
+      </p:bgPr>
+    </p:bg>
+    <p:spTree>
+      <p:nvGrpSpPr>
+        <p:cNvPr id="1" name=""/>
+        <p:cNvGrpSpPr/>
+        <p:nvPr/>
+      </p:nvGrpSpPr>
+      <p:grpSpPr/>
+      <p:sp>
+        <p:nvSpPr>
+          <p:cNvPr id="2" name="TextBox 1"/>
+          <p:cNvSpPr txBox="1"/>
+          <p:nvPr/>
+        </p:nvSpPr>
+        <p:spPr>
+          <a:xfrm>
+            <a:off x="548640" y="320040"/>
+            <a:ext cx="11094415" cy="274320"/>
+          </a:xfrm>
+          <a:prstGeom prst="rect">
+            <a:avLst/>
+          </a:prstGeom>
+          <a:noFill/>
+        </p:spPr>
+        <p:txBody>
+          <a:bodyPr wrap="square" anchor="t" lIns="0" rIns="0" tIns="0" bIns="0"/>
+          <a:lstStyle/>
+          <a:p>
+            <a:pPr algn="l"/>
+            <a:r>
+              <a:rPr sz="1100" b="1" i="0">
+                <a:solidFill>
+                  <a:srgbClr val="54595D"/>
+                </a:solidFill>
+                <a:latin typeface="Calibri"/>
+              </a:rPr>
+              <a:t>OCCUPATIONAL SPECIALISM  ·  Specialism Content Area 4</a:t>
+            </a:r>
+          </a:p>
+        </p:txBody>
+      </p:sp>
+      <p:sp>
+        <p:nvSpPr>
+          <p:cNvPr id="3" name="TextBox 2"/>
+          <p:cNvSpPr txBox="1"/>
+          <p:nvPr/>
+        </p:nvSpPr>
+        <p:spPr>
+          <a:xfrm>
+            <a:off x="548640" y="566928"/>
+            <a:ext cx="11094415" cy="822960"/>
+          </a:xfrm>
+          <a:prstGeom prst="rect">
+            <a:avLst/>
+          </a:prstGeom>
+          <a:noFill/>
+        </p:spPr>
+        <p:txBody>
+          <a:bodyPr wrap="square" anchor="ctr" lIns="0" rIns="0" tIns="0" bIns="0"/>
+          <a:lstStyle/>
+          <a:p>
+            <a:pPr algn="l"/>
+            <a:r>
+              <a:rPr sz="3200" b="1" i="0">
+                <a:solidFill>
+                  <a:srgbClr val="03306E"/>
+                </a:solidFill>
+                <a:latin typeface="Cambria"/>
+              </a:rPr>
+              <a:t>Check your understanding</a:t>
+            </a:r>
+          </a:p>
+        </p:txBody>
+      </p:sp>
+      <p:sp>
+        <p:nvSpPr>
+          <p:cNvPr id="4" name="TextBox 3"/>
+          <p:cNvSpPr txBox="1"/>
+          <p:nvPr/>
+        </p:nvSpPr>
+        <p:spPr>
+          <a:xfrm>
+            <a:off x="548640" y="6446520"/>
+            <a:ext cx="8229600" cy="274320"/>
+          </a:xfrm>
+          <a:prstGeom prst="rect">
+            <a:avLst/>
+          </a:prstGeom>
+          <a:noFill/>
+        </p:spPr>
+        <p:txBody>
+          <a:bodyPr wrap="square" anchor="t" lIns="0" rIns="0" tIns="0" bIns="0"/>
+          <a:lstStyle/>
+          <a:p>
+            <a:pPr algn="l"/>
+            <a:r>
+              <a:rPr sz="1000" b="0" i="0">
+                <a:solidFill>
+                  <a:srgbClr val="54595D"/>
+                </a:solidFill>
+                <a:latin typeface="Calibri"/>
+              </a:rPr>
+              <a:t>Digital Software Development T Level  ·  Software Design Approaches</a:t>
+            </a:r>
+          </a:p>
+        </p:txBody>
+      </p:sp>
+      <p:sp>
+        <p:nvSpPr>
+          <p:cNvPr id="5" name="TextBox 4"/>
+          <p:cNvSpPr txBox="1"/>
+          <p:nvPr/>
+        </p:nvSpPr>
+        <p:spPr>
+          <a:xfrm>
+            <a:off x="10728655" y="6446520"/>
+            <a:ext cx="914400" cy="274320"/>
+          </a:xfrm>
+          <a:prstGeom prst="rect">
+            <a:avLst/>
+          </a:prstGeom>
+          <a:noFill/>
+        </p:spPr>
+        <p:txBody>
+          <a:bodyPr wrap="square" anchor="t" lIns="0" rIns="0" tIns="0" bIns="0"/>
+          <a:lstStyle/>
+          <a:p>
+            <a:pPr algn="r"/>
+            <a:r>
+              <a:rPr sz="1000" b="0" i="0">
+                <a:solidFill>
+                  <a:srgbClr val="54595D"/>
+                </a:solidFill>
+                <a:latin typeface="Calibri"/>
+              </a:rPr>
+              <a:t>12</a:t>
+            </a:r>
+          </a:p>
+        </p:txBody>
+      </p:sp>
+      <p:sp>
+        <p:nvSpPr>
+          <p:cNvPr id="6" name="Oval 5"/>
+          <p:cNvSpPr/>
+          <p:nvPr/>
+        </p:nvSpPr>
+        <p:spPr>
+          <a:xfrm>
+            <a:off x="548640" y="1618488"/>
+            <a:ext cx="411480" cy="411480"/>
+          </a:xfrm>
+          <a:prstGeom prst="ellipse">
+            <a:avLst/>
+          </a:prstGeom>
+          <a:solidFill>
+            <a:srgbClr val="33C17A"/>
+          </a:solidFill>
+          <a:ln>
+            <a:noFill/>
+          </a:ln>
+          <a:effectLst/>
+        </p:spPr>
+        <p:style>
+          <a:lnRef idx="1">
+            <a:schemeClr val="accent1"/>
+          </a:lnRef>
+          <a:fillRef idx="3">
+            <a:schemeClr val="accent1"/>
+          </a:fillRef>
+          <a:effectRef idx="2">
+            <a:schemeClr val="accent1"/>
+          </a:effectRef>
+          <a:fontRef idx="minor">
+            <a:schemeClr val="lt1"/>
+          </a:fontRef>
+        </p:style>
+        <p:txBody>
+          <a:bodyPr rtlCol="0" anchor="ctr" lIns="0" rIns="0" tIns="0" bIns="0"/>
+          <a:lstStyle/>
+          <a:p>
+            <a:pPr algn="ctr"/>
+            <a:r>
+              <a:rPr sz="1400" b="1">
+                <a:solidFill>
+                  <a:srgbClr val="202122"/>
+                </a:solidFill>
+                <a:latin typeface="Calibri"/>
+              </a:rPr>
+              <a:t>1</a:t>
+            </a:r>
+          </a:p>
+        </p:txBody>
+      </p:sp>
+      <p:sp>
+        <p:nvSpPr>
+          <p:cNvPr id="7" name="TextBox 6"/>
+          <p:cNvSpPr txBox="1"/>
+          <p:nvPr/>
+        </p:nvSpPr>
+        <p:spPr>
+          <a:xfrm>
+            <a:off x="1234440" y="1600200"/>
+            <a:ext cx="10408615" cy="1030986"/>
+          </a:xfrm>
+          <a:prstGeom prst="rect">
+            <a:avLst/>
+          </a:prstGeom>
+          <a:noFill/>
+        </p:spPr>
+        <p:txBody>
+          <a:bodyPr wrap="square" anchor="t" lIns="0" rIns="0" tIns="0" bIns="0"/>
+          <a:lstStyle/>
+          <a:p>
+            <a:pPr algn="l"/>
+            <a:r>
+              <a:rPr sz="2200" b="0" i="0">
+                <a:solidFill>
+                  <a:srgbClr val="202122"/>
+                </a:solidFill>
+                <a:latin typeface="Calibri"/>
+              </a:rPr>
+              <a:t>What are the four characteristics of OOP?</a:t>
+            </a:r>
+          </a:p>
+        </p:txBody>
+      </p:sp>
+      <p:sp>
+        <p:nvSpPr>
+          <p:cNvPr id="8" name="Oval 7"/>
+          <p:cNvSpPr/>
+          <p:nvPr/>
+        </p:nvSpPr>
+        <p:spPr>
+          <a:xfrm>
+            <a:off x="548640" y="2814066"/>
+            <a:ext cx="411480" cy="411480"/>
+          </a:xfrm>
+          <a:prstGeom prst="ellipse">
+            <a:avLst/>
+          </a:prstGeom>
+          <a:solidFill>
+            <a:srgbClr val="33C17A"/>
+          </a:solidFill>
+          <a:ln>
+            <a:noFill/>
+          </a:ln>
+          <a:effectLst/>
+        </p:spPr>
+        <p:style>
+          <a:lnRef idx="1">
+            <a:schemeClr val="accent1"/>
+          </a:lnRef>
+          <a:fillRef idx="3">
+            <a:schemeClr val="accent1"/>
+          </a:fillRef>
+          <a:effectRef idx="2">
+            <a:schemeClr val="accent1"/>
+          </a:effectRef>
+          <a:fontRef idx="minor">
+            <a:schemeClr val="lt1"/>
+          </a:fontRef>
+        </p:style>
+        <p:txBody>
+          <a:bodyPr rtlCol="0" anchor="ctr" lIns="0" rIns="0" tIns="0" bIns="0"/>
+          <a:lstStyle/>
+          <a:p>
+            <a:pPr algn="ctr"/>
+            <a:r>
+              <a:rPr sz="1400" b="1">
+                <a:solidFill>
+                  <a:srgbClr val="202122"/>
+                </a:solidFill>
+                <a:latin typeface="Calibri"/>
+              </a:rPr>
+              <a:t>2</a:t>
+            </a:r>
+          </a:p>
+        </p:txBody>
+      </p:sp>
+      <p:sp>
+        <p:nvSpPr>
+          <p:cNvPr id="9" name="TextBox 8"/>
+          <p:cNvSpPr txBox="1"/>
+          <p:nvPr/>
+        </p:nvSpPr>
+        <p:spPr>
+          <a:xfrm>
+            <a:off x="1234440" y="2795778"/>
+            <a:ext cx="10408615" cy="1030986"/>
+          </a:xfrm>
+          <a:prstGeom prst="rect">
+            <a:avLst/>
+          </a:prstGeom>
+          <a:noFill/>
+        </p:spPr>
+        <p:txBody>
+          <a:bodyPr wrap="square" anchor="t" lIns="0" rIns="0" tIns="0" bIns="0"/>
+          <a:lstStyle/>
+          <a:p>
+            <a:pPr algn="l"/>
+            <a:r>
+              <a:rPr sz="2200" b="0" i="0">
+                <a:solidFill>
+                  <a:srgbClr val="202122"/>
+                </a:solidFill>
+                <a:latin typeface="Calibri"/>
+              </a:rPr>
+              <a:t>In TDD, what comes first: the test or the code?</a:t>
+            </a:r>
+          </a:p>
+        </p:txBody>
+      </p:sp>
+      <p:sp>
+        <p:nvSpPr>
+          <p:cNvPr id="10" name="Oval 9"/>
+          <p:cNvSpPr/>
+          <p:nvPr/>
+        </p:nvSpPr>
+        <p:spPr>
+          <a:xfrm>
+            <a:off x="548640" y="4009644"/>
+            <a:ext cx="411480" cy="411480"/>
+          </a:xfrm>
+          <a:prstGeom prst="ellipse">
+            <a:avLst/>
+          </a:prstGeom>
+          <a:solidFill>
+            <a:srgbClr val="33C17A"/>
+          </a:solidFill>
+          <a:ln>
+            <a:noFill/>
+          </a:ln>
+          <a:effectLst/>
+        </p:spPr>
+        <p:style>
+          <a:lnRef idx="1">
+            <a:schemeClr val="accent1"/>
+          </a:lnRef>
+          <a:fillRef idx="3">
+            <a:schemeClr val="accent1"/>
+          </a:fillRef>
+          <a:effectRef idx="2">
+            <a:schemeClr val="accent1"/>
+          </a:effectRef>
+          <a:fontRef idx="minor">
+            <a:schemeClr val="lt1"/>
+          </a:fontRef>
+        </p:style>
+        <p:txBody>
+          <a:bodyPr rtlCol="0" anchor="ctr" lIns="0" rIns="0" tIns="0" bIns="0"/>
+          <a:lstStyle/>
+          <a:p>
+            <a:pPr algn="ctr"/>
+            <a:r>
+              <a:rPr sz="1400" b="1">
+                <a:solidFill>
+                  <a:srgbClr val="202122"/>
+                </a:solidFill>
+                <a:latin typeface="Calibri"/>
+              </a:rPr>
+              <a:t>3</a:t>
+            </a:r>
+          </a:p>
+        </p:txBody>
+      </p:sp>
+      <p:sp>
+        <p:nvSpPr>
+          <p:cNvPr id="11" name="TextBox 10"/>
+          <p:cNvSpPr txBox="1"/>
+          <p:nvPr/>
+        </p:nvSpPr>
+        <p:spPr>
+          <a:xfrm>
+            <a:off x="1234440" y="3991356"/>
+            <a:ext cx="10408615" cy="1030986"/>
+          </a:xfrm>
+          <a:prstGeom prst="rect">
+            <a:avLst/>
+          </a:prstGeom>
+          <a:noFill/>
+        </p:spPr>
+        <p:txBody>
+          <a:bodyPr wrap="square" anchor="t" lIns="0" rIns="0" tIns="0" bIns="0"/>
+          <a:lstStyle/>
+          <a:p>
+            <a:pPr algn="l"/>
+            <a:r>
+              <a:rPr sz="2200" b="0" i="0">
+                <a:solidFill>
+                  <a:srgbClr val="202122"/>
+                </a:solidFill>
+                <a:latin typeface="Calibri"/>
+              </a:rPr>
+              <a:t>What is a higher-order function?</a:t>
+            </a:r>
+          </a:p>
+        </p:txBody>
+      </p:sp>
+      <p:sp>
+        <p:nvSpPr>
+          <p:cNvPr id="12" name="Oval 11"/>
+          <p:cNvSpPr/>
+          <p:nvPr/>
+        </p:nvSpPr>
+        <p:spPr>
+          <a:xfrm>
+            <a:off x="548640" y="5205221"/>
+            <a:ext cx="411480" cy="411480"/>
+          </a:xfrm>
+          <a:prstGeom prst="ellipse">
+            <a:avLst/>
+          </a:prstGeom>
+          <a:solidFill>
+            <a:srgbClr val="33C17A"/>
+          </a:solidFill>
+          <a:ln>
+            <a:noFill/>
+          </a:ln>
+          <a:effectLst/>
+        </p:spPr>
+        <p:style>
+          <a:lnRef idx="1">
+            <a:schemeClr val="accent1"/>
+          </a:lnRef>
+          <a:fillRef idx="3">
+            <a:schemeClr val="accent1"/>
+          </a:fillRef>
+          <a:effectRef idx="2">
+            <a:schemeClr val="accent1"/>
+          </a:effectRef>
+          <a:fontRef idx="minor">
+            <a:schemeClr val="lt1"/>
+          </a:fontRef>
+        </p:style>
+        <p:txBody>
+          <a:bodyPr rtlCol="0" anchor="ctr" lIns="0" rIns="0" tIns="0" bIns="0"/>
+          <a:lstStyle/>
+          <a:p>
+            <a:pPr algn="ctr"/>
+            <a:r>
+              <a:rPr sz="1400" b="1">
+                <a:solidFill>
+                  <a:srgbClr val="202122"/>
+                </a:solidFill>
+                <a:latin typeface="Calibri"/>
+              </a:rPr>
+              <a:t>4</a:t>
+            </a:r>
+          </a:p>
+        </p:txBody>
+      </p:sp>
+      <p:sp>
+        <p:nvSpPr>
+          <p:cNvPr id="13" name="TextBox 12"/>
+          <p:cNvSpPr txBox="1"/>
+          <p:nvPr/>
+        </p:nvSpPr>
+        <p:spPr>
+          <a:xfrm>
+            <a:off x="1234440" y="5186933"/>
+            <a:ext cx="10408615" cy="1030986"/>
+          </a:xfrm>
+          <a:prstGeom prst="rect">
+            <a:avLst/>
+          </a:prstGeom>
+          <a:noFill/>
+        </p:spPr>
+        <p:txBody>
+          <a:bodyPr wrap="square" anchor="t" lIns="0" rIns="0" tIns="0" bIns="0"/>
+          <a:lstStyle/>
+          <a:p>
+            <a:pPr algn="l"/>
+            <a:r>
+              <a:rPr sz="2200" b="0" i="0">
+                <a:solidFill>
+                  <a:srgbClr val="202122"/>
+                </a:solidFill>
+                <a:latin typeface="Calibri"/>
+              </a:rPr>
+              <a:t>Which tools support data model design?</a:t>
+            </a:r>
+          </a:p>
+        </p:txBody>
+      </p:sp>
+    </p:spTree>
+  </p:cSld>
+  <p:clrMapOvr>
+    <a:masterClrMapping/>
+  </p:clrMapOvr>
+</p:sld>
+</file>
+
+<file path=ppt/slides/slide13.xml><?xml version="1.0" encoding="utf-8"?>
+<p:sld xmlns:a="http://schemas.openxmlformats.org/drawingml/2006/main" xmlns:p="http://schemas.openxmlformats.org/presentationml/2006/main" xmlns:r="http://schemas.openxmlformats.org/officeDocument/2006/relationships">
+  <p:cSld>
+    <p:bg>
+      <p:bgPr>
+        <a:solidFill>
+          <a:srgbClr val="FFFFFF"/>
+        </a:solidFill>
+        <a:effectLst/>
+      </p:bgPr>
+    </p:bg>
+    <p:spTree>
+      <p:nvGrpSpPr>
+        <p:cNvPr id="1" name=""/>
+        <p:cNvGrpSpPr/>
+        <p:nvPr/>
+      </p:nvGrpSpPr>
+      <p:grpSpPr/>
+      <p:sp>
+        <p:nvSpPr>
+          <p:cNvPr id="2" name="TextBox 1"/>
+          <p:cNvSpPr txBox="1"/>
+          <p:nvPr/>
+        </p:nvSpPr>
+        <p:spPr>
+          <a:xfrm>
+            <a:off x="548640" y="320040"/>
+            <a:ext cx="11094415" cy="274320"/>
+          </a:xfrm>
+          <a:prstGeom prst="rect">
+            <a:avLst/>
+          </a:prstGeom>
+          <a:noFill/>
+        </p:spPr>
+        <p:txBody>
+          <a:bodyPr wrap="square" anchor="t" lIns="0" rIns="0" tIns="0" bIns="0"/>
+          <a:lstStyle/>
+          <a:p>
+            <a:pPr algn="l"/>
+            <a:r>
+              <a:rPr sz="1100" b="1" i="0">
+                <a:solidFill>
+                  <a:srgbClr val="54595D"/>
+                </a:solidFill>
+                <a:latin typeface="Calibri"/>
+              </a:rPr>
+              <a:t>OCCUPATIONAL SPECIALISM  ·  Specialism Content Area 4</a:t>
+            </a:r>
+          </a:p>
+        </p:txBody>
+      </p:sp>
+      <p:sp>
+        <p:nvSpPr>
+          <p:cNvPr id="3" name="TextBox 2"/>
+          <p:cNvSpPr txBox="1"/>
+          <p:nvPr/>
+        </p:nvSpPr>
+        <p:spPr>
+          <a:xfrm>
+            <a:off x="548640" y="566928"/>
+            <a:ext cx="11094415" cy="822960"/>
+          </a:xfrm>
+          <a:prstGeom prst="rect">
+            <a:avLst/>
+          </a:prstGeom>
+          <a:noFill/>
+        </p:spPr>
+        <p:txBody>
+          <a:bodyPr wrap="square" anchor="ctr" lIns="0" rIns="0" tIns="0" bIns="0"/>
+          <a:lstStyle/>
+          <a:p>
+            <a:pPr algn="l"/>
+            <a:r>
+              <a:rPr sz="3200" b="1" i="0">
+                <a:solidFill>
+                  <a:srgbClr val="03306E"/>
+                </a:solidFill>
+                <a:latin typeface="Cambria"/>
+              </a:rPr>
+              <a:t>Answers</a:t>
+            </a:r>
+          </a:p>
+        </p:txBody>
+      </p:sp>
+      <p:sp>
+        <p:nvSpPr>
+          <p:cNvPr id="4" name="TextBox 3"/>
+          <p:cNvSpPr txBox="1"/>
+          <p:nvPr/>
+        </p:nvSpPr>
+        <p:spPr>
+          <a:xfrm>
+            <a:off x="548640" y="6446520"/>
+            <a:ext cx="8229600" cy="274320"/>
+          </a:xfrm>
+          <a:prstGeom prst="rect">
+            <a:avLst/>
+          </a:prstGeom>
+          <a:noFill/>
+        </p:spPr>
+        <p:txBody>
+          <a:bodyPr wrap="square" anchor="t" lIns="0" rIns="0" tIns="0" bIns="0"/>
+          <a:lstStyle/>
+          <a:p>
+            <a:pPr algn="l"/>
+            <a:r>
+              <a:rPr sz="1000" b="0" i="0">
+                <a:solidFill>
+                  <a:srgbClr val="54595D"/>
+                </a:solidFill>
+                <a:latin typeface="Calibri"/>
+              </a:rPr>
+              <a:t>Digital Software Development T Level  ·  Software Design Approaches</a:t>
+            </a:r>
+          </a:p>
+        </p:txBody>
+      </p:sp>
+      <p:sp>
+        <p:nvSpPr>
+          <p:cNvPr id="5" name="TextBox 4"/>
+          <p:cNvSpPr txBox="1"/>
+          <p:nvPr/>
+        </p:nvSpPr>
+        <p:spPr>
+          <a:xfrm>
+            <a:off x="10728655" y="6446520"/>
+            <a:ext cx="914400" cy="274320"/>
+          </a:xfrm>
+          <a:prstGeom prst="rect">
+            <a:avLst/>
+          </a:prstGeom>
+          <a:noFill/>
+        </p:spPr>
+        <p:txBody>
+          <a:bodyPr wrap="square" anchor="t" lIns="0" rIns="0" tIns="0" bIns="0"/>
+          <a:lstStyle/>
+          <a:p>
+            <a:pPr algn="r"/>
+            <a:r>
+              <a:rPr sz="1000" b="0" i="0">
+                <a:solidFill>
+                  <a:srgbClr val="54595D"/>
+                </a:solidFill>
+                <a:latin typeface="Calibri"/>
+              </a:rPr>
+              <a:t>13</a:t>
+            </a:r>
+          </a:p>
+        </p:txBody>
+      </p:sp>
+      <p:sp>
+        <p:nvSpPr>
+          <p:cNvPr id="6" name="Oval 5"/>
+          <p:cNvSpPr/>
+          <p:nvPr/>
+        </p:nvSpPr>
+        <p:spPr>
+          <a:xfrm>
+            <a:off x="548640" y="1618488"/>
+            <a:ext cx="411480" cy="411480"/>
+          </a:xfrm>
+          <a:prstGeom prst="ellipse">
+            <a:avLst/>
+          </a:prstGeom>
+          <a:solidFill>
+            <a:srgbClr val="33C17A"/>
+          </a:solidFill>
+          <a:ln>
+            <a:noFill/>
+          </a:ln>
+          <a:effectLst/>
+        </p:spPr>
+        <p:style>
+          <a:lnRef idx="1">
+            <a:schemeClr val="accent1"/>
+          </a:lnRef>
+          <a:fillRef idx="3">
+            <a:schemeClr val="accent1"/>
+          </a:fillRef>
+          <a:effectRef idx="2">
+            <a:schemeClr val="accent1"/>
+          </a:effectRef>
+          <a:fontRef idx="minor">
+            <a:schemeClr val="lt1"/>
+          </a:fontRef>
+        </p:style>
+        <p:txBody>
+          <a:bodyPr rtlCol="0" anchor="ctr" lIns="0" rIns="0" tIns="0" bIns="0"/>
+          <a:lstStyle/>
+          <a:p>
+            <a:pPr algn="ctr"/>
+            <a:r>
+              <a:rPr sz="1400" b="1">
+                <a:solidFill>
+                  <a:srgbClr val="202122"/>
+                </a:solidFill>
+                <a:latin typeface="Calibri"/>
+              </a:rPr>
+              <a:t>1</a:t>
+            </a:r>
+          </a:p>
+        </p:txBody>
+      </p:sp>
+      <p:sp>
+        <p:nvSpPr>
+          <p:cNvPr id="7" name="TextBox 6"/>
+          <p:cNvSpPr txBox="1"/>
+          <p:nvPr/>
+        </p:nvSpPr>
+        <p:spPr>
+          <a:xfrm>
+            <a:off x="1234440" y="1600200"/>
+            <a:ext cx="10408615" cy="1030986"/>
+          </a:xfrm>
+          <a:prstGeom prst="rect">
+            <a:avLst/>
+          </a:prstGeom>
+          <a:noFill/>
+        </p:spPr>
+        <p:txBody>
+          <a:bodyPr wrap="square" anchor="t" lIns="0" rIns="0" tIns="0" bIns="0"/>
+          <a:lstStyle/>
+          <a:p>
+            <a:pPr algn="l"/>
+            <a:r>
+              <a:rPr sz="1800" b="0" i="0">
+                <a:solidFill>
+                  <a:srgbClr val="54595D"/>
+                </a:solidFill>
+                <a:latin typeface="Calibri"/>
+              </a:rPr>
+              <a:t>What are the four characteristics of OOP?</a:t>
+            </a:r>
+          </a:p>
+          <a:p>
+            <a:r>
+              <a:rPr sz="1800" b="1">
+                <a:solidFill>
+                  <a:srgbClr val="03306E"/>
+                </a:solidFill>
+                <a:latin typeface="Calibri"/>
+              </a:rPr>
+              <a:t>Encapsulation, data abstraction, polymorphism, inheritance.</a:t>
+            </a:r>
+          </a:p>
+        </p:txBody>
+      </p:sp>
+      <p:sp>
+        <p:nvSpPr>
+          <p:cNvPr id="8" name="Oval 7"/>
+          <p:cNvSpPr/>
+          <p:nvPr/>
+        </p:nvSpPr>
+        <p:spPr>
+          <a:xfrm>
+            <a:off x="548640" y="2814066"/>
+            <a:ext cx="411480" cy="411480"/>
+          </a:xfrm>
+          <a:prstGeom prst="ellipse">
+            <a:avLst/>
+          </a:prstGeom>
+          <a:solidFill>
+            <a:srgbClr val="33C17A"/>
+          </a:solidFill>
+          <a:ln>
+            <a:noFill/>
+          </a:ln>
+          <a:effectLst/>
+        </p:spPr>
+        <p:style>
+          <a:lnRef idx="1">
+            <a:schemeClr val="accent1"/>
+          </a:lnRef>
+          <a:fillRef idx="3">
+            <a:schemeClr val="accent1"/>
+          </a:fillRef>
+          <a:effectRef idx="2">
+            <a:schemeClr val="accent1"/>
+          </a:effectRef>
+          <a:fontRef idx="minor">
+            <a:schemeClr val="lt1"/>
+          </a:fontRef>
+        </p:style>
+        <p:txBody>
+          <a:bodyPr rtlCol="0" anchor="ctr" lIns="0" rIns="0" tIns="0" bIns="0"/>
+          <a:lstStyle/>
+          <a:p>
+            <a:pPr algn="ctr"/>
+            <a:r>
+              <a:rPr sz="1400" b="1">
+                <a:solidFill>
+                  <a:srgbClr val="202122"/>
+                </a:solidFill>
+                <a:latin typeface="Calibri"/>
+              </a:rPr>
+              <a:t>2</a:t>
+            </a:r>
+          </a:p>
+        </p:txBody>
+      </p:sp>
+      <p:sp>
+        <p:nvSpPr>
+          <p:cNvPr id="9" name="TextBox 8"/>
+          <p:cNvSpPr txBox="1"/>
+          <p:nvPr/>
+        </p:nvSpPr>
+        <p:spPr>
+          <a:xfrm>
+            <a:off x="1234440" y="2795778"/>
+            <a:ext cx="10408615" cy="1030986"/>
+          </a:xfrm>
+          <a:prstGeom prst="rect">
+            <a:avLst/>
+          </a:prstGeom>
+          <a:noFill/>
+        </p:spPr>
+        <p:txBody>
+          <a:bodyPr wrap="square" anchor="t" lIns="0" rIns="0" tIns="0" bIns="0"/>
+          <a:lstStyle/>
+          <a:p>
+            <a:pPr algn="l"/>
+            <a:r>
+              <a:rPr sz="1800" b="0" i="0">
+                <a:solidFill>
+                  <a:srgbClr val="54595D"/>
+                </a:solidFill>
+                <a:latin typeface="Calibri"/>
+              </a:rPr>
+              <a:t>In TDD, what comes first: the test or the code?</a:t>
+            </a:r>
+          </a:p>
+          <a:p>
+            <a:r>
+              <a:rPr sz="1800" b="1">
+                <a:solidFill>
+                  <a:srgbClr val="03306E"/>
+                </a:solidFill>
+                <a:latin typeface="Calibri"/>
+              </a:rPr>
+              <a:t>The test.</a:t>
+            </a:r>
+          </a:p>
+        </p:txBody>
+      </p:sp>
+      <p:sp>
+        <p:nvSpPr>
+          <p:cNvPr id="10" name="Oval 9"/>
+          <p:cNvSpPr/>
+          <p:nvPr/>
+        </p:nvSpPr>
+        <p:spPr>
+          <a:xfrm>
+            <a:off x="548640" y="4009644"/>
+            <a:ext cx="411480" cy="411480"/>
+          </a:xfrm>
+          <a:prstGeom prst="ellipse">
+            <a:avLst/>
+          </a:prstGeom>
+          <a:solidFill>
+            <a:srgbClr val="33C17A"/>
+          </a:solidFill>
+          <a:ln>
+            <a:noFill/>
+          </a:ln>
+          <a:effectLst/>
+        </p:spPr>
+        <p:style>
+          <a:lnRef idx="1">
+            <a:schemeClr val="accent1"/>
+          </a:lnRef>
+          <a:fillRef idx="3">
+            <a:schemeClr val="accent1"/>
+          </a:fillRef>
+          <a:effectRef idx="2">
+            <a:schemeClr val="accent1"/>
+          </a:effectRef>
+          <a:fontRef idx="minor">
+            <a:schemeClr val="lt1"/>
+          </a:fontRef>
+        </p:style>
+        <p:txBody>
+          <a:bodyPr rtlCol="0" anchor="ctr" lIns="0" rIns="0" tIns="0" bIns="0"/>
+          <a:lstStyle/>
+          <a:p>
+            <a:pPr algn="ctr"/>
+            <a:r>
+              <a:rPr sz="1400" b="1">
+                <a:solidFill>
+                  <a:srgbClr val="202122"/>
+                </a:solidFill>
+                <a:latin typeface="Calibri"/>
+              </a:rPr>
+              <a:t>3</a:t>
+            </a:r>
+          </a:p>
+        </p:txBody>
+      </p:sp>
+      <p:sp>
+        <p:nvSpPr>
+          <p:cNvPr id="11" name="TextBox 10"/>
+          <p:cNvSpPr txBox="1"/>
+          <p:nvPr/>
+        </p:nvSpPr>
+        <p:spPr>
+          <a:xfrm>
+            <a:off x="1234440" y="3991356"/>
+            <a:ext cx="10408615" cy="1030986"/>
+          </a:xfrm>
+          <a:prstGeom prst="rect">
+            <a:avLst/>
+          </a:prstGeom>
+          <a:noFill/>
+        </p:spPr>
+        <p:txBody>
+          <a:bodyPr wrap="square" anchor="t" lIns="0" rIns="0" tIns="0" bIns="0"/>
+          <a:lstStyle/>
+          <a:p>
+            <a:pPr algn="l"/>
+            <a:r>
+              <a:rPr sz="1800" b="0" i="0">
+                <a:solidFill>
+                  <a:srgbClr val="54595D"/>
+                </a:solidFill>
+                <a:latin typeface="Calibri"/>
+              </a:rPr>
+              <a:t>What is a higher-order function?</a:t>
+            </a:r>
+          </a:p>
+          <a:p>
+            <a:r>
+              <a:rPr sz="1800" b="1">
+                <a:solidFill>
+                  <a:srgbClr val="03306E"/>
+                </a:solidFill>
+                <a:latin typeface="Calibri"/>
+              </a:rPr>
+              <a:t>A function that takes or returns another function.</a:t>
+            </a:r>
+          </a:p>
+        </p:txBody>
+      </p:sp>
+      <p:sp>
+        <p:nvSpPr>
+          <p:cNvPr id="12" name="Oval 11"/>
+          <p:cNvSpPr/>
+          <p:nvPr/>
+        </p:nvSpPr>
+        <p:spPr>
+          <a:xfrm>
+            <a:off x="548640" y="5205221"/>
+            <a:ext cx="411480" cy="411480"/>
+          </a:xfrm>
+          <a:prstGeom prst="ellipse">
+            <a:avLst/>
+          </a:prstGeom>
+          <a:solidFill>
+            <a:srgbClr val="33C17A"/>
+          </a:solidFill>
+          <a:ln>
+            <a:noFill/>
+          </a:ln>
+          <a:effectLst/>
+        </p:spPr>
+        <p:style>
+          <a:lnRef idx="1">
+            <a:schemeClr val="accent1"/>
+          </a:lnRef>
+          <a:fillRef idx="3">
+            <a:schemeClr val="accent1"/>
+          </a:fillRef>
+          <a:effectRef idx="2">
+            <a:schemeClr val="accent1"/>
+          </a:effectRef>
+          <a:fontRef idx="minor">
+            <a:schemeClr val="lt1"/>
+          </a:fontRef>
+        </p:style>
+        <p:txBody>
+          <a:bodyPr rtlCol="0" anchor="ctr" lIns="0" rIns="0" tIns="0" bIns="0"/>
+          <a:lstStyle/>
+          <a:p>
+            <a:pPr algn="ctr"/>
+            <a:r>
+              <a:rPr sz="1400" b="1">
+                <a:solidFill>
+                  <a:srgbClr val="202122"/>
+                </a:solidFill>
+                <a:latin typeface="Calibri"/>
+              </a:rPr>
+              <a:t>4</a:t>
+            </a:r>
+          </a:p>
+        </p:txBody>
+      </p:sp>
+      <p:sp>
+        <p:nvSpPr>
+          <p:cNvPr id="13" name="TextBox 12"/>
+          <p:cNvSpPr txBox="1"/>
+          <p:nvPr/>
+        </p:nvSpPr>
+        <p:spPr>
+          <a:xfrm>
+            <a:off x="1234440" y="5186933"/>
+            <a:ext cx="10408615" cy="1030986"/>
+          </a:xfrm>
+          <a:prstGeom prst="rect">
+            <a:avLst/>
+          </a:prstGeom>
+          <a:noFill/>
+        </p:spPr>
+        <p:txBody>
+          <a:bodyPr wrap="square" anchor="t" lIns="0" rIns="0" tIns="0" bIns="0"/>
+          <a:lstStyle/>
+          <a:p>
+            <a:pPr algn="l"/>
+            <a:r>
+              <a:rPr sz="1800" b="0" i="0">
+                <a:solidFill>
+                  <a:srgbClr val="54595D"/>
+                </a:solidFill>
+                <a:latin typeface="Calibri"/>
+              </a:rPr>
+              <a:t>Which tools support data model design?</a:t>
+            </a:r>
+          </a:p>
+          <a:p>
+            <a:r>
+              <a:rPr sz="1800" b="1">
+                <a:solidFill>
+                  <a:srgbClr val="03306E"/>
+                </a:solidFill>
+                <a:latin typeface="Calibri"/>
+              </a:rPr>
+              <a:t>E-R models and UML.</a:t>
+            </a:r>
+          </a:p>
+        </p:txBody>
+      </p:sp>
+    </p:spTree>
+  </p:cSld>
+  <p:clrMapOvr>
+    <a:masterClrMapping/>
+  </p:clrMapOvr>
+</p:sld>
+</file>
+
+<file path=ppt/slides/slide14.xml><?xml version="1.0" encoding="utf-8"?>
+<p:sld xmlns:a="http://schemas.openxmlformats.org/drawingml/2006/main" xmlns:p="http://schemas.openxmlformats.org/presentationml/2006/main" xmlns:r="http://schemas.openxmlformats.org/officeDocument/2006/relationships">
+  <p:cSld>
+    <p:bg>
+      <p:bgPr>
+        <a:solidFill>
+          <a:srgbClr val="FFFFFF"/>
+        </a:solidFill>
+        <a:effectLst/>
+      </p:bgPr>
+    </p:bg>
+    <p:spTree>
+      <p:nvGrpSpPr>
+        <p:cNvPr id="1" name=""/>
+        <p:cNvGrpSpPr/>
+        <p:nvPr/>
+      </p:nvGrpSpPr>
+      <p:grpSpPr/>
+      <p:sp>
+        <p:nvSpPr>
+          <p:cNvPr id="2" name="TextBox 1"/>
+          <p:cNvSpPr txBox="1"/>
+          <p:nvPr/>
+        </p:nvSpPr>
+        <p:spPr>
+          <a:xfrm>
+            <a:off x="548640" y="320040"/>
+            <a:ext cx="11094415" cy="274320"/>
+          </a:xfrm>
+          <a:prstGeom prst="rect">
+            <a:avLst/>
+          </a:prstGeom>
+          <a:noFill/>
+        </p:spPr>
+        <p:txBody>
+          <a:bodyPr wrap="square" anchor="t" lIns="0" rIns="0" tIns="0" bIns="0"/>
+          <a:lstStyle/>
+          <a:p>
+            <a:pPr algn="l"/>
+            <a:r>
+              <a:rPr sz="1100" b="1" i="0">
+                <a:solidFill>
+                  <a:srgbClr val="54595D"/>
+                </a:solidFill>
+                <a:latin typeface="Calibri"/>
+              </a:rPr>
+              <a:t>OCCUPATIONAL SPECIALISM  ·  Specialism Content Area 4</a:t>
+            </a:r>
+          </a:p>
+        </p:txBody>
+      </p:sp>
+      <p:sp>
+        <p:nvSpPr>
+          <p:cNvPr id="3" name="TextBox 2"/>
+          <p:cNvSpPr txBox="1"/>
+          <p:nvPr/>
+        </p:nvSpPr>
+        <p:spPr>
+          <a:xfrm>
+            <a:off x="548640" y="566928"/>
+            <a:ext cx="11094415" cy="822960"/>
+          </a:xfrm>
+          <a:prstGeom prst="rect">
+            <a:avLst/>
+          </a:prstGeom>
+          <a:noFill/>
+        </p:spPr>
+        <p:txBody>
+          <a:bodyPr wrap="square" anchor="ctr" lIns="0" rIns="0" tIns="0" bIns="0"/>
+          <a:lstStyle/>
+          <a:p>
+            <a:pPr algn="l"/>
+            <a:r>
+              <a:rPr sz="3200" b="1" i="0">
+                <a:solidFill>
+                  <a:srgbClr val="03306E"/>
+                </a:solidFill>
+                <a:latin typeface="Cambria"/>
+              </a:rPr>
+              <a:t>Activity: TDD kata</a:t>
+            </a:r>
+          </a:p>
+        </p:txBody>
+      </p:sp>
+      <p:sp>
+        <p:nvSpPr>
+          <p:cNvPr id="4" name="TextBox 3"/>
+          <p:cNvSpPr txBox="1"/>
+          <p:nvPr/>
+        </p:nvSpPr>
+        <p:spPr>
+          <a:xfrm>
+            <a:off x="548640" y="6446520"/>
+            <a:ext cx="8229600" cy="274320"/>
+          </a:xfrm>
+          <a:prstGeom prst="rect">
+            <a:avLst/>
+          </a:prstGeom>
+          <a:noFill/>
+        </p:spPr>
+        <p:txBody>
+          <a:bodyPr wrap="square" anchor="t" lIns="0" rIns="0" tIns="0" bIns="0"/>
+          <a:lstStyle/>
+          <a:p>
+            <a:pPr algn="l"/>
+            <a:r>
+              <a:rPr sz="1000" b="0" i="0">
+                <a:solidFill>
+                  <a:srgbClr val="54595D"/>
+                </a:solidFill>
+                <a:latin typeface="Calibri"/>
+              </a:rPr>
+              <a:t>Digital Software Development T Level  ·  Software Design Approaches</a:t>
+            </a:r>
+          </a:p>
+        </p:txBody>
+      </p:sp>
+      <p:sp>
+        <p:nvSpPr>
+          <p:cNvPr id="5" name="TextBox 4"/>
+          <p:cNvSpPr txBox="1"/>
+          <p:nvPr/>
+        </p:nvSpPr>
+        <p:spPr>
+          <a:xfrm>
+            <a:off x="10728655" y="6446520"/>
+            <a:ext cx="914400" cy="274320"/>
+          </a:xfrm>
+          <a:prstGeom prst="rect">
+            <a:avLst/>
+          </a:prstGeom>
+          <a:noFill/>
+        </p:spPr>
+        <p:txBody>
+          <a:bodyPr wrap="square" anchor="t" lIns="0" rIns="0" tIns="0" bIns="0"/>
+          <a:lstStyle/>
+          <a:p>
+            <a:pPr algn="r"/>
+            <a:r>
+              <a:rPr sz="1000" b="0" i="0">
+                <a:solidFill>
+                  <a:srgbClr val="54595D"/>
+                </a:solidFill>
+                <a:latin typeface="Calibri"/>
+              </a:rPr>
+              <a:t>14</a:t>
+            </a:r>
+          </a:p>
+        </p:txBody>
+      </p:sp>
+      <p:sp>
+        <p:nvSpPr>
+          <p:cNvPr id="6" name="Rounded Rectangle 5"/>
+          <p:cNvSpPr/>
+          <p:nvPr/>
+        </p:nvSpPr>
+        <p:spPr>
+          <a:xfrm>
+            <a:off x="548640" y="1508760"/>
+            <a:ext cx="2011680" cy="457200"/>
+          </a:xfrm>
+          <a:prstGeom prst="roundRect">
+            <a:avLst>
+              <a:gd name="adj" fmla="val 50000"/>
+            </a:avLst>
+          </a:prstGeom>
+          <a:solidFill>
+            <a:srgbClr val="33C17A"/>
+          </a:solidFill>
+          <a:ln>
+            <a:noFill/>
+          </a:ln>
+          <a:effectLst/>
+        </p:spPr>
+        <p:style>
+          <a:lnRef idx="1">
+            <a:schemeClr val="accent1"/>
+          </a:lnRef>
+          <a:fillRef idx="3">
+            <a:schemeClr val="accent1"/>
+          </a:fillRef>
+          <a:effectRef idx="2">
+            <a:schemeClr val="accent1"/>
+          </a:effectRef>
+          <a:fontRef idx="minor">
+            <a:schemeClr val="lt1"/>
+          </a:fontRef>
+        </p:style>
+        <p:txBody>
+          <a:bodyPr rtlCol="0" anchor="ctr"/>
+          <a:lstStyle/>
+          <a:p/>
+        </p:txBody>
+      </p:sp>
+      <p:sp>
+        <p:nvSpPr>
+          <p:cNvPr id="7" name="TextBox 6"/>
+          <p:cNvSpPr txBox="1"/>
+          <p:nvPr/>
+        </p:nvSpPr>
+        <p:spPr>
+          <a:xfrm>
+            <a:off x="548640" y="1508760"/>
+            <a:ext cx="2011680" cy="457200"/>
+          </a:xfrm>
+          <a:prstGeom prst="rect">
+            <a:avLst/>
+          </a:prstGeom>
+          <a:noFill/>
+        </p:spPr>
+        <p:txBody>
+          <a:bodyPr wrap="square" anchor="ctr" lIns="0" rIns="0" tIns="0" bIns="0"/>
+          <a:lstStyle/>
+          <a:p>
+            <a:pPr algn="ctr"/>
+            <a:r>
+              <a:rPr sz="1400" b="1" i="0">
+                <a:solidFill>
+                  <a:srgbClr val="202122"/>
+                </a:solidFill>
+                <a:latin typeface="Calibri"/>
+              </a:rPr>
+              <a:t>30 minutes</a:t>
+            </a:r>
+          </a:p>
+        </p:txBody>
+      </p:sp>
+      <p:sp>
+        <p:nvSpPr>
+          <p:cNvPr id="8" name="TextBox 7"/>
+          <p:cNvSpPr txBox="1"/>
+          <p:nvPr/>
+        </p:nvSpPr>
+        <p:spPr>
+          <a:xfrm>
+            <a:off x="2743200" y="1508760"/>
+            <a:ext cx="4754880" cy="457200"/>
+          </a:xfrm>
+          <a:prstGeom prst="rect">
+            <a:avLst/>
+          </a:prstGeom>
+          <a:noFill/>
+        </p:spPr>
+        <p:txBody>
+          <a:bodyPr wrap="square" anchor="ctr" lIns="0" rIns="0" tIns="0" bIns="0"/>
+          <a:lstStyle/>
+          <a:p>
+            <a:pPr algn="l"/>
+            <a:r>
+              <a:rPr sz="1400" b="0" i="1">
+                <a:solidFill>
+                  <a:srgbClr val="54595D"/>
+                </a:solidFill>
+                <a:latin typeface="Calibri"/>
+              </a:rPr>
+              <a:t>Pairs, in Python</a:t>
+            </a:r>
+          </a:p>
+        </p:txBody>
+      </p:sp>
+      <p:sp>
+        <p:nvSpPr>
+          <p:cNvPr id="9" name="Oval 8"/>
+          <p:cNvSpPr/>
+          <p:nvPr/>
+        </p:nvSpPr>
+        <p:spPr>
+          <a:xfrm>
+            <a:off x="548640" y="2482596"/>
+            <a:ext cx="384048" cy="384048"/>
+          </a:xfrm>
+          <a:prstGeom prst="ellipse">
+            <a:avLst/>
+          </a:prstGeom>
+          <a:solidFill>
+            <a:srgbClr val="0645AD"/>
+          </a:solidFill>
+          <a:ln>
+            <a:noFill/>
+          </a:ln>
+          <a:effectLst/>
+        </p:spPr>
+        <p:style>
+          <a:lnRef idx="1">
+            <a:schemeClr val="accent1"/>
+          </a:lnRef>
+          <a:fillRef idx="3">
+            <a:schemeClr val="accent1"/>
+          </a:fillRef>
+          <a:effectRef idx="2">
+            <a:schemeClr val="accent1"/>
+          </a:effectRef>
+          <a:fontRef idx="minor">
+            <a:schemeClr val="lt1"/>
+          </a:fontRef>
+        </p:style>
+        <p:txBody>
+          <a:bodyPr rtlCol="0" anchor="ctr" lIns="0" rIns="0" tIns="0" bIns="0"/>
+          <a:lstStyle/>
+          <a:p>
+            <a:pPr algn="ctr"/>
+            <a:r>
+              <a:rPr sz="1300" b="1">
+                <a:solidFill>
+                  <a:srgbClr val="FFFFFF"/>
+                </a:solidFill>
+                <a:latin typeface="Calibri"/>
+              </a:rPr>
+              <a:t>1</a:t>
+            </a:r>
+          </a:p>
+        </p:txBody>
+      </p:sp>
+      <p:sp>
+        <p:nvSpPr>
+          <p:cNvPr id="10" name="TextBox 9"/>
+          <p:cNvSpPr txBox="1"/>
+          <p:nvPr/>
+        </p:nvSpPr>
+        <p:spPr>
+          <a:xfrm>
+            <a:off x="1143000" y="2240280"/>
+            <a:ext cx="5943600" cy="868680"/>
+          </a:xfrm>
+          <a:prstGeom prst="rect">
+            <a:avLst/>
+          </a:prstGeom>
+          <a:noFill/>
+        </p:spPr>
+        <p:txBody>
+          <a:bodyPr wrap="square" anchor="ctr" lIns="0" rIns="0" tIns="0" bIns="0"/>
+          <a:lstStyle/>
+          <a:p>
+            <a:pPr algn="l"/>
+            <a:r>
+              <a:rPr sz="1700" b="0" i="0">
+                <a:solidFill>
+                  <a:srgbClr val="202122"/>
+                </a:solidFill>
+                <a:latin typeface="Calibri"/>
+              </a:rPr>
+              <a:t>Build a function that grades a mark: A, B, C or U.</a:t>
+            </a:r>
+          </a:p>
+        </p:txBody>
+      </p:sp>
+      <p:sp>
+        <p:nvSpPr>
+          <p:cNvPr id="11" name="Oval 10"/>
+          <p:cNvSpPr/>
+          <p:nvPr/>
+        </p:nvSpPr>
+        <p:spPr>
+          <a:xfrm>
+            <a:off x="548640" y="3461004"/>
+            <a:ext cx="384048" cy="384048"/>
+          </a:xfrm>
+          <a:prstGeom prst="ellipse">
+            <a:avLst/>
+          </a:prstGeom>
+          <a:solidFill>
+            <a:srgbClr val="0645AD"/>
+          </a:solidFill>
+          <a:ln>
+            <a:noFill/>
+          </a:ln>
+          <a:effectLst/>
+        </p:spPr>
+        <p:style>
+          <a:lnRef idx="1">
+            <a:schemeClr val="accent1"/>
+          </a:lnRef>
+          <a:fillRef idx="3">
+            <a:schemeClr val="accent1"/>
+          </a:fillRef>
+          <a:effectRef idx="2">
+            <a:schemeClr val="accent1"/>
+          </a:effectRef>
+          <a:fontRef idx="minor">
+            <a:schemeClr val="lt1"/>
+          </a:fontRef>
+        </p:style>
+        <p:txBody>
+          <a:bodyPr rtlCol="0" anchor="ctr" lIns="0" rIns="0" tIns="0" bIns="0"/>
+          <a:lstStyle/>
+          <a:p>
+            <a:pPr algn="ctr"/>
+            <a:r>
+              <a:rPr sz="1300" b="1">
+                <a:solidFill>
+                  <a:srgbClr val="FFFFFF"/>
+                </a:solidFill>
+                <a:latin typeface="Calibri"/>
+              </a:rPr>
+              <a:t>2</a:t>
+            </a:r>
+          </a:p>
+        </p:txBody>
+      </p:sp>
+      <p:sp>
+        <p:nvSpPr>
+          <p:cNvPr id="12" name="TextBox 11"/>
+          <p:cNvSpPr txBox="1"/>
+          <p:nvPr/>
+        </p:nvSpPr>
+        <p:spPr>
+          <a:xfrm>
+            <a:off x="1143000" y="3218688"/>
+            <a:ext cx="5943600" cy="868680"/>
+          </a:xfrm>
+          <a:prstGeom prst="rect">
+            <a:avLst/>
+          </a:prstGeom>
+          <a:noFill/>
+        </p:spPr>
+        <p:txBody>
+          <a:bodyPr wrap="square" anchor="ctr" lIns="0" rIns="0" tIns="0" bIns="0"/>
+          <a:lstStyle/>
+          <a:p>
+            <a:pPr algn="l"/>
+            <a:r>
+              <a:rPr sz="1700" b="0" i="0">
+                <a:solidFill>
+                  <a:srgbClr val="202122"/>
+                </a:solidFill>
+                <a:latin typeface="Calibri"/>
+              </a:rPr>
+              <a:t>Write one failing test first.</a:t>
+            </a:r>
+          </a:p>
+        </p:txBody>
+      </p:sp>
+      <p:sp>
+        <p:nvSpPr>
+          <p:cNvPr id="13" name="Oval 12"/>
+          <p:cNvSpPr/>
+          <p:nvPr/>
+        </p:nvSpPr>
+        <p:spPr>
+          <a:xfrm>
+            <a:off x="548640" y="4439412"/>
+            <a:ext cx="384048" cy="384048"/>
+          </a:xfrm>
+          <a:prstGeom prst="ellipse">
+            <a:avLst/>
+          </a:prstGeom>
+          <a:solidFill>
+            <a:srgbClr val="0645AD"/>
+          </a:solidFill>
+          <a:ln>
+            <a:noFill/>
+          </a:ln>
+          <a:effectLst/>
+        </p:spPr>
+        <p:style>
+          <a:lnRef idx="1">
+            <a:schemeClr val="accent1"/>
+          </a:lnRef>
+          <a:fillRef idx="3">
+            <a:schemeClr val="accent1"/>
+          </a:fillRef>
+          <a:effectRef idx="2">
+            <a:schemeClr val="accent1"/>
+          </a:effectRef>
+          <a:fontRef idx="minor">
+            <a:schemeClr val="lt1"/>
+          </a:fontRef>
+        </p:style>
+        <p:txBody>
+          <a:bodyPr rtlCol="0" anchor="ctr" lIns="0" rIns="0" tIns="0" bIns="0"/>
+          <a:lstStyle/>
+          <a:p>
+            <a:pPr algn="ctr"/>
+            <a:r>
+              <a:rPr sz="1300" b="1">
+                <a:solidFill>
+                  <a:srgbClr val="FFFFFF"/>
+                </a:solidFill>
+                <a:latin typeface="Calibri"/>
+              </a:rPr>
+              <a:t>3</a:t>
+            </a:r>
+          </a:p>
+        </p:txBody>
+      </p:sp>
+      <p:sp>
+        <p:nvSpPr>
+          <p:cNvPr id="14" name="TextBox 13"/>
+          <p:cNvSpPr txBox="1"/>
+          <p:nvPr/>
+        </p:nvSpPr>
+        <p:spPr>
+          <a:xfrm>
+            <a:off x="1143000" y="4197096"/>
+            <a:ext cx="5943600" cy="868680"/>
+          </a:xfrm>
+          <a:prstGeom prst="rect">
+            <a:avLst/>
+          </a:prstGeom>
+          <a:noFill/>
+        </p:spPr>
+        <p:txBody>
+          <a:bodyPr wrap="square" anchor="ctr" lIns="0" rIns="0" tIns="0" bIns="0"/>
+          <a:lstStyle/>
+          <a:p>
+            <a:pPr algn="l"/>
+            <a:r>
+              <a:rPr sz="1700" b="0" i="0">
+                <a:solidFill>
+                  <a:srgbClr val="202122"/>
+                </a:solidFill>
+                <a:latin typeface="Calibri"/>
+              </a:rPr>
+              <a:t>Write just enough code to pass it.</a:t>
+            </a:r>
+          </a:p>
+        </p:txBody>
+      </p:sp>
+      <p:sp>
+        <p:nvSpPr>
+          <p:cNvPr id="15" name="Oval 14"/>
+          <p:cNvSpPr/>
+          <p:nvPr/>
+        </p:nvSpPr>
+        <p:spPr>
+          <a:xfrm>
+            <a:off x="548640" y="5417820"/>
+            <a:ext cx="384048" cy="384048"/>
+          </a:xfrm>
+          <a:prstGeom prst="ellipse">
+            <a:avLst/>
+          </a:prstGeom>
+          <a:solidFill>
+            <a:srgbClr val="0645AD"/>
+          </a:solidFill>
+          <a:ln>
+            <a:noFill/>
+          </a:ln>
+          <a:effectLst/>
+        </p:spPr>
+        <p:style>
+          <a:lnRef idx="1">
+            <a:schemeClr val="accent1"/>
+          </a:lnRef>
+          <a:fillRef idx="3">
+            <a:schemeClr val="accent1"/>
+          </a:fillRef>
+          <a:effectRef idx="2">
+            <a:schemeClr val="accent1"/>
+          </a:effectRef>
+          <a:fontRef idx="minor">
+            <a:schemeClr val="lt1"/>
+          </a:fontRef>
+        </p:style>
+        <p:txBody>
+          <a:bodyPr rtlCol="0" anchor="ctr" lIns="0" rIns="0" tIns="0" bIns="0"/>
+          <a:lstStyle/>
+          <a:p>
+            <a:pPr algn="ctr"/>
+            <a:r>
+              <a:rPr sz="1300" b="1">
+                <a:solidFill>
+                  <a:srgbClr val="FFFFFF"/>
+                </a:solidFill>
+                <a:latin typeface="Calibri"/>
+              </a:rPr>
+              <a:t>4</a:t>
+            </a:r>
+          </a:p>
+        </p:txBody>
+      </p:sp>
+      <p:sp>
+        <p:nvSpPr>
+          <p:cNvPr id="16" name="TextBox 15"/>
+          <p:cNvSpPr txBox="1"/>
+          <p:nvPr/>
+        </p:nvSpPr>
+        <p:spPr>
+          <a:xfrm>
+            <a:off x="1143000" y="5175504"/>
+            <a:ext cx="5943600" cy="868680"/>
+          </a:xfrm>
+          <a:prstGeom prst="rect">
+            <a:avLst/>
+          </a:prstGeom>
+          <a:noFill/>
+        </p:spPr>
+        <p:txBody>
+          <a:bodyPr wrap="square" anchor="ctr" lIns="0" rIns="0" tIns="0" bIns="0"/>
+          <a:lstStyle/>
+          <a:p>
+            <a:pPr algn="l"/>
+            <a:r>
+              <a:rPr sz="1700" b="0" i="0">
+                <a:solidFill>
+                  <a:srgbClr val="202122"/>
+                </a:solidFill>
+                <a:latin typeface="Calibri"/>
+              </a:rPr>
+              <a:t>Repeat until every boundary is tested, then refactor.</a:t>
+            </a:r>
+          </a:p>
+        </p:txBody>
+      </p:sp>
+      <p:sp>
+        <p:nvSpPr>
+          <p:cNvPr id="17" name="Rounded Rectangle 16"/>
+          <p:cNvSpPr/>
+          <p:nvPr/>
+        </p:nvSpPr>
+        <p:spPr>
+          <a:xfrm>
+            <a:off x="7772400" y="1508760"/>
+            <a:ext cx="3867912" cy="4572000"/>
+          </a:xfrm>
+          <a:prstGeom prst="roundRect">
+            <a:avLst>
+              <a:gd name="adj" fmla="val 8000"/>
+            </a:avLst>
+          </a:prstGeom>
+          <a:solidFill>
+            <a:srgbClr val="EAF3FF"/>
+          </a:solidFill>
+          <a:ln>
+            <a:noFill/>
+          </a:ln>
+          <a:effectLst/>
+        </p:spPr>
+        <p:style>
+          <a:lnRef idx="1">
+            <a:schemeClr val="accent1"/>
+          </a:lnRef>
+          <a:fillRef idx="3">
+            <a:schemeClr val="accent1"/>
+          </a:fillRef>
+          <a:effectRef idx="2">
+            <a:schemeClr val="accent1"/>
+          </a:effectRef>
+          <a:fontRef idx="minor">
+            <a:schemeClr val="lt1"/>
+          </a:fontRef>
+        </p:style>
+        <p:txBody>
+          <a:bodyPr rtlCol="0" anchor="ctr"/>
+          <a:lstStyle/>
+          <a:p/>
+        </p:txBody>
+      </p:sp>
+      <p:sp>
+        <p:nvSpPr>
+          <p:cNvPr id="18" name="TextBox 17"/>
+          <p:cNvSpPr txBox="1"/>
+          <p:nvPr/>
+        </p:nvSpPr>
+        <p:spPr>
+          <a:xfrm>
+            <a:off x="8046720" y="1737360"/>
+            <a:ext cx="3291840" cy="365760"/>
+          </a:xfrm>
+          <a:prstGeom prst="rect">
+            <a:avLst/>
+          </a:prstGeom>
+          <a:noFill/>
+        </p:spPr>
+        <p:txBody>
+          <a:bodyPr wrap="square" anchor="t" lIns="0" rIns="0" tIns="0" bIns="0"/>
+          <a:lstStyle/>
+          <a:p>
+            <a:pPr algn="l"/>
+            <a:r>
+              <a:rPr sz="1300" b="1" i="0">
+                <a:solidFill>
+                  <a:srgbClr val="0645AD"/>
+                </a:solidFill>
+                <a:latin typeface="Calibri"/>
+              </a:rPr>
+              <a:t>SUCCESS CRITERIA</a:t>
+            </a:r>
+          </a:p>
+        </p:txBody>
+      </p:sp>
+      <p:sp>
+        <p:nvSpPr>
+          <p:cNvPr id="19" name="TextBox 18"/>
+          <p:cNvSpPr txBox="1"/>
+          <p:nvPr/>
+        </p:nvSpPr>
+        <p:spPr>
+          <a:xfrm>
+            <a:off x="8046720" y="2240280"/>
+            <a:ext cx="3337560" cy="3657600"/>
+          </a:xfrm>
+          <a:prstGeom prst="rect">
+            <a:avLst/>
+          </a:prstGeom>
+          <a:noFill/>
+        </p:spPr>
+        <p:txBody>
+          <a:bodyPr wrap="square" lIns="0" rIns="0" tIns="0" bIns="0">
+            <a:spAutoFit/>
+          </a:bodyPr>
+          <a:lstStyle/>
+          <a:p>
+            <a:pPr marL="274320" indent="-274320">
+              <a:spcAft>
+                <a:spcPts val="810"/>
+              </a:spcAft>
+              <a:buClr>
+                <a:srgbClr val="0645AD"/>
+              </a:buClr>
+              <a:buFont typeface="Arial"/>
+              <a:buChar char="•"/>
+            </a:pPr>
+            <a:r>
+              <a:rPr sz="1800" b="0">
+                <a:solidFill>
+                  <a:srgbClr val="202122"/>
+                </a:solidFill>
+                <a:latin typeface="Calibri"/>
+              </a:rPr>
+              <a:t>Tests written before code</a:t>
+            </a:r>
+          </a:p>
+          <a:p>
+            <a:pPr marL="274320" indent="-274320">
+              <a:spcAft>
+                <a:spcPts val="810"/>
+              </a:spcAft>
+              <a:buClr>
+                <a:srgbClr val="0645AD"/>
+              </a:buClr>
+              <a:buFont typeface="Arial"/>
+              <a:buChar char="•"/>
+            </a:pPr>
+            <a:r>
+              <a:rPr sz="1800" b="0">
+                <a:solidFill>
+                  <a:srgbClr val="202122"/>
+                </a:solidFill>
+                <a:latin typeface="Calibri"/>
+              </a:rPr>
+              <a:t>Boundaries tested</a:t>
+            </a:r>
+          </a:p>
+          <a:p>
+            <a:pPr marL="274320" indent="-274320">
+              <a:spcAft>
+                <a:spcPts val="810"/>
+              </a:spcAft>
+              <a:buClr>
+                <a:srgbClr val="0645AD"/>
+              </a:buClr>
+              <a:buFont typeface="Arial"/>
+              <a:buChar char="•"/>
+            </a:pPr>
+            <a:r>
+              <a:rPr sz="1800" b="0">
+                <a:solidFill>
+                  <a:srgbClr val="202122"/>
+                </a:solidFill>
+                <a:latin typeface="Calibri"/>
+              </a:rPr>
+              <a:t>Code refactored with tests still passing</a:t>
+            </a:r>
+          </a:p>
+        </p:txBody>
+      </p:sp>
+    </p:spTree>
+  </p:cSld>
+  <p:clrMapOvr>
+    <a:masterClrMapping/>
+  </p:clrMapOvr>
+</p:sld>
+</file>
+
+<file path=ppt/slides/slide15.xml><?xml version="1.0" encoding="utf-8"?>
+<p:sld xmlns:a="http://schemas.openxmlformats.org/drawingml/2006/main" xmlns:p="http://schemas.openxmlformats.org/presentationml/2006/main" xmlns:r="http://schemas.openxmlformats.org/officeDocument/2006/relationships">
+  <p:cSld>
+    <p:bg>
+      <p:bgPr>
+        <a:solidFill>
+          <a:srgbClr val="03306E"/>
+        </a:solidFill>
+        <a:effectLst/>
+      </p:bgPr>
+    </p:bg>
+    <p:spTree>
+      <p:nvGrpSpPr>
+        <p:cNvPr id="1" name=""/>
+        <p:cNvGrpSpPr/>
+        <p:nvPr/>
+      </p:nvGrpSpPr>
+      <p:grpSpPr/>
+      <p:sp>
+        <p:nvSpPr>
+          <p:cNvPr id="2" name="TextBox 1"/>
+          <p:cNvSpPr txBox="1"/>
+          <p:nvPr/>
+        </p:nvSpPr>
+        <p:spPr>
+          <a:xfrm>
+            <a:off x="548640" y="320040"/>
+            <a:ext cx="11094415" cy="274320"/>
+          </a:xfrm>
+          <a:prstGeom prst="rect">
+            <a:avLst/>
+          </a:prstGeom>
+          <a:noFill/>
+        </p:spPr>
+        <p:txBody>
+          <a:bodyPr wrap="square" anchor="t" lIns="0" rIns="0" tIns="0" bIns="0"/>
+          <a:lstStyle/>
+          <a:p>
+            <a:pPr algn="l"/>
+            <a:r>
+              <a:rPr sz="1100" b="1" i="0">
+                <a:solidFill>
+                  <a:srgbClr val="A9C8F0"/>
+                </a:solidFill>
+                <a:latin typeface="Calibri"/>
+              </a:rPr>
+              <a:t>OCCUPATIONAL SPECIALISM  ·  Specialism Content Area 4</a:t>
+            </a:r>
+          </a:p>
+        </p:txBody>
+      </p:sp>
+      <p:sp>
+        <p:nvSpPr>
+          <p:cNvPr id="3" name="TextBox 2"/>
+          <p:cNvSpPr txBox="1"/>
+          <p:nvPr/>
+        </p:nvSpPr>
+        <p:spPr>
+          <a:xfrm>
+            <a:off x="548640" y="566928"/>
+            <a:ext cx="11094415" cy="822960"/>
+          </a:xfrm>
+          <a:prstGeom prst="rect">
+            <a:avLst/>
+          </a:prstGeom>
+          <a:noFill/>
+        </p:spPr>
+        <p:txBody>
+          <a:bodyPr wrap="square" anchor="ctr" lIns="0" rIns="0" tIns="0" bIns="0"/>
+          <a:lstStyle/>
+          <a:p>
+            <a:pPr algn="l"/>
+            <a:r>
+              <a:rPr sz="3200" b="1" i="0">
+                <a:solidFill>
+                  <a:srgbClr val="FFFFFF"/>
+                </a:solidFill>
+                <a:latin typeface="Cambria"/>
+              </a:rPr>
+              <a:t>Exit ticket</a:t>
+            </a:r>
+          </a:p>
+        </p:txBody>
+      </p:sp>
+      <p:sp>
+        <p:nvSpPr>
+          <p:cNvPr id="4" name="Oval 3"/>
+          <p:cNvSpPr/>
+          <p:nvPr/>
+        </p:nvSpPr>
+        <p:spPr>
+          <a:xfrm>
+            <a:off x="548640" y="1737360"/>
+            <a:ext cx="502920" cy="502920"/>
+          </a:xfrm>
+          <a:prstGeom prst="ellipse">
+            <a:avLst/>
+          </a:prstGeom>
+          <a:solidFill>
+            <a:srgbClr val="33C17A"/>
+          </a:solidFill>
+          <a:ln>
+            <a:noFill/>
+          </a:ln>
+          <a:effectLst/>
+        </p:spPr>
+        <p:style>
+          <a:lnRef idx="1">
+            <a:schemeClr val="accent1"/>
+          </a:lnRef>
+          <a:fillRef idx="3">
+            <a:schemeClr val="accent1"/>
+          </a:fillRef>
+          <a:effectRef idx="2">
+            <a:schemeClr val="accent1"/>
+          </a:effectRef>
+          <a:fontRef idx="minor">
+            <a:schemeClr val="lt1"/>
+          </a:fontRef>
+        </p:style>
+        <p:txBody>
+          <a:bodyPr rtlCol="0" anchor="ctr" lIns="0" rIns="0" tIns="0" bIns="0"/>
+          <a:lstStyle/>
+          <a:p>
+            <a:pPr algn="ctr"/>
+            <a:r>
+              <a:rPr sz="1700" b="1">
+                <a:solidFill>
+                  <a:srgbClr val="202122"/>
+                </a:solidFill>
+                <a:latin typeface="Calibri"/>
+              </a:rPr>
+              <a:t>1</a:t>
+            </a:r>
+          </a:p>
+        </p:txBody>
+      </p:sp>
+      <p:sp>
+        <p:nvSpPr>
+          <p:cNvPr id="5" name="TextBox 4"/>
+          <p:cNvSpPr txBox="1"/>
+          <p:nvPr/>
+        </p:nvSpPr>
+        <p:spPr>
+          <a:xfrm>
+            <a:off x="1325880" y="1645920"/>
+            <a:ext cx="6583680" cy="822960"/>
+          </a:xfrm>
+          <a:prstGeom prst="rect">
+            <a:avLst/>
+          </a:prstGeom>
+          <a:noFill/>
+        </p:spPr>
+        <p:txBody>
+          <a:bodyPr wrap="square" anchor="ctr" lIns="0" rIns="0" tIns="0" bIns="0"/>
+          <a:lstStyle/>
+          <a:p>
+            <a:pPr algn="l"/>
+            <a:r>
+              <a:rPr sz="2000" b="0" i="0">
+                <a:solidFill>
+                  <a:srgbClr val="FFFFFF"/>
+                </a:solidFill>
+                <a:latin typeface="Calibri"/>
+              </a:rPr>
+              <a:t>Which design approach suits a game with many similar characters?</a:t>
+            </a:r>
+          </a:p>
+        </p:txBody>
+      </p:sp>
+      <p:sp>
+        <p:nvSpPr>
+          <p:cNvPr id="6" name="Oval 5"/>
+          <p:cNvSpPr/>
+          <p:nvPr/>
+        </p:nvSpPr>
+        <p:spPr>
+          <a:xfrm>
+            <a:off x="548640" y="2697480"/>
+            <a:ext cx="502920" cy="502920"/>
+          </a:xfrm>
+          <a:prstGeom prst="ellipse">
+            <a:avLst/>
+          </a:prstGeom>
+          <a:solidFill>
+            <a:srgbClr val="33C17A"/>
+          </a:solidFill>
+          <a:ln>
+            <a:noFill/>
+          </a:ln>
+          <a:effectLst/>
+        </p:spPr>
+        <p:style>
+          <a:lnRef idx="1">
+            <a:schemeClr val="accent1"/>
+          </a:lnRef>
+          <a:fillRef idx="3">
+            <a:schemeClr val="accent1"/>
+          </a:fillRef>
+          <a:effectRef idx="2">
+            <a:schemeClr val="accent1"/>
+          </a:effectRef>
+          <a:fontRef idx="minor">
+            <a:schemeClr val="lt1"/>
+          </a:fontRef>
+        </p:style>
+        <p:txBody>
+          <a:bodyPr rtlCol="0" anchor="ctr" lIns="0" rIns="0" tIns="0" bIns="0"/>
+          <a:lstStyle/>
+          <a:p>
+            <a:pPr algn="ctr"/>
+            <a:r>
+              <a:rPr sz="1700" b="1">
+                <a:solidFill>
+                  <a:srgbClr val="202122"/>
+                </a:solidFill>
+                <a:latin typeface="Calibri"/>
+              </a:rPr>
+              <a:t>2</a:t>
+            </a:r>
+          </a:p>
+        </p:txBody>
+      </p:sp>
+      <p:sp>
+        <p:nvSpPr>
+          <p:cNvPr id="7" name="TextBox 6"/>
+          <p:cNvSpPr txBox="1"/>
+          <p:nvPr/>
+        </p:nvSpPr>
+        <p:spPr>
+          <a:xfrm>
+            <a:off x="1325880" y="2606040"/>
+            <a:ext cx="6583680" cy="822960"/>
+          </a:xfrm>
+          <a:prstGeom prst="rect">
+            <a:avLst/>
+          </a:prstGeom>
+          <a:noFill/>
+        </p:spPr>
+        <p:txBody>
+          <a:bodyPr wrap="square" anchor="ctr" lIns="0" rIns="0" tIns="0" bIns="0"/>
+          <a:lstStyle/>
+          <a:p>
+            <a:pPr algn="l"/>
+            <a:r>
+              <a:rPr sz="2000" b="0" i="0">
+                <a:solidFill>
+                  <a:srgbClr val="FFFFFF"/>
+                </a:solidFill>
+                <a:latin typeface="Calibri"/>
+              </a:rPr>
+              <a:t>Why does TDD reduce bugs?</a:t>
+            </a:r>
+          </a:p>
+        </p:txBody>
+      </p:sp>
+      <p:sp>
+        <p:nvSpPr>
+          <p:cNvPr id="8" name="Oval 7"/>
+          <p:cNvSpPr/>
+          <p:nvPr/>
+        </p:nvSpPr>
+        <p:spPr>
+          <a:xfrm>
+            <a:off x="548640" y="3657600"/>
+            <a:ext cx="502920" cy="502920"/>
+          </a:xfrm>
+          <a:prstGeom prst="ellipse">
+            <a:avLst/>
+          </a:prstGeom>
+          <a:solidFill>
+            <a:srgbClr val="33C17A"/>
+          </a:solidFill>
+          <a:ln>
+            <a:noFill/>
+          </a:ln>
+          <a:effectLst/>
+        </p:spPr>
+        <p:style>
+          <a:lnRef idx="1">
+            <a:schemeClr val="accent1"/>
+          </a:lnRef>
+          <a:fillRef idx="3">
+            <a:schemeClr val="accent1"/>
+          </a:fillRef>
+          <a:effectRef idx="2">
+            <a:schemeClr val="accent1"/>
+          </a:effectRef>
+          <a:fontRef idx="minor">
+            <a:schemeClr val="lt1"/>
+          </a:fontRef>
+        </p:style>
+        <p:txBody>
+          <a:bodyPr rtlCol="0" anchor="ctr" lIns="0" rIns="0" tIns="0" bIns="0"/>
+          <a:lstStyle/>
+          <a:p>
+            <a:pPr algn="ctr"/>
+            <a:r>
+              <a:rPr sz="1700" b="1">
+                <a:solidFill>
+                  <a:srgbClr val="202122"/>
+                </a:solidFill>
+                <a:latin typeface="Calibri"/>
+              </a:rPr>
+              <a:t>3</a:t>
+            </a:r>
+          </a:p>
+        </p:txBody>
+      </p:sp>
+      <p:sp>
+        <p:nvSpPr>
+          <p:cNvPr id="9" name="TextBox 8"/>
+          <p:cNvSpPr txBox="1"/>
+          <p:nvPr/>
+        </p:nvSpPr>
+        <p:spPr>
+          <a:xfrm>
+            <a:off x="1325880" y="3566160"/>
+            <a:ext cx="6583680" cy="822960"/>
+          </a:xfrm>
+          <a:prstGeom prst="rect">
+            <a:avLst/>
+          </a:prstGeom>
+          <a:noFill/>
+        </p:spPr>
+        <p:txBody>
+          <a:bodyPr wrap="square" anchor="ctr" lIns="0" rIns="0" tIns="0" bIns="0"/>
+          <a:lstStyle/>
+          <a:p>
+            <a:pPr algn="l"/>
+            <a:r>
+              <a:rPr sz="2000" b="0" i="0">
+                <a:solidFill>
+                  <a:srgbClr val="FFFFFF"/>
+                </a:solidFill>
+                <a:latin typeface="Calibri"/>
+              </a:rPr>
+              <a:t>What is inheritance?</a:t>
+            </a:r>
+          </a:p>
+        </p:txBody>
+      </p:sp>
+      <p:sp>
+        <p:nvSpPr>
+          <p:cNvPr id="10" name="Rounded Rectangle 9"/>
+          <p:cNvSpPr/>
+          <p:nvPr/>
+        </p:nvSpPr>
+        <p:spPr>
+          <a:xfrm>
+            <a:off x="8229600" y="1645920"/>
+            <a:ext cx="3410712" cy="2926080"/>
+          </a:xfrm>
+          <a:prstGeom prst="roundRect">
+            <a:avLst>
+              <a:gd name="adj" fmla="val 8000"/>
+            </a:avLst>
+          </a:prstGeom>
+          <a:solidFill>
+            <a:srgbClr val="0645AD"/>
+          </a:solidFill>
+          <a:ln>
+            <a:noFill/>
+          </a:ln>
+          <a:effectLst/>
+        </p:spPr>
+        <p:style>
+          <a:lnRef idx="1">
+            <a:schemeClr val="accent1"/>
+          </a:lnRef>
+          <a:fillRef idx="3">
+            <a:schemeClr val="accent1"/>
+          </a:fillRef>
+          <a:effectRef idx="2">
+            <a:schemeClr val="accent1"/>
+          </a:effectRef>
+          <a:fontRef idx="minor">
+            <a:schemeClr val="lt1"/>
+          </a:fontRef>
+        </p:style>
+        <p:txBody>
+          <a:bodyPr rtlCol="0" anchor="ctr"/>
+          <a:lstStyle/>
+          <a:p/>
+        </p:txBody>
+      </p:sp>
+      <p:sp>
+        <p:nvSpPr>
+          <p:cNvPr id="11" name="TextBox 10"/>
+          <p:cNvSpPr txBox="1"/>
+          <p:nvPr/>
+        </p:nvSpPr>
+        <p:spPr>
+          <a:xfrm>
+            <a:off x="8503920" y="1874519"/>
+            <a:ext cx="2926080" cy="365760"/>
+          </a:xfrm>
+          <a:prstGeom prst="rect">
+            <a:avLst/>
+          </a:prstGeom>
+          <a:noFill/>
+        </p:spPr>
+        <p:txBody>
+          <a:bodyPr wrap="square" anchor="t" lIns="0" rIns="0" tIns="0" bIns="0"/>
+          <a:lstStyle/>
+          <a:p>
+            <a:pPr algn="l"/>
+            <a:r>
+              <a:rPr sz="1300" b="1" i="0">
+                <a:solidFill>
+                  <a:srgbClr val="A9C8F0"/>
+                </a:solidFill>
+                <a:latin typeface="Calibri"/>
+              </a:rPr>
+              <a:t>REVISE THIS TOPIC</a:t>
+            </a:r>
+          </a:p>
+        </p:txBody>
+      </p:sp>
+      <p:sp>
+        <p:nvSpPr>
+          <p:cNvPr id="12" name="TextBox 11"/>
+          <p:cNvSpPr txBox="1"/>
+          <p:nvPr/>
+        </p:nvSpPr>
+        <p:spPr>
+          <a:xfrm>
+            <a:off x="8503920" y="2286000"/>
+            <a:ext cx="2926080" cy="548640"/>
+          </a:xfrm>
+          <a:prstGeom prst="rect">
+            <a:avLst/>
+          </a:prstGeom>
+          <a:noFill/>
+        </p:spPr>
+        <p:txBody>
+          <a:bodyPr wrap="square" anchor="t" lIns="0" rIns="0" tIns="0" bIns="0"/>
+          <a:lstStyle/>
+          <a:p>
+            <a:pPr algn="l"/>
+            <a:r>
+              <a:rPr sz="1400" b="0" i="0">
+                <a:solidFill>
+                  <a:srgbClr val="FFFFFF"/>
+                </a:solidFill>
+                <a:latin typeface="Calibri"/>
+              </a:rPr>
+              <a:t>Revision notes for this lesson are on the study wiki:</a:t>
+            </a:r>
+          </a:p>
+        </p:txBody>
+      </p:sp>
+      <p:sp>
+        <p:nvSpPr>
+          <p:cNvPr id="13" name="TextBox 12"/>
+          <p:cNvSpPr txBox="1"/>
+          <p:nvPr/>
+        </p:nvSpPr>
+        <p:spPr>
+          <a:xfrm>
+            <a:off x="8503920" y="2926080"/>
+            <a:ext cx="2926080" cy="1463040"/>
+          </a:xfrm>
+          <a:prstGeom prst="rect">
+            <a:avLst/>
+          </a:prstGeom>
+          <a:noFill/>
+        </p:spPr>
+        <p:txBody>
+          <a:bodyPr wrap="square" anchor="t" lIns="0" rIns="0" tIns="0" bIns="0"/>
+          <a:lstStyle/>
+          <a:p>
+            <a:pPr algn="l"/>
+            <a:r>
+              <a:rPr sz="2000" b="1" i="0">
+                <a:solidFill>
+                  <a:srgbClr val="FFFFFF"/>
+                </a:solidFill>
+                <a:latin typeface="Cambria"/>
+              </a:rPr>
+              <a:t>Design</a:t>
+            </a:r>
+          </a:p>
+        </p:txBody>
+      </p:sp>
+      <p:sp>
+        <p:nvSpPr>
+          <p:cNvPr id="14" name="TextBox 13"/>
+          <p:cNvSpPr txBox="1"/>
+          <p:nvPr/>
+        </p:nvSpPr>
+        <p:spPr>
+          <a:xfrm>
+            <a:off x="548640" y="5669280"/>
+            <a:ext cx="11094415" cy="548640"/>
+          </a:xfrm>
+          <a:prstGeom prst="rect">
+            <a:avLst/>
+          </a:prstGeom>
+          <a:noFill/>
+        </p:spPr>
+        <p:txBody>
+          <a:bodyPr wrap="square" anchor="t" lIns="0" rIns="0" tIns="0" bIns="0"/>
+          <a:lstStyle/>
+          <a:p>
+            <a:pPr algn="l"/>
+            <a:r>
+              <a:rPr sz="1200" b="0" i="0">
+                <a:solidFill>
+                  <a:srgbClr val="A9C8F0"/>
+                </a:solidFill>
+                <a:latin typeface="Calibri"/>
+              </a:rPr>
+              <a:t>https://lana6478.github.io/T-level-Digital-Software-Development/#/02-occupational-specialism/04-design.md</a:t>
+            </a:r>
+          </a:p>
+        </p:txBody>
+      </p:sp>
+    </p:spTree>
+  </p:cSld>
+  <p:clrMapOvr>
+    <a:masterClrMapping/>
+  </p:clrMapOvr>
+</p:sld>
+</file>
+
 <file path=ppt/slides/slide2.xml><?xml version="1.0" encoding="utf-8"?>
 <p:sld xmlns:a="http://schemas.openxmlformats.org/drawingml/2006/main" xmlns:p="http://schemas.openxmlformats.org/presentationml/2006/main" xmlns:r="http://schemas.openxmlformats.org/officeDocument/2006/relationships">
   <p:cSld>
@@ -4772,22 +8424,93 @@
       </p:sp>
       <p:sp>
         <p:nvSpPr>
-          <p:cNvPr id="6" name="Rounded Rectangle 5"/>
+          <p:cNvPr id="6" name="TextBox 5"/>
+          <p:cNvSpPr txBox="1"/>
+          <p:nvPr/>
+        </p:nvSpPr>
+        <p:spPr>
+          <a:xfrm>
+            <a:off x="548640" y="1554480"/>
+            <a:ext cx="6720840" cy="4617720"/>
+          </a:xfrm>
+          <a:prstGeom prst="rect">
+            <a:avLst/>
+          </a:prstGeom>
+          <a:noFill/>
+        </p:spPr>
+        <p:txBody>
+          <a:bodyPr wrap="square" lIns="0" rIns="0" tIns="0" bIns="0">
+            <a:spAutoFit/>
+          </a:bodyPr>
+          <a:lstStyle/>
+          <a:p>
+            <a:pPr>
+              <a:spcAft>
+                <a:spcPts val="1260"/>
+              </a:spcAft>
+            </a:pPr>
+            <a:r>
+              <a:rPr sz="2100" b="0">
+                <a:solidFill>
+                  <a:srgbClr val="202122"/>
+                </a:solidFill>
+                <a:latin typeface="Calibri"/>
+              </a:rPr>
+              <a:t>Function-oriented (top-down) design breaks a system into functions, using data flow diagrams to show how each changes the data: divide and conquer.</a:t>
+            </a:r>
+          </a:p>
+          <a:p>
+            <a:pPr>
+              <a:spcAft>
+                <a:spcPts val="1260"/>
+              </a:spcAft>
+            </a:pPr>
+            <a:r>
+              <a:rPr sz="2100" b="0">
+                <a:solidFill>
+                  <a:srgbClr val="202122"/>
+                </a:solidFill>
+                <a:latin typeface="Calibri"/>
+              </a:rPr>
+              <a:t>Object-oriented design builds programs from classes and objects. Encapsulation keeps an object's data private; abstraction hides complexity; inheritance lets classes reuse a parent's code; polymorphism lets different objects respond to the same method in their own way. Design patterns (creational, structural, behavioural) are proven solutions.</a:t>
+            </a:r>
+          </a:p>
+          <a:p>
+            <a:pPr>
+              <a:spcAft>
+                <a:spcPts val="1260"/>
+              </a:spcAft>
+            </a:pPr>
+            <a:r>
+              <a:rPr sz="2100" b="0">
+                <a:solidFill>
+                  <a:srgbClr val="202122"/>
+                </a:solidFill>
+                <a:latin typeface="Calibri"/>
+              </a:rPr>
+              <a:t>Data model design plans the data using conceptual, logical and physical models, E-R models and UML.</a:t>
+            </a:r>
+          </a:p>
+        </p:txBody>
+      </p:sp>
+      <p:sp>
+        <p:nvSpPr>
+          <p:cNvPr id="7" name="Rounded Rectangle 6"/>
           <p:cNvSpPr/>
           <p:nvPr/>
         </p:nvSpPr>
         <p:spPr>
           <a:xfrm>
-            <a:off x="548640" y="1600200"/>
-            <a:ext cx="3515258" cy="4572000"/>
+            <a:off x="7772400" y="1554480"/>
+            <a:ext cx="3867912" cy="4526280"/>
           </a:xfrm>
           <a:prstGeom prst="roundRect">
             <a:avLst>
-              <a:gd name="adj" fmla="val 6000"/>
+              <a:gd name="adj" fmla="val 8000"/>
             </a:avLst>
           </a:prstGeom>
           <a:solidFill>
-            <a:srgbClr val="EAF3FF"/>
+            <a:srgbClr val="03306E"/>
           </a:solidFill>
           <a:ln>
             <a:noFill/>
@@ -4816,14 +8539,14 @@
       </p:sp>
       <p:sp>
         <p:nvSpPr>
-          <p:cNvPr id="7" name="Oval 6"/>
+          <p:cNvPr id="8" name="Oval 7"/>
           <p:cNvSpPr/>
           <p:nvPr/>
         </p:nvSpPr>
         <p:spPr>
           <a:xfrm>
-            <a:off x="777240" y="1828800"/>
-            <a:ext cx="457200" cy="457200"/>
+            <a:off x="8046720" y="1828800"/>
+            <a:ext cx="548640" cy="548640"/>
           </a:xfrm>
           <a:prstGeom prst="ellipse">
             <a:avLst/>
@@ -4856,60 +8579,60 @@
           <a:p>
             <a:pPr algn="ctr"/>
             <a:r>
-              <a:rPr sz="1500" b="1">
+              <a:rPr sz="1300" b="1">
                 <a:solidFill>
                   <a:srgbClr val="202122"/>
                 </a:solidFill>
                 <a:latin typeface="Calibri"/>
               </a:rPr>
-              <a:t>1</a:t>
-            </a:r>
-          </a:p>
-        </p:txBody>
-      </p:sp>
-      <p:sp>
-        <p:nvSpPr>
-          <p:cNvPr id="8" name="TextBox 7"/>
-          <p:cNvSpPr txBox="1"/>
-          <p:nvPr/>
-        </p:nvSpPr>
-        <p:spPr>
-          <a:xfrm>
-            <a:off x="1371600" y="1801368"/>
-            <a:ext cx="2509418" cy="512064"/>
-          </a:xfrm>
-          <a:prstGeom prst="rect">
-            <a:avLst/>
-          </a:prstGeom>
-          <a:noFill/>
-        </p:spPr>
-        <p:txBody>
-          <a:bodyPr wrap="square" anchor="ctr" lIns="0" rIns="0" tIns="0" bIns="0"/>
+              <a:t>e.g.</a:t>
+            </a:r>
+          </a:p>
+        </p:txBody>
+      </p:sp>
+      <p:sp>
+        <p:nvSpPr>
+          <p:cNvPr id="9" name="TextBox 8"/>
+          <p:cNvSpPr txBox="1"/>
+          <p:nvPr/>
+        </p:nvSpPr>
+        <p:spPr>
+          <a:xfrm>
+            <a:off x="8046720" y="2560320"/>
+            <a:ext cx="3291840" cy="365760"/>
+          </a:xfrm>
+          <a:prstGeom prst="rect">
+            <a:avLst/>
+          </a:prstGeom>
+          <a:noFill/>
+        </p:spPr>
+        <p:txBody>
+          <a:bodyPr wrap="square" anchor="t" lIns="0" rIns="0" tIns="0" bIns="0"/>
           <a:lstStyle/>
           <a:p>
             <a:pPr algn="l"/>
             <a:r>
-              <a:rPr sz="1600" b="1" i="0">
-                <a:solidFill>
-                  <a:srgbClr val="03306E"/>
-                </a:solidFill>
-                <a:latin typeface="Calibri"/>
-              </a:rPr>
-              <a:t>Function-oriented (top-down)</a:t>
-            </a:r>
-          </a:p>
-        </p:txBody>
-      </p:sp>
-      <p:sp>
-        <p:nvSpPr>
-          <p:cNvPr id="9" name="TextBox 8"/>
-          <p:cNvSpPr txBox="1"/>
-          <p:nvPr/>
-        </p:nvSpPr>
-        <p:spPr>
-          <a:xfrm>
-            <a:off x="777240" y="2468880"/>
-            <a:ext cx="3058058" cy="3566160"/>
+              <a:rPr sz="1300" b="1" i="0">
+                <a:solidFill>
+                  <a:srgbClr val="A9C8F0"/>
+                </a:solidFill>
+                <a:latin typeface="Calibri"/>
+              </a:rPr>
+              <a:t>EXAMPLE</a:t>
+            </a:r>
+          </a:p>
+        </p:txBody>
+      </p:sp>
+      <p:sp>
+        <p:nvSpPr>
+          <p:cNvPr id="10" name="TextBox 9"/>
+          <p:cNvSpPr txBox="1"/>
+          <p:nvPr/>
+        </p:nvSpPr>
+        <p:spPr>
+          <a:xfrm>
+            <a:off x="8046720" y="2971800"/>
+            <a:ext cx="3291840" cy="2971800"/>
           </a:xfrm>
           <a:prstGeom prst="rect">
             <a:avLst/>
@@ -4922,339 +8645,13 @@
           <a:p>
             <a:pPr algn="l"/>
             <a:r>
-              <a:rPr sz="2000" b="0" i="0">
-                <a:solidFill>
-                  <a:srgbClr val="202122"/>
-                </a:solidFill>
-                <a:latin typeface="Calibri"/>
-              </a:rPr>
-              <a:t>Break the system into functions; data flow diagrams show how data changes. Divide and conquer.</a:t>
-            </a:r>
-          </a:p>
-        </p:txBody>
-      </p:sp>
-      <p:sp>
-        <p:nvSpPr>
-          <p:cNvPr id="10" name="Rounded Rectangle 9"/>
-          <p:cNvSpPr/>
-          <p:nvPr/>
-        </p:nvSpPr>
-        <p:spPr>
-          <a:xfrm>
-            <a:off x="4338218" y="1600200"/>
-            <a:ext cx="3515258" cy="4572000"/>
-          </a:xfrm>
-          <a:prstGeom prst="roundRect">
-            <a:avLst>
-              <a:gd name="adj" fmla="val 6000"/>
-            </a:avLst>
-          </a:prstGeom>
-          <a:solidFill>
-            <a:srgbClr val="EAF3FF"/>
-          </a:solidFill>
-          <a:ln>
-            <a:noFill/>
-          </a:ln>
-          <a:effectLst/>
-        </p:spPr>
-        <p:style>
-          <a:lnRef idx="1">
-            <a:schemeClr val="accent1"/>
-          </a:lnRef>
-          <a:fillRef idx="3">
-            <a:schemeClr val="accent1"/>
-          </a:fillRef>
-          <a:effectRef idx="2">
-            <a:schemeClr val="accent1"/>
-          </a:effectRef>
-          <a:fontRef idx="minor">
-            <a:schemeClr val="lt1"/>
-          </a:fontRef>
-        </p:style>
-        <p:txBody>
-          <a:bodyPr rtlCol="0" anchor="ctr"/>
-          <a:lstStyle/>
-          <a:p/>
-        </p:txBody>
-      </p:sp>
-      <p:sp>
-        <p:nvSpPr>
-          <p:cNvPr id="11" name="Oval 10"/>
-          <p:cNvSpPr/>
-          <p:nvPr/>
-        </p:nvSpPr>
-        <p:spPr>
-          <a:xfrm>
-            <a:off x="4566818" y="1828800"/>
-            <a:ext cx="457200" cy="457200"/>
-          </a:xfrm>
-          <a:prstGeom prst="ellipse">
-            <a:avLst/>
-          </a:prstGeom>
-          <a:solidFill>
-            <a:srgbClr val="33C17A"/>
-          </a:solidFill>
-          <a:ln>
-            <a:noFill/>
-          </a:ln>
-          <a:effectLst/>
-        </p:spPr>
-        <p:style>
-          <a:lnRef idx="1">
-            <a:schemeClr val="accent1"/>
-          </a:lnRef>
-          <a:fillRef idx="3">
-            <a:schemeClr val="accent1"/>
-          </a:fillRef>
-          <a:effectRef idx="2">
-            <a:schemeClr val="accent1"/>
-          </a:effectRef>
-          <a:fontRef idx="minor">
-            <a:schemeClr val="lt1"/>
-          </a:fontRef>
-        </p:style>
-        <p:txBody>
-          <a:bodyPr rtlCol="0" anchor="ctr" lIns="0" rIns="0" tIns="0" bIns="0"/>
-          <a:lstStyle/>
-          <a:p>
-            <a:pPr algn="ctr"/>
-            <a:r>
-              <a:rPr sz="1500" b="1">
-                <a:solidFill>
-                  <a:srgbClr val="202122"/>
-                </a:solidFill>
-                <a:latin typeface="Calibri"/>
-              </a:rPr>
-              <a:t>2</a:t>
-            </a:r>
-          </a:p>
-        </p:txBody>
-      </p:sp>
-      <p:sp>
-        <p:nvSpPr>
-          <p:cNvPr id="12" name="TextBox 11"/>
-          <p:cNvSpPr txBox="1"/>
-          <p:nvPr/>
-        </p:nvSpPr>
-        <p:spPr>
-          <a:xfrm>
-            <a:off x="5161178" y="1801368"/>
-            <a:ext cx="2509418" cy="512064"/>
-          </a:xfrm>
-          <a:prstGeom prst="rect">
-            <a:avLst/>
-          </a:prstGeom>
-          <a:noFill/>
-        </p:spPr>
-        <p:txBody>
-          <a:bodyPr wrap="square" anchor="ctr" lIns="0" rIns="0" tIns="0" bIns="0"/>
-          <a:lstStyle/>
-          <a:p>
-            <a:pPr algn="l"/>
-            <a:r>
-              <a:rPr sz="1900" b="1" i="0">
-                <a:solidFill>
-                  <a:srgbClr val="03306E"/>
-                </a:solidFill>
-                <a:latin typeface="Calibri"/>
-              </a:rPr>
-              <a:t>Object-oriented</a:t>
-            </a:r>
-          </a:p>
-        </p:txBody>
-      </p:sp>
-      <p:sp>
-        <p:nvSpPr>
-          <p:cNvPr id="13" name="TextBox 12"/>
-          <p:cNvSpPr txBox="1"/>
-          <p:nvPr/>
-        </p:nvSpPr>
-        <p:spPr>
-          <a:xfrm>
-            <a:off x="4566818" y="2468880"/>
-            <a:ext cx="3058058" cy="3566160"/>
-          </a:xfrm>
-          <a:prstGeom prst="rect">
-            <a:avLst/>
-          </a:prstGeom>
-          <a:noFill/>
-        </p:spPr>
-        <p:txBody>
-          <a:bodyPr wrap="square" anchor="t" lIns="0" rIns="0" tIns="0" bIns="0"/>
-          <a:lstStyle/>
-          <a:p>
-            <a:pPr algn="l"/>
-            <a:r>
-              <a:rPr sz="2000" b="0" i="0">
-                <a:solidFill>
-                  <a:srgbClr val="202122"/>
-                </a:solidFill>
-                <a:latin typeface="Calibri"/>
-              </a:rPr>
-              <a:t>Classes, objects and methods. Encapsulation, abstraction, polymorphism, inheritance. Creational, structural and behavioural patterns.</a:t>
-            </a:r>
-          </a:p>
-        </p:txBody>
-      </p:sp>
-      <p:sp>
-        <p:nvSpPr>
-          <p:cNvPr id="14" name="Rounded Rectangle 13"/>
-          <p:cNvSpPr/>
-          <p:nvPr/>
-        </p:nvSpPr>
-        <p:spPr>
-          <a:xfrm>
-            <a:off x="8127796" y="1600200"/>
-            <a:ext cx="3515258" cy="4572000"/>
-          </a:xfrm>
-          <a:prstGeom prst="roundRect">
-            <a:avLst>
-              <a:gd name="adj" fmla="val 6000"/>
-            </a:avLst>
-          </a:prstGeom>
-          <a:solidFill>
-            <a:srgbClr val="EAF3FF"/>
-          </a:solidFill>
-          <a:ln>
-            <a:noFill/>
-          </a:ln>
-          <a:effectLst/>
-        </p:spPr>
-        <p:style>
-          <a:lnRef idx="1">
-            <a:schemeClr val="accent1"/>
-          </a:lnRef>
-          <a:fillRef idx="3">
-            <a:schemeClr val="accent1"/>
-          </a:fillRef>
-          <a:effectRef idx="2">
-            <a:schemeClr val="accent1"/>
-          </a:effectRef>
-          <a:fontRef idx="minor">
-            <a:schemeClr val="lt1"/>
-          </a:fontRef>
-        </p:style>
-        <p:txBody>
-          <a:bodyPr rtlCol="0" anchor="ctr"/>
-          <a:lstStyle/>
-          <a:p/>
-        </p:txBody>
-      </p:sp>
-      <p:sp>
-        <p:nvSpPr>
-          <p:cNvPr id="15" name="Oval 14"/>
-          <p:cNvSpPr/>
-          <p:nvPr/>
-        </p:nvSpPr>
-        <p:spPr>
-          <a:xfrm>
-            <a:off x="8356396" y="1828800"/>
-            <a:ext cx="457200" cy="457200"/>
-          </a:xfrm>
-          <a:prstGeom prst="ellipse">
-            <a:avLst/>
-          </a:prstGeom>
-          <a:solidFill>
-            <a:srgbClr val="33C17A"/>
-          </a:solidFill>
-          <a:ln>
-            <a:noFill/>
-          </a:ln>
-          <a:effectLst/>
-        </p:spPr>
-        <p:style>
-          <a:lnRef idx="1">
-            <a:schemeClr val="accent1"/>
-          </a:lnRef>
-          <a:fillRef idx="3">
-            <a:schemeClr val="accent1"/>
-          </a:fillRef>
-          <a:effectRef idx="2">
-            <a:schemeClr val="accent1"/>
-          </a:effectRef>
-          <a:fontRef idx="minor">
-            <a:schemeClr val="lt1"/>
-          </a:fontRef>
-        </p:style>
-        <p:txBody>
-          <a:bodyPr rtlCol="0" anchor="ctr" lIns="0" rIns="0" tIns="0" bIns="0"/>
-          <a:lstStyle/>
-          <a:p>
-            <a:pPr algn="ctr"/>
-            <a:r>
-              <a:rPr sz="1500" b="1">
-                <a:solidFill>
-                  <a:srgbClr val="202122"/>
-                </a:solidFill>
-                <a:latin typeface="Calibri"/>
-              </a:rPr>
-              <a:t>3</a:t>
-            </a:r>
-          </a:p>
-        </p:txBody>
-      </p:sp>
-      <p:sp>
-        <p:nvSpPr>
-          <p:cNvPr id="16" name="TextBox 15"/>
-          <p:cNvSpPr txBox="1"/>
-          <p:nvPr/>
-        </p:nvSpPr>
-        <p:spPr>
-          <a:xfrm>
-            <a:off x="8950756" y="1801368"/>
-            <a:ext cx="2509418" cy="512064"/>
-          </a:xfrm>
-          <a:prstGeom prst="rect">
-            <a:avLst/>
-          </a:prstGeom>
-          <a:noFill/>
-        </p:spPr>
-        <p:txBody>
-          <a:bodyPr wrap="square" anchor="ctr" lIns="0" rIns="0" tIns="0" bIns="0"/>
-          <a:lstStyle/>
-          <a:p>
-            <a:pPr algn="l"/>
-            <a:r>
-              <a:rPr sz="1900" b="1" i="0">
-                <a:solidFill>
-                  <a:srgbClr val="03306E"/>
-                </a:solidFill>
-                <a:latin typeface="Calibri"/>
-              </a:rPr>
-              <a:t>Data model design</a:t>
-            </a:r>
-          </a:p>
-        </p:txBody>
-      </p:sp>
-      <p:sp>
-        <p:nvSpPr>
-          <p:cNvPr id="17" name="TextBox 16"/>
-          <p:cNvSpPr txBox="1"/>
-          <p:nvPr/>
-        </p:nvSpPr>
-        <p:spPr>
-          <a:xfrm>
-            <a:off x="8356396" y="2468880"/>
-            <a:ext cx="3058058" cy="3566160"/>
-          </a:xfrm>
-          <a:prstGeom prst="rect">
-            <a:avLst/>
-          </a:prstGeom>
-          <a:noFill/>
-        </p:spPr>
-        <p:txBody>
-          <a:bodyPr wrap="square" anchor="t" lIns="0" rIns="0" tIns="0" bIns="0"/>
-          <a:lstStyle/>
-          <a:p>
-            <a:pPr algn="l"/>
-            <a:r>
-              <a:rPr sz="2000" b="0" i="0">
-                <a:solidFill>
-                  <a:srgbClr val="202122"/>
-                </a:solidFill>
-                <a:latin typeface="Calibri"/>
-              </a:rPr>
-              <a:t>Conceptual, logical, physical, hierarchical and relational models, using E-R models and UML.</a:t>
+              <a:rPr sz="1900" b="0" i="0">
+                <a:solidFill>
+                  <a:srgbClr val="FFFFFF"/>
+                </a:solidFill>
+                <a:latin typeface="Cambria"/>
+              </a:rPr>
+              <a:t>A game has a Character class. Wizard and Knight inherit from it; both have an attack() method but it works differently for each (polymorphism).</a:t>
             </a:r>
           </a:p>
         </p:txBody>
@@ -5346,7 +8743,7 @@
                 </a:solidFill>
                 <a:latin typeface="Cambria"/>
               </a:rPr>
-              <a:t>Test-driven development (TDD)</a:t>
+              <a:t>Design approaches (1)</a:t>
             </a:r>
           </a:p>
         </p:txBody>
@@ -5419,20 +8816,22 @@
       </p:sp>
       <p:sp>
         <p:nvSpPr>
-          <p:cNvPr id="6" name="Rectangle 5"/>
+          <p:cNvPr id="6" name="Rounded Rectangle 5"/>
           <p:cNvSpPr/>
           <p:nvPr/>
         </p:nvSpPr>
         <p:spPr>
           <a:xfrm>
-            <a:off x="1603217" y="2793492"/>
-            <a:ext cx="8985260" cy="36576"/>
-          </a:xfrm>
-          <a:prstGeom prst="rect">
-            <a:avLst/>
+            <a:off x="548640" y="1600200"/>
+            <a:ext cx="3515258" cy="4572000"/>
+          </a:xfrm>
+          <a:prstGeom prst="roundRect">
+            <a:avLst>
+              <a:gd name="adj" fmla="val 6000"/>
+            </a:avLst>
           </a:prstGeom>
           <a:solidFill>
-            <a:srgbClr val="A9C8F0"/>
+            <a:srgbClr val="EAF3FF"/>
           </a:solidFill>
           <a:ln>
             <a:noFill/>
@@ -5467,8 +8866,8 @@
         </p:nvSpPr>
         <p:spPr>
           <a:xfrm>
-            <a:off x="1283177" y="2491740"/>
-            <a:ext cx="640080" cy="640080"/>
+            <a:off x="777240" y="1828800"/>
+            <a:ext cx="457200" cy="457200"/>
           </a:xfrm>
           <a:prstGeom prst="ellipse">
             <a:avLst/>
@@ -5501,7 +8900,7 @@
           <a:p>
             <a:pPr algn="ctr"/>
             <a:r>
-              <a:rPr sz="2000" b="1">
+              <a:rPr sz="1500" b="1">
                 <a:solidFill>
                   <a:srgbClr val="202122"/>
                 </a:solidFill>
@@ -5520,8 +8919,41 @@
         </p:nvSpPr>
         <p:spPr>
           <a:xfrm>
-            <a:off x="548640" y="3268979"/>
-            <a:ext cx="2109155" cy="731520"/>
+            <a:off x="1371600" y="1801368"/>
+            <a:ext cx="2509418" cy="512064"/>
+          </a:xfrm>
+          <a:prstGeom prst="rect">
+            <a:avLst/>
+          </a:prstGeom>
+          <a:noFill/>
+        </p:spPr>
+        <p:txBody>
+          <a:bodyPr wrap="square" anchor="ctr" lIns="0" rIns="0" tIns="0" bIns="0"/>
+          <a:lstStyle/>
+          <a:p>
+            <a:pPr algn="l"/>
+            <a:r>
+              <a:rPr sz="1600" b="1" i="0">
+                <a:solidFill>
+                  <a:srgbClr val="03306E"/>
+                </a:solidFill>
+                <a:latin typeface="Calibri"/>
+              </a:rPr>
+              <a:t>Function-oriented (top-down)</a:t>
+            </a:r>
+          </a:p>
+        </p:txBody>
+      </p:sp>
+      <p:sp>
+        <p:nvSpPr>
+          <p:cNvPr id="9" name="TextBox 8"/>
+          <p:cNvSpPr txBox="1"/>
+          <p:nvPr/>
+        </p:nvSpPr>
+        <p:spPr>
+          <a:xfrm>
+            <a:off x="777240" y="2468880"/>
+            <a:ext cx="3058058" cy="3566160"/>
           </a:xfrm>
           <a:prstGeom prst="rect">
             <a:avLst/>
@@ -5532,29 +8964,29 @@
           <a:bodyPr wrap="square" anchor="t" lIns="0" rIns="0" tIns="0" bIns="0"/>
           <a:lstStyle/>
           <a:p>
-            <a:pPr algn="ctr"/>
-            <a:r>
-              <a:rPr sz="1700" b="1" i="0">
-                <a:solidFill>
-                  <a:srgbClr val="03306E"/>
-                </a:solidFill>
-                <a:latin typeface="Calibri"/>
-              </a:rPr>
-              <a:t>Add a test</a:t>
-            </a:r>
-          </a:p>
-        </p:txBody>
-      </p:sp>
-      <p:sp>
-        <p:nvSpPr>
-          <p:cNvPr id="9" name="Rounded Rectangle 8"/>
+            <a:pPr algn="l"/>
+            <a:r>
+              <a:rPr sz="2000" b="0" i="0">
+                <a:solidFill>
+                  <a:srgbClr val="202122"/>
+                </a:solidFill>
+                <a:latin typeface="Calibri"/>
+              </a:rPr>
+              <a:t>Break the system into functions; data flow diagrams show how data changes. Divide and conquer.</a:t>
+            </a:r>
+          </a:p>
+        </p:txBody>
+      </p:sp>
+      <p:sp>
+        <p:nvSpPr>
+          <p:cNvPr id="10" name="Rounded Rectangle 9"/>
           <p:cNvSpPr/>
           <p:nvPr/>
         </p:nvSpPr>
         <p:spPr>
           <a:xfrm>
-            <a:off x="548640" y="4046220"/>
-            <a:ext cx="2109155" cy="1234439"/>
+            <a:off x="4338218" y="1600200"/>
+            <a:ext cx="3515258" cy="4572000"/>
           </a:xfrm>
           <a:prstGeom prst="roundRect">
             <a:avLst>
@@ -5591,47 +9023,14 @@
       </p:sp>
       <p:sp>
         <p:nvSpPr>
-          <p:cNvPr id="10" name="TextBox 9"/>
-          <p:cNvSpPr txBox="1"/>
-          <p:nvPr/>
-        </p:nvSpPr>
-        <p:spPr>
-          <a:xfrm>
-            <a:off x="685800" y="4183380"/>
-            <a:ext cx="1834835" cy="960119"/>
-          </a:xfrm>
-          <a:prstGeom prst="rect">
-            <a:avLst/>
-          </a:prstGeom>
-          <a:noFill/>
-        </p:spPr>
-        <p:txBody>
-          <a:bodyPr wrap="square" anchor="t" lIns="0" rIns="0" tIns="0" bIns="0"/>
-          <a:lstStyle/>
-          <a:p>
-            <a:pPr algn="l"/>
-            <a:r>
-              <a:rPr sz="1800" b="0" i="0">
-                <a:solidFill>
-                  <a:srgbClr val="202122"/>
-                </a:solidFill>
-                <a:latin typeface="Calibri"/>
-              </a:rPr>
-              <a:t>Define what the feature should do.</a:t>
-            </a:r>
-          </a:p>
-        </p:txBody>
-      </p:sp>
-      <p:sp>
-        <p:nvSpPr>
           <p:cNvPr id="11" name="Oval 10"/>
           <p:cNvSpPr/>
           <p:nvPr/>
         </p:nvSpPr>
         <p:spPr>
           <a:xfrm>
-            <a:off x="3529492" y="2491740"/>
-            <a:ext cx="640080" cy="640080"/>
+            <a:off x="4566818" y="1828800"/>
+            <a:ext cx="457200" cy="457200"/>
           </a:xfrm>
           <a:prstGeom prst="ellipse">
             <a:avLst/>
@@ -5664,7 +9063,7 @@
           <a:p>
             <a:pPr algn="ctr"/>
             <a:r>
-              <a:rPr sz="2000" b="1">
+              <a:rPr sz="1500" b="1">
                 <a:solidFill>
                   <a:srgbClr val="202122"/>
                 </a:solidFill>
@@ -5683,8 +9082,41 @@
         </p:nvSpPr>
         <p:spPr>
           <a:xfrm>
-            <a:off x="2794955" y="3268979"/>
-            <a:ext cx="2109155" cy="731520"/>
+            <a:off x="5161178" y="1801368"/>
+            <a:ext cx="2509418" cy="512064"/>
+          </a:xfrm>
+          <a:prstGeom prst="rect">
+            <a:avLst/>
+          </a:prstGeom>
+          <a:noFill/>
+        </p:spPr>
+        <p:txBody>
+          <a:bodyPr wrap="square" anchor="ctr" lIns="0" rIns="0" tIns="0" bIns="0"/>
+          <a:lstStyle/>
+          <a:p>
+            <a:pPr algn="l"/>
+            <a:r>
+              <a:rPr sz="1900" b="1" i="0">
+                <a:solidFill>
+                  <a:srgbClr val="03306E"/>
+                </a:solidFill>
+                <a:latin typeface="Calibri"/>
+              </a:rPr>
+              <a:t>Object-oriented</a:t>
+            </a:r>
+          </a:p>
+        </p:txBody>
+      </p:sp>
+      <p:sp>
+        <p:nvSpPr>
+          <p:cNvPr id="13" name="TextBox 12"/>
+          <p:cNvSpPr txBox="1"/>
+          <p:nvPr/>
+        </p:nvSpPr>
+        <p:spPr>
+          <a:xfrm>
+            <a:off x="4566818" y="2468880"/>
+            <a:ext cx="3058058" cy="3566160"/>
           </a:xfrm>
           <a:prstGeom prst="rect">
             <a:avLst/>
@@ -5695,29 +9127,29 @@
           <a:bodyPr wrap="square" anchor="t" lIns="0" rIns="0" tIns="0" bIns="0"/>
           <a:lstStyle/>
           <a:p>
-            <a:pPr algn="ctr"/>
-            <a:r>
-              <a:rPr sz="1700" b="1" i="0">
-                <a:solidFill>
-                  <a:srgbClr val="03306E"/>
-                </a:solidFill>
-                <a:latin typeface="Calibri"/>
-              </a:rPr>
-              <a:t>Run tests</a:t>
-            </a:r>
-          </a:p>
-        </p:txBody>
-      </p:sp>
-      <p:sp>
-        <p:nvSpPr>
-          <p:cNvPr id="13" name="Rounded Rectangle 12"/>
+            <a:pPr algn="l"/>
+            <a:r>
+              <a:rPr sz="2000" b="0" i="0">
+                <a:solidFill>
+                  <a:srgbClr val="202122"/>
+                </a:solidFill>
+                <a:latin typeface="Calibri"/>
+              </a:rPr>
+              <a:t>Classes, objects and methods. Encapsulation, abstraction, polymorphism, inheritance. Creational, structural and behavioural patterns.</a:t>
+            </a:r>
+          </a:p>
+        </p:txBody>
+      </p:sp>
+      <p:sp>
+        <p:nvSpPr>
+          <p:cNvPr id="14" name="Rounded Rectangle 13"/>
           <p:cNvSpPr/>
           <p:nvPr/>
         </p:nvSpPr>
         <p:spPr>
           <a:xfrm>
-            <a:off x="2794955" y="4046220"/>
-            <a:ext cx="2109155" cy="1234439"/>
+            <a:off x="8127796" y="1600200"/>
+            <a:ext cx="3515258" cy="4572000"/>
           </a:xfrm>
           <a:prstGeom prst="roundRect">
             <a:avLst>
@@ -5754,47 +9186,14 @@
       </p:sp>
       <p:sp>
         <p:nvSpPr>
-          <p:cNvPr id="14" name="TextBox 13"/>
-          <p:cNvSpPr txBox="1"/>
-          <p:nvPr/>
-        </p:nvSpPr>
-        <p:spPr>
-          <a:xfrm>
-            <a:off x="2932115" y="4183380"/>
-            <a:ext cx="1834835" cy="960119"/>
-          </a:xfrm>
-          <a:prstGeom prst="rect">
-            <a:avLst/>
-          </a:prstGeom>
-          <a:noFill/>
-        </p:spPr>
-        <p:txBody>
-          <a:bodyPr wrap="square" anchor="t" lIns="0" rIns="0" tIns="0" bIns="0"/>
-          <a:lstStyle/>
-          <a:p>
-            <a:pPr algn="l"/>
-            <a:r>
-              <a:rPr sz="1800" b="0" i="0">
-                <a:solidFill>
-                  <a:srgbClr val="202122"/>
-                </a:solidFill>
-                <a:latin typeface="Calibri"/>
-              </a:rPr>
-              <a:t>The new test fails.</a:t>
-            </a:r>
-          </a:p>
-        </p:txBody>
-      </p:sp>
-      <p:sp>
-        <p:nvSpPr>
           <p:cNvPr id="15" name="Oval 14"/>
           <p:cNvSpPr/>
           <p:nvPr/>
         </p:nvSpPr>
         <p:spPr>
           <a:xfrm>
-            <a:off x="5775807" y="2491740"/>
-            <a:ext cx="640080" cy="640080"/>
+            <a:off x="8356396" y="1828800"/>
+            <a:ext cx="457200" cy="457200"/>
           </a:xfrm>
           <a:prstGeom prst="ellipse">
             <a:avLst/>
@@ -5827,7 +9226,7 @@
           <a:p>
             <a:pPr algn="ctr"/>
             <a:r>
-              <a:rPr sz="2000" b="1">
+              <a:rPr sz="1500" b="1">
                 <a:solidFill>
                   <a:srgbClr val="202122"/>
                 </a:solidFill>
@@ -5846,8 +9245,41 @@
         </p:nvSpPr>
         <p:spPr>
           <a:xfrm>
-            <a:off x="5041270" y="3268979"/>
-            <a:ext cx="2109155" cy="731520"/>
+            <a:off x="8950756" y="1801368"/>
+            <a:ext cx="2509418" cy="512064"/>
+          </a:xfrm>
+          <a:prstGeom prst="rect">
+            <a:avLst/>
+          </a:prstGeom>
+          <a:noFill/>
+        </p:spPr>
+        <p:txBody>
+          <a:bodyPr wrap="square" anchor="ctr" lIns="0" rIns="0" tIns="0" bIns="0"/>
+          <a:lstStyle/>
+          <a:p>
+            <a:pPr algn="l"/>
+            <a:r>
+              <a:rPr sz="1900" b="1" i="0">
+                <a:solidFill>
+                  <a:srgbClr val="03306E"/>
+                </a:solidFill>
+                <a:latin typeface="Calibri"/>
+              </a:rPr>
+              <a:t>Data model design</a:t>
+            </a:r>
+          </a:p>
+        </p:txBody>
+      </p:sp>
+      <p:sp>
+        <p:nvSpPr>
+          <p:cNvPr id="17" name="TextBox 16"/>
+          <p:cNvSpPr txBox="1"/>
+          <p:nvPr/>
+        </p:nvSpPr>
+        <p:spPr>
+          <a:xfrm>
+            <a:off x="8356396" y="2468880"/>
+            <a:ext cx="3058058" cy="3566160"/>
           </a:xfrm>
           <a:prstGeom prst="rect">
             <a:avLst/>
@@ -5858,418 +9290,15 @@
           <a:bodyPr wrap="square" anchor="t" lIns="0" rIns="0" tIns="0" bIns="0"/>
           <a:lstStyle/>
           <a:p>
-            <a:pPr algn="ctr"/>
-            <a:r>
-              <a:rPr sz="1700" b="1" i="0">
-                <a:solidFill>
-                  <a:srgbClr val="03306E"/>
-                </a:solidFill>
-                <a:latin typeface="Calibri"/>
-              </a:rPr>
-              <a:t>Write code</a:t>
-            </a:r>
-          </a:p>
-        </p:txBody>
-      </p:sp>
-      <p:sp>
-        <p:nvSpPr>
-          <p:cNvPr id="17" name="Rounded Rectangle 16"/>
-          <p:cNvSpPr/>
-          <p:nvPr/>
-        </p:nvSpPr>
-        <p:spPr>
-          <a:xfrm>
-            <a:off x="5041270" y="4046220"/>
-            <a:ext cx="2109155" cy="1234439"/>
-          </a:xfrm>
-          <a:prstGeom prst="roundRect">
-            <a:avLst>
-              <a:gd name="adj" fmla="val 6000"/>
-            </a:avLst>
-          </a:prstGeom>
-          <a:solidFill>
-            <a:srgbClr val="EAF3FF"/>
-          </a:solidFill>
-          <a:ln>
-            <a:noFill/>
-          </a:ln>
-          <a:effectLst/>
-        </p:spPr>
-        <p:style>
-          <a:lnRef idx="1">
-            <a:schemeClr val="accent1"/>
-          </a:lnRef>
-          <a:fillRef idx="3">
-            <a:schemeClr val="accent1"/>
-          </a:fillRef>
-          <a:effectRef idx="2">
-            <a:schemeClr val="accent1"/>
-          </a:effectRef>
-          <a:fontRef idx="minor">
-            <a:schemeClr val="lt1"/>
-          </a:fontRef>
-        </p:style>
-        <p:txBody>
-          <a:bodyPr rtlCol="0" anchor="ctr"/>
-          <a:lstStyle/>
-          <a:p/>
-        </p:txBody>
-      </p:sp>
-      <p:sp>
-        <p:nvSpPr>
-          <p:cNvPr id="18" name="TextBox 17"/>
-          <p:cNvSpPr txBox="1"/>
-          <p:nvPr/>
-        </p:nvSpPr>
-        <p:spPr>
-          <a:xfrm>
-            <a:off x="5178430" y="4183380"/>
-            <a:ext cx="1834835" cy="960119"/>
-          </a:xfrm>
-          <a:prstGeom prst="rect">
-            <a:avLst/>
-          </a:prstGeom>
-          <a:noFill/>
-        </p:spPr>
-        <p:txBody>
-          <a:bodyPr wrap="square" anchor="t" lIns="0" rIns="0" tIns="0" bIns="0"/>
-          <a:lstStyle/>
-          <a:p>
             <a:pPr algn="l"/>
             <a:r>
-              <a:rPr sz="1800" b="0" i="0">
+              <a:rPr sz="2000" b="0" i="0">
                 <a:solidFill>
                   <a:srgbClr val="202122"/>
                 </a:solidFill>
                 <a:latin typeface="Calibri"/>
               </a:rPr>
-              <a:t>Just enough to pass.</a:t>
-            </a:r>
-          </a:p>
-        </p:txBody>
-      </p:sp>
-      <p:sp>
-        <p:nvSpPr>
-          <p:cNvPr id="19" name="Oval 18"/>
-          <p:cNvSpPr/>
-          <p:nvPr/>
-        </p:nvSpPr>
-        <p:spPr>
-          <a:xfrm>
-            <a:off x="8022122" y="2491740"/>
-            <a:ext cx="640080" cy="640080"/>
-          </a:xfrm>
-          <a:prstGeom prst="ellipse">
-            <a:avLst/>
-          </a:prstGeom>
-          <a:solidFill>
-            <a:srgbClr val="33C17A"/>
-          </a:solidFill>
-          <a:ln>
-            <a:noFill/>
-          </a:ln>
-          <a:effectLst/>
-        </p:spPr>
-        <p:style>
-          <a:lnRef idx="1">
-            <a:schemeClr val="accent1"/>
-          </a:lnRef>
-          <a:fillRef idx="3">
-            <a:schemeClr val="accent1"/>
-          </a:fillRef>
-          <a:effectRef idx="2">
-            <a:schemeClr val="accent1"/>
-          </a:effectRef>
-          <a:fontRef idx="minor">
-            <a:schemeClr val="lt1"/>
-          </a:fontRef>
-        </p:style>
-        <p:txBody>
-          <a:bodyPr rtlCol="0" anchor="ctr" lIns="0" rIns="0" tIns="0" bIns="0"/>
-          <a:lstStyle/>
-          <a:p>
-            <a:pPr algn="ctr"/>
-            <a:r>
-              <a:rPr sz="2000" b="1">
-                <a:solidFill>
-                  <a:srgbClr val="202122"/>
-                </a:solidFill>
-                <a:latin typeface="Calibri"/>
-              </a:rPr>
-              <a:t>4</a:t>
-            </a:r>
-          </a:p>
-        </p:txBody>
-      </p:sp>
-      <p:sp>
-        <p:nvSpPr>
-          <p:cNvPr id="20" name="TextBox 19"/>
-          <p:cNvSpPr txBox="1"/>
-          <p:nvPr/>
-        </p:nvSpPr>
-        <p:spPr>
-          <a:xfrm>
-            <a:off x="7287585" y="3268979"/>
-            <a:ext cx="2109155" cy="731520"/>
-          </a:xfrm>
-          <a:prstGeom prst="rect">
-            <a:avLst/>
-          </a:prstGeom>
-          <a:noFill/>
-        </p:spPr>
-        <p:txBody>
-          <a:bodyPr wrap="square" anchor="t" lIns="0" rIns="0" tIns="0" bIns="0"/>
-          <a:lstStyle/>
-          <a:p>
-            <a:pPr algn="ctr"/>
-            <a:r>
-              <a:rPr sz="1700" b="1" i="0">
-                <a:solidFill>
-                  <a:srgbClr val="03306E"/>
-                </a:solidFill>
-                <a:latin typeface="Calibri"/>
-              </a:rPr>
-              <a:t>Refactor</a:t>
-            </a:r>
-          </a:p>
-        </p:txBody>
-      </p:sp>
-      <p:sp>
-        <p:nvSpPr>
-          <p:cNvPr id="21" name="Rounded Rectangle 20"/>
-          <p:cNvSpPr/>
-          <p:nvPr/>
-        </p:nvSpPr>
-        <p:spPr>
-          <a:xfrm>
-            <a:off x="7287585" y="4046220"/>
-            <a:ext cx="2109155" cy="1234439"/>
-          </a:xfrm>
-          <a:prstGeom prst="roundRect">
-            <a:avLst>
-              <a:gd name="adj" fmla="val 6000"/>
-            </a:avLst>
-          </a:prstGeom>
-          <a:solidFill>
-            <a:srgbClr val="EAF3FF"/>
-          </a:solidFill>
-          <a:ln>
-            <a:noFill/>
-          </a:ln>
-          <a:effectLst/>
-        </p:spPr>
-        <p:style>
-          <a:lnRef idx="1">
-            <a:schemeClr val="accent1"/>
-          </a:lnRef>
-          <a:fillRef idx="3">
-            <a:schemeClr val="accent1"/>
-          </a:fillRef>
-          <a:effectRef idx="2">
-            <a:schemeClr val="accent1"/>
-          </a:effectRef>
-          <a:fontRef idx="minor">
-            <a:schemeClr val="lt1"/>
-          </a:fontRef>
-        </p:style>
-        <p:txBody>
-          <a:bodyPr rtlCol="0" anchor="ctr"/>
-          <a:lstStyle/>
-          <a:p/>
-        </p:txBody>
-      </p:sp>
-      <p:sp>
-        <p:nvSpPr>
-          <p:cNvPr id="22" name="TextBox 21"/>
-          <p:cNvSpPr txBox="1"/>
-          <p:nvPr/>
-        </p:nvSpPr>
-        <p:spPr>
-          <a:xfrm>
-            <a:off x="7424745" y="4183380"/>
-            <a:ext cx="1834835" cy="960119"/>
-          </a:xfrm>
-          <a:prstGeom prst="rect">
-            <a:avLst/>
-          </a:prstGeom>
-          <a:noFill/>
-        </p:spPr>
-        <p:txBody>
-          <a:bodyPr wrap="square" anchor="t" lIns="0" rIns="0" tIns="0" bIns="0"/>
-          <a:lstStyle/>
-          <a:p>
-            <a:pPr algn="l"/>
-            <a:r>
-              <a:rPr sz="1800" b="0" i="0">
-                <a:solidFill>
-                  <a:srgbClr val="202122"/>
-                </a:solidFill>
-                <a:latin typeface="Calibri"/>
-              </a:rPr>
-              <a:t>Run tests and tidy the code.</a:t>
-            </a:r>
-          </a:p>
-        </p:txBody>
-      </p:sp>
-      <p:sp>
-        <p:nvSpPr>
-          <p:cNvPr id="23" name="Oval 22"/>
-          <p:cNvSpPr/>
-          <p:nvPr/>
-        </p:nvSpPr>
-        <p:spPr>
-          <a:xfrm>
-            <a:off x="10268437" y="2491740"/>
-            <a:ext cx="640080" cy="640080"/>
-          </a:xfrm>
-          <a:prstGeom prst="ellipse">
-            <a:avLst/>
-          </a:prstGeom>
-          <a:solidFill>
-            <a:srgbClr val="33C17A"/>
-          </a:solidFill>
-          <a:ln>
-            <a:noFill/>
-          </a:ln>
-          <a:effectLst/>
-        </p:spPr>
-        <p:style>
-          <a:lnRef idx="1">
-            <a:schemeClr val="accent1"/>
-          </a:lnRef>
-          <a:fillRef idx="3">
-            <a:schemeClr val="accent1"/>
-          </a:fillRef>
-          <a:effectRef idx="2">
-            <a:schemeClr val="accent1"/>
-          </a:effectRef>
-          <a:fontRef idx="minor">
-            <a:schemeClr val="lt1"/>
-          </a:fontRef>
-        </p:style>
-        <p:txBody>
-          <a:bodyPr rtlCol="0" anchor="ctr" lIns="0" rIns="0" tIns="0" bIns="0"/>
-          <a:lstStyle/>
-          <a:p>
-            <a:pPr algn="ctr"/>
-            <a:r>
-              <a:rPr sz="2000" b="1">
-                <a:solidFill>
-                  <a:srgbClr val="202122"/>
-                </a:solidFill>
-                <a:latin typeface="Calibri"/>
-              </a:rPr>
-              <a:t>5</a:t>
-            </a:r>
-          </a:p>
-        </p:txBody>
-      </p:sp>
-      <p:sp>
-        <p:nvSpPr>
-          <p:cNvPr id="24" name="TextBox 23"/>
-          <p:cNvSpPr txBox="1"/>
-          <p:nvPr/>
-        </p:nvSpPr>
-        <p:spPr>
-          <a:xfrm>
-            <a:off x="9533900" y="3268979"/>
-            <a:ext cx="2109155" cy="731520"/>
-          </a:xfrm>
-          <a:prstGeom prst="rect">
-            <a:avLst/>
-          </a:prstGeom>
-          <a:noFill/>
-        </p:spPr>
-        <p:txBody>
-          <a:bodyPr wrap="square" anchor="t" lIns="0" rIns="0" tIns="0" bIns="0"/>
-          <a:lstStyle/>
-          <a:p>
-            <a:pPr algn="ctr"/>
-            <a:r>
-              <a:rPr sz="1700" b="1" i="0">
-                <a:solidFill>
-                  <a:srgbClr val="03306E"/>
-                </a:solidFill>
-                <a:latin typeface="Calibri"/>
-              </a:rPr>
-              <a:t>Repeat</a:t>
-            </a:r>
-          </a:p>
-        </p:txBody>
-      </p:sp>
-      <p:sp>
-        <p:nvSpPr>
-          <p:cNvPr id="25" name="Rounded Rectangle 24"/>
-          <p:cNvSpPr/>
-          <p:nvPr/>
-        </p:nvSpPr>
-        <p:spPr>
-          <a:xfrm>
-            <a:off x="9533900" y="4046220"/>
-            <a:ext cx="2109155" cy="1234439"/>
-          </a:xfrm>
-          <a:prstGeom prst="roundRect">
-            <a:avLst>
-              <a:gd name="adj" fmla="val 6000"/>
-            </a:avLst>
-          </a:prstGeom>
-          <a:solidFill>
-            <a:srgbClr val="EAF3FF"/>
-          </a:solidFill>
-          <a:ln>
-            <a:noFill/>
-          </a:ln>
-          <a:effectLst/>
-        </p:spPr>
-        <p:style>
-          <a:lnRef idx="1">
-            <a:schemeClr val="accent1"/>
-          </a:lnRef>
-          <a:fillRef idx="3">
-            <a:schemeClr val="accent1"/>
-          </a:fillRef>
-          <a:effectRef idx="2">
-            <a:schemeClr val="accent1"/>
-          </a:effectRef>
-          <a:fontRef idx="minor">
-            <a:schemeClr val="lt1"/>
-          </a:fontRef>
-        </p:style>
-        <p:txBody>
-          <a:bodyPr rtlCol="0" anchor="ctr"/>
-          <a:lstStyle/>
-          <a:p/>
-        </p:txBody>
-      </p:sp>
-      <p:sp>
-        <p:nvSpPr>
-          <p:cNvPr id="26" name="TextBox 25"/>
-          <p:cNvSpPr txBox="1"/>
-          <p:nvPr/>
-        </p:nvSpPr>
-        <p:spPr>
-          <a:xfrm>
-            <a:off x="9671060" y="4183380"/>
-            <a:ext cx="1834835" cy="960119"/>
-          </a:xfrm>
-          <a:prstGeom prst="rect">
-            <a:avLst/>
-          </a:prstGeom>
-          <a:noFill/>
-        </p:spPr>
-        <p:txBody>
-          <a:bodyPr wrap="square" anchor="t" lIns="0" rIns="0" tIns="0" bIns="0"/>
-          <a:lstStyle/>
-          <a:p>
-            <a:pPr algn="l"/>
-            <a:r>
-              <a:rPr sz="1800" b="0" i="0">
-                <a:solidFill>
-                  <a:srgbClr val="202122"/>
-                </a:solidFill>
-                <a:latin typeface="Calibri"/>
-              </a:rPr>
-              <a:t>Next feature.</a:t>
+              <a:t>Conceptual, logical, physical, hierarchical and relational models, using E-R models and UML.</a:t>
             </a:r>
           </a:p>
         </p:txBody>
@@ -6361,7 +9390,7 @@
                 </a:solidFill>
                 <a:latin typeface="Cambria"/>
               </a:rPr>
-              <a:t>BDD and functional design</a:t>
+              <a:t>Quick check: Design approaches (1)</a:t>
             </a:r>
           </a:p>
         </p:txBody>
@@ -6434,22 +9463,20 @@
       </p:sp>
       <p:sp>
         <p:nvSpPr>
-          <p:cNvPr id="6" name="Rounded Rectangle 5"/>
+          <p:cNvPr id="6" name="Oval 5"/>
           <p:cNvSpPr/>
           <p:nvPr/>
         </p:nvSpPr>
         <p:spPr>
           <a:xfrm>
-            <a:off x="548640" y="1600200"/>
-            <a:ext cx="5364327" cy="640080"/>
-          </a:xfrm>
-          <a:prstGeom prst="roundRect">
-            <a:avLst>
-              <a:gd name="adj" fmla="val 15000"/>
-            </a:avLst>
+            <a:off x="548640" y="1691640"/>
+            <a:ext cx="502920" cy="502920"/>
+          </a:xfrm>
+          <a:prstGeom prst="ellipse">
+            <a:avLst/>
           </a:prstGeom>
           <a:solidFill>
-            <a:srgbClr val="03306E"/>
+            <a:srgbClr val="33C17A"/>
           </a:solidFill>
           <a:ln>
             <a:noFill/>
@@ -6471,9 +9498,20 @@
           </a:fontRef>
         </p:style>
         <p:txBody>
-          <a:bodyPr rtlCol="0" anchor="ctr"/>
-          <a:lstStyle/>
-          <a:p/>
+          <a:bodyPr rtlCol="0" anchor="ctr" lIns="0" rIns="0" tIns="0" bIns="0"/>
+          <a:lstStyle/>
+          <a:p>
+            <a:pPr algn="ctr"/>
+            <a:r>
+              <a:rPr sz="1600" b="1">
+                <a:solidFill>
+                  <a:srgbClr val="202122"/>
+                </a:solidFill>
+                <a:latin typeface="Calibri"/>
+              </a:rPr>
+              <a:t>1</a:t>
+            </a:r>
+          </a:p>
         </p:txBody>
       </p:sp>
       <p:sp>
@@ -6484,49 +9522,47 @@
         </p:nvSpPr>
         <p:spPr>
           <a:xfrm>
-            <a:off x="777240" y="1600200"/>
-            <a:ext cx="4907127" cy="640080"/>
-          </a:xfrm>
-          <a:prstGeom prst="rect">
-            <a:avLst/>
-          </a:prstGeom>
-          <a:noFill/>
-        </p:spPr>
-        <p:txBody>
-          <a:bodyPr wrap="square" anchor="ctr" lIns="0" rIns="0" tIns="0" bIns="0"/>
+            <a:off x="1371600" y="1645920"/>
+            <a:ext cx="10271455" cy="1188720"/>
+          </a:xfrm>
+          <a:prstGeom prst="rect">
+            <a:avLst/>
+          </a:prstGeom>
+          <a:noFill/>
+        </p:spPr>
+        <p:txBody>
+          <a:bodyPr wrap="square" anchor="t" lIns="0" rIns="0" tIns="0" bIns="0"/>
           <a:lstStyle/>
           <a:p>
             <a:pPr algn="l"/>
             <a:r>
-              <a:rPr sz="2000" b="1" i="0">
-                <a:solidFill>
-                  <a:srgbClr val="FFFFFF"/>
-                </a:solidFill>
-                <a:latin typeface="Calibri"/>
-              </a:rPr>
-              <a:t>Behaviour-driven development</a:t>
-            </a:r>
-          </a:p>
-        </p:txBody>
-      </p:sp>
-      <p:sp>
-        <p:nvSpPr>
-          <p:cNvPr id="8" name="Rounded Rectangle 7"/>
+              <a:rPr sz="2400" b="0" i="0">
+                <a:solidFill>
+                  <a:srgbClr val="202122"/>
+                </a:solidFill>
+                <a:latin typeface="Calibri"/>
+              </a:rPr>
+              <a:t>What is inheritance?</a:t>
+            </a:r>
+          </a:p>
+        </p:txBody>
+      </p:sp>
+      <p:sp>
+        <p:nvSpPr>
+          <p:cNvPr id="8" name="Oval 7"/>
           <p:cNvSpPr/>
           <p:nvPr/>
         </p:nvSpPr>
         <p:spPr>
           <a:xfrm>
-            <a:off x="548640" y="2377440"/>
-            <a:ext cx="5364327" cy="3794760"/>
-          </a:xfrm>
-          <a:prstGeom prst="roundRect">
-            <a:avLst>
-              <a:gd name="adj" fmla="val 4000"/>
-            </a:avLst>
+            <a:off x="548640" y="3108960"/>
+            <a:ext cx="502920" cy="502920"/>
+          </a:xfrm>
+          <a:prstGeom prst="ellipse">
+            <a:avLst/>
           </a:prstGeom>
           <a:solidFill>
-            <a:srgbClr val="EAF3FF"/>
+            <a:srgbClr val="33C17A"/>
           </a:solidFill>
           <a:ln>
             <a:noFill/>
@@ -6548,9 +9584,20 @@
           </a:fontRef>
         </p:style>
         <p:txBody>
-          <a:bodyPr rtlCol="0" anchor="ctr"/>
-          <a:lstStyle/>
-          <a:p/>
+          <a:bodyPr rtlCol="0" anchor="ctr" lIns="0" rIns="0" tIns="0" bIns="0"/>
+          <a:lstStyle/>
+          <a:p>
+            <a:pPr algn="ctr"/>
+            <a:r>
+              <a:rPr sz="1600" b="1">
+                <a:solidFill>
+                  <a:srgbClr val="202122"/>
+                </a:solidFill>
+                <a:latin typeface="Calibri"/>
+              </a:rPr>
+              <a:t>2</a:t>
+            </a:r>
+          </a:p>
         </p:txBody>
       </p:sp>
       <p:sp>
@@ -6561,102 +9608,47 @@
         </p:nvSpPr>
         <p:spPr>
           <a:xfrm>
-            <a:off x="822959" y="2606040"/>
-            <a:ext cx="4815687" cy="3337560"/>
-          </a:xfrm>
-          <a:prstGeom prst="rect">
-            <a:avLst/>
-          </a:prstGeom>
-          <a:noFill/>
-        </p:spPr>
-        <p:txBody>
-          <a:bodyPr wrap="square" lIns="0" rIns="0" tIns="0" bIns="0">
-            <a:spAutoFit/>
-          </a:bodyPr>
-          <a:lstStyle/>
-          <a:p>
-            <a:pPr marL="274320" indent="-274320">
-              <a:spcAft>
-                <a:spcPts val="990"/>
-              </a:spcAft>
-              <a:buClr>
-                <a:srgbClr val="0645AD"/>
-              </a:buClr>
-              <a:buFont typeface="Arial"/>
-              <a:buChar char="•"/>
-            </a:pPr>
-            <a:r>
-              <a:rPr sz="2200" b="0">
+            <a:off x="1371600" y="3063240"/>
+            <a:ext cx="10271455" cy="1188720"/>
+          </a:xfrm>
+          <a:prstGeom prst="rect">
+            <a:avLst/>
+          </a:prstGeom>
+          <a:noFill/>
+        </p:spPr>
+        <p:txBody>
+          <a:bodyPr wrap="square" anchor="t" lIns="0" rIns="0" tIns="0" bIns="0"/>
+          <a:lstStyle/>
+          <a:p>
+            <a:pPr algn="l"/>
+            <a:r>
+              <a:rPr sz="2400" b="0" i="0">
                 <a:solidFill>
                   <a:srgbClr val="202122"/>
                 </a:solidFill>
                 <a:latin typeface="Calibri"/>
               </a:rPr>
-              <a:t>Required behaviour specified before coding</a:t>
-            </a:r>
-          </a:p>
-          <a:p>
-            <a:pPr marL="274320" indent="-274320">
-              <a:spcAft>
-                <a:spcPts val="990"/>
-              </a:spcAft>
-              <a:buClr>
-                <a:srgbClr val="0645AD"/>
-              </a:buClr>
-              <a:buFont typeface="Arial"/>
-              <a:buChar char="•"/>
-            </a:pPr>
-            <a:r>
-              <a:rPr sz="2200" b="0">
-                <a:solidFill>
-                  <a:srgbClr val="202122"/>
-                </a:solidFill>
-                <a:latin typeface="Calibri"/>
-              </a:rPr>
-              <a:t>Behaviours must have business value</a:t>
-            </a:r>
-          </a:p>
-          <a:p>
-            <a:pPr marL="274320" indent="-274320">
-              <a:spcAft>
-                <a:spcPts val="990"/>
-              </a:spcAft>
-              <a:buClr>
-                <a:srgbClr val="0645AD"/>
-              </a:buClr>
-              <a:buFont typeface="Arial"/>
-              <a:buChar char="•"/>
-            </a:pPr>
-            <a:r>
-              <a:rPr sz="2200" b="0">
-                <a:solidFill>
-                  <a:srgbClr val="202122"/>
-                </a:solidFill>
-                <a:latin typeface="Calibri"/>
-              </a:rPr>
-              <a:t>Title, narrative, acceptance criteria</a:t>
-            </a:r>
-          </a:p>
-        </p:txBody>
-      </p:sp>
-      <p:sp>
-        <p:nvSpPr>
-          <p:cNvPr id="10" name="Rounded Rectangle 9"/>
+              <a:t>What is encapsulation?</a:t>
+            </a:r>
+          </a:p>
+        </p:txBody>
+      </p:sp>
+      <p:sp>
+        <p:nvSpPr>
+          <p:cNvPr id="10" name="Oval 9"/>
           <p:cNvSpPr/>
           <p:nvPr/>
         </p:nvSpPr>
         <p:spPr>
           <a:xfrm>
-            <a:off x="6278727" y="1600200"/>
-            <a:ext cx="5364327" cy="640080"/>
-          </a:xfrm>
-          <a:prstGeom prst="roundRect">
-            <a:avLst>
-              <a:gd name="adj" fmla="val 15000"/>
-            </a:avLst>
+            <a:off x="548640" y="4526280"/>
+            <a:ext cx="502920" cy="502920"/>
+          </a:xfrm>
+          <a:prstGeom prst="ellipse">
+            <a:avLst/>
           </a:prstGeom>
           <a:solidFill>
-            <a:srgbClr val="0645AD"/>
+            <a:srgbClr val="33C17A"/>
           </a:solidFill>
           <a:ln>
             <a:noFill/>
@@ -6678,9 +9670,20 @@
           </a:fontRef>
         </p:style>
         <p:txBody>
-          <a:bodyPr rtlCol="0" anchor="ctr"/>
-          <a:lstStyle/>
-          <a:p/>
+          <a:bodyPr rtlCol="0" anchor="ctr" lIns="0" rIns="0" tIns="0" bIns="0"/>
+          <a:lstStyle/>
+          <a:p>
+            <a:pPr algn="ctr"/>
+            <a:r>
+              <a:rPr sz="1600" b="1">
+                <a:solidFill>
+                  <a:srgbClr val="202122"/>
+                </a:solidFill>
+                <a:latin typeface="Calibri"/>
+              </a:rPr>
+              <a:t>3</a:t>
+            </a:r>
+          </a:p>
         </p:txBody>
       </p:sp>
       <p:sp>
@@ -6691,178 +9694,60 @@
         </p:nvSpPr>
         <p:spPr>
           <a:xfrm>
-            <a:off x="6507327" y="1600200"/>
-            <a:ext cx="4907127" cy="640080"/>
-          </a:xfrm>
-          <a:prstGeom prst="rect">
-            <a:avLst/>
-          </a:prstGeom>
-          <a:noFill/>
-        </p:spPr>
-        <p:txBody>
-          <a:bodyPr wrap="square" anchor="ctr" lIns="0" rIns="0" tIns="0" bIns="0"/>
+            <a:off x="1371600" y="4480560"/>
+            <a:ext cx="10271455" cy="1188720"/>
+          </a:xfrm>
+          <a:prstGeom prst="rect">
+            <a:avLst/>
+          </a:prstGeom>
+          <a:noFill/>
+        </p:spPr>
+        <p:txBody>
+          <a:bodyPr wrap="square" anchor="t" lIns="0" rIns="0" tIns="0" bIns="0"/>
           <a:lstStyle/>
           <a:p>
             <a:pPr algn="l"/>
             <a:r>
-              <a:rPr sz="2000" b="1" i="0">
-                <a:solidFill>
-                  <a:srgbClr val="FFFFFF"/>
-                </a:solidFill>
-                <a:latin typeface="Calibri"/>
-              </a:rPr>
-              <a:t>Functional design</a:t>
-            </a:r>
-          </a:p>
-        </p:txBody>
-      </p:sp>
-      <p:sp>
-        <p:nvSpPr>
-          <p:cNvPr id="12" name="Rounded Rectangle 11"/>
-          <p:cNvSpPr/>
-          <p:nvPr/>
-        </p:nvSpPr>
-        <p:spPr>
-          <a:xfrm>
-            <a:off x="6278727" y="2377440"/>
-            <a:ext cx="5364327" cy="3794760"/>
-          </a:xfrm>
-          <a:prstGeom prst="roundRect">
-            <a:avLst>
-              <a:gd name="adj" fmla="val 4000"/>
-            </a:avLst>
-          </a:prstGeom>
-          <a:solidFill>
-            <a:srgbClr val="EAF3FF"/>
-          </a:solidFill>
-          <a:ln>
-            <a:noFill/>
-          </a:ln>
-          <a:effectLst/>
-        </p:spPr>
-        <p:style>
-          <a:lnRef idx="1">
-            <a:schemeClr val="accent1"/>
-          </a:lnRef>
-          <a:fillRef idx="3">
-            <a:schemeClr val="accent1"/>
-          </a:fillRef>
-          <a:effectRef idx="2">
-            <a:schemeClr val="accent1"/>
-          </a:effectRef>
-          <a:fontRef idx="minor">
-            <a:schemeClr val="lt1"/>
-          </a:fontRef>
-        </p:style>
-        <p:txBody>
-          <a:bodyPr rtlCol="0" anchor="ctr"/>
-          <a:lstStyle/>
-          <a:p/>
-        </p:txBody>
-      </p:sp>
-      <p:sp>
-        <p:nvSpPr>
-          <p:cNvPr id="13" name="TextBox 12"/>
-          <p:cNvSpPr txBox="1"/>
-          <p:nvPr/>
-        </p:nvSpPr>
-        <p:spPr>
-          <a:xfrm>
-            <a:off x="6553047" y="2606040"/>
-            <a:ext cx="4815687" cy="3337560"/>
-          </a:xfrm>
-          <a:prstGeom prst="rect">
-            <a:avLst/>
-          </a:prstGeom>
-          <a:noFill/>
-        </p:spPr>
-        <p:txBody>
-          <a:bodyPr wrap="square" lIns="0" rIns="0" tIns="0" bIns="0">
-            <a:spAutoFit/>
-          </a:bodyPr>
-          <a:lstStyle/>
-          <a:p>
-            <a:pPr marL="274320" indent="-274320">
-              <a:spcAft>
-                <a:spcPts val="990"/>
-              </a:spcAft>
-              <a:buClr>
-                <a:srgbClr val="0645AD"/>
-              </a:buClr>
-              <a:buFont typeface="Arial"/>
-              <a:buChar char="•"/>
-            </a:pPr>
-            <a:r>
-              <a:rPr sz="2200" b="0">
+              <a:rPr sz="2400" b="0" i="0">
                 <a:solidFill>
                   <a:srgbClr val="202122"/>
                 </a:solidFill>
                 <a:latin typeface="Calibri"/>
               </a:rPr>
-              <a:t>Modules each perform one function</a:t>
-            </a:r>
-          </a:p>
-          <a:p>
-            <a:pPr marL="274320" indent="-274320">
-              <a:spcAft>
-                <a:spcPts val="990"/>
-              </a:spcAft>
-              <a:buClr>
-                <a:srgbClr val="0645AD"/>
-              </a:buClr>
-              <a:buFont typeface="Arial"/>
-              <a:buChar char="•"/>
-            </a:pPr>
-            <a:r>
-              <a:rPr sz="2200" b="0">
-                <a:solidFill>
-                  <a:srgbClr val="202122"/>
-                </a:solidFill>
-                <a:latin typeface="Calibri"/>
-              </a:rPr>
-              <a:t>Recursion and closures</a:t>
-            </a:r>
-          </a:p>
-          <a:p>
-            <a:pPr marL="274320" indent="-274320">
-              <a:spcAft>
-                <a:spcPts val="990"/>
-              </a:spcAft>
-              <a:buClr>
-                <a:srgbClr val="0645AD"/>
-              </a:buClr>
-              <a:buFont typeface="Arial"/>
-              <a:buChar char="•"/>
-            </a:pPr>
-            <a:r>
-              <a:rPr sz="2200" b="0">
-                <a:solidFill>
-                  <a:srgbClr val="202122"/>
-                </a:solidFill>
-                <a:latin typeface="Calibri"/>
-              </a:rPr>
-              <a:t>First-class, higher-order and anonymous functions</a:t>
-            </a:r>
-          </a:p>
-          <a:p>
-            <a:pPr marL="274320" indent="-274320">
-              <a:spcAft>
-                <a:spcPts val="990"/>
-              </a:spcAft>
-              <a:buClr>
-                <a:srgbClr val="0645AD"/>
-              </a:buClr>
-              <a:buFont typeface="Arial"/>
-              <a:buChar char="•"/>
-            </a:pPr>
-            <a:r>
-              <a:rPr sz="2200" b="0">
-                <a:solidFill>
-                  <a:srgbClr val="202122"/>
-                </a:solidFill>
-                <a:latin typeface="Calibri"/>
-              </a:rPr>
-              <a:t>Currying</a:t>
+              <a:t>Which tools support data model design?</a:t>
+            </a:r>
+          </a:p>
+        </p:txBody>
+      </p:sp>
+      <p:sp>
+        <p:nvSpPr>
+          <p:cNvPr id="12" name="TextBox 11"/>
+          <p:cNvSpPr txBox="1"/>
+          <p:nvPr/>
+        </p:nvSpPr>
+        <p:spPr>
+          <a:xfrm>
+            <a:off x="548640" y="5852160"/>
+            <a:ext cx="11094415" cy="365760"/>
+          </a:xfrm>
+          <a:prstGeom prst="rect">
+            <a:avLst/>
+          </a:prstGeom>
+          <a:noFill/>
+        </p:spPr>
+        <p:txBody>
+          <a:bodyPr wrap="square" anchor="t" lIns="0" rIns="0" tIns="0" bIns="0"/>
+          <a:lstStyle/>
+          <a:p>
+            <a:pPr algn="l"/>
+            <a:r>
+              <a:rPr sz="1300" b="0" i="1">
+                <a:solidFill>
+                  <a:srgbClr val="54595D"/>
+                </a:solidFill>
+                <a:latin typeface="Calibri"/>
+              </a:rPr>
+              <a:t>Answer on mini whiteboards or in your book. Answers are in the speaker notes.</a:t>
             </a:r>
           </a:p>
         </p:txBody>
@@ -6954,7 +9839,7 @@
                 </a:solidFill>
                 <a:latin typeface="Cambria"/>
               </a:rPr>
-              <a:t>Check your understanding</a:t>
+              <a:t>Test-driven development (TDD)</a:t>
             </a:r>
           </a:p>
         </p:txBody>
@@ -7027,14 +9912,129 @@
       </p:sp>
       <p:sp>
         <p:nvSpPr>
-          <p:cNvPr id="6" name="Oval 5"/>
+          <p:cNvPr id="6" name="TextBox 5"/>
+          <p:cNvSpPr txBox="1"/>
+          <p:nvPr/>
+        </p:nvSpPr>
+        <p:spPr>
+          <a:xfrm>
+            <a:off x="548640" y="1554480"/>
+            <a:ext cx="6720840" cy="4617720"/>
+          </a:xfrm>
+          <a:prstGeom prst="rect">
+            <a:avLst/>
+          </a:prstGeom>
+          <a:noFill/>
+        </p:spPr>
+        <p:txBody>
+          <a:bodyPr wrap="square" lIns="0" rIns="0" tIns="0" bIns="0">
+            <a:spAutoFit/>
+          </a:bodyPr>
+          <a:lstStyle/>
+          <a:p>
+            <a:pPr>
+              <a:spcAft>
+                <a:spcPts val="1320"/>
+              </a:spcAft>
+            </a:pPr>
+            <a:r>
+              <a:rPr sz="2200" b="0">
+                <a:solidFill>
+                  <a:srgbClr val="202122"/>
+                </a:solidFill>
+                <a:latin typeface="Calibri"/>
+              </a:rPr>
+              <a:t>In test-driven development, tests are written before the code.</a:t>
+            </a:r>
+          </a:p>
+          <a:p>
+            <a:pPr>
+              <a:spcAft>
+                <a:spcPts val="1320"/>
+              </a:spcAft>
+            </a:pPr>
+            <a:r>
+              <a:rPr sz="2200" b="0">
+                <a:solidFill>
+                  <a:srgbClr val="202122"/>
+                </a:solidFill>
+                <a:latin typeface="Calibri"/>
+              </a:rPr>
+              <a:t>Add a test describing what a new feature should do. Run all the tests: the new one fails, because the feature doesn't exist yet. Write just enough code to make it pass. Run the tests again and refactor (tidy the code) while keeping them passing. Repeat for the next feature.</a:t>
+            </a:r>
+          </a:p>
+          <a:p>
+            <a:pPr>
+              <a:spcAft>
+                <a:spcPts val="1320"/>
+              </a:spcAft>
+            </a:pPr>
+            <a:r>
+              <a:rPr sz="2200" b="0">
+                <a:solidFill>
+                  <a:srgbClr val="202122"/>
+                </a:solidFill>
+                <a:latin typeface="Calibri"/>
+              </a:rPr>
+              <a:t>This keeps code focused on requirements, catches regressions immediately, and leaves a full set of automated tests behind.</a:t>
+            </a:r>
+          </a:p>
+        </p:txBody>
+      </p:sp>
+      <p:sp>
+        <p:nvSpPr>
+          <p:cNvPr id="7" name="Rounded Rectangle 6"/>
           <p:cNvSpPr/>
           <p:nvPr/>
         </p:nvSpPr>
         <p:spPr>
           <a:xfrm>
-            <a:off x="548640" y="1618488"/>
-            <a:ext cx="411480" cy="411480"/>
+            <a:off x="7772400" y="1554480"/>
+            <a:ext cx="3867912" cy="4526280"/>
+          </a:xfrm>
+          <a:prstGeom prst="roundRect">
+            <a:avLst>
+              <a:gd name="adj" fmla="val 8000"/>
+            </a:avLst>
+          </a:prstGeom>
+          <a:solidFill>
+            <a:srgbClr val="03306E"/>
+          </a:solidFill>
+          <a:ln>
+            <a:noFill/>
+          </a:ln>
+          <a:effectLst/>
+        </p:spPr>
+        <p:style>
+          <a:lnRef idx="1">
+            <a:schemeClr val="accent1"/>
+          </a:lnRef>
+          <a:fillRef idx="3">
+            <a:schemeClr val="accent1"/>
+          </a:fillRef>
+          <a:effectRef idx="2">
+            <a:schemeClr val="accent1"/>
+          </a:effectRef>
+          <a:fontRef idx="minor">
+            <a:schemeClr val="lt1"/>
+          </a:fontRef>
+        </p:style>
+        <p:txBody>
+          <a:bodyPr rtlCol="0" anchor="ctr"/>
+          <a:lstStyle/>
+          <a:p/>
+        </p:txBody>
+      </p:sp>
+      <p:sp>
+        <p:nvSpPr>
+          <p:cNvPr id="8" name="Oval 7"/>
+          <p:cNvSpPr/>
+          <p:nvPr/>
+        </p:nvSpPr>
+        <p:spPr>
+          <a:xfrm>
+            <a:off x="8046720" y="1828800"/>
+            <a:ext cx="548640" cy="548640"/>
           </a:xfrm>
           <a:prstGeom prst="ellipse">
             <a:avLst/>
@@ -7067,27 +10067,27 @@
           <a:p>
             <a:pPr algn="ctr"/>
             <a:r>
-              <a:rPr sz="1400" b="1">
+              <a:rPr sz="1300" b="1">
                 <a:solidFill>
                   <a:srgbClr val="202122"/>
                 </a:solidFill>
                 <a:latin typeface="Calibri"/>
               </a:rPr>
-              <a:t>1</a:t>
-            </a:r>
-          </a:p>
-        </p:txBody>
-      </p:sp>
-      <p:sp>
-        <p:nvSpPr>
-          <p:cNvPr id="7" name="TextBox 6"/>
-          <p:cNvSpPr txBox="1"/>
-          <p:nvPr/>
-        </p:nvSpPr>
-        <p:spPr>
-          <a:xfrm>
-            <a:off x="1234440" y="1600200"/>
-            <a:ext cx="10408615" cy="1030986"/>
+              <a:t>e.g.</a:t>
+            </a:r>
+          </a:p>
+        </p:txBody>
+      </p:sp>
+      <p:sp>
+        <p:nvSpPr>
+          <p:cNvPr id="9" name="TextBox 8"/>
+          <p:cNvSpPr txBox="1"/>
+          <p:nvPr/>
+        </p:nvSpPr>
+        <p:spPr>
+          <a:xfrm>
+            <a:off x="8046720" y="2560320"/>
+            <a:ext cx="3291840" cy="365760"/>
           </a:xfrm>
           <a:prstGeom prst="rect">
             <a:avLst/>
@@ -7100,80 +10100,27 @@
           <a:p>
             <a:pPr algn="l"/>
             <a:r>
-              <a:rPr sz="2200" b="0" i="0">
-                <a:solidFill>
-                  <a:srgbClr val="202122"/>
-                </a:solidFill>
-                <a:latin typeface="Calibri"/>
-              </a:rPr>
-              <a:t>What are the four characteristics of OOP?</a:t>
-            </a:r>
-          </a:p>
-        </p:txBody>
-      </p:sp>
-      <p:sp>
-        <p:nvSpPr>
-          <p:cNvPr id="8" name="Oval 7"/>
-          <p:cNvSpPr/>
-          <p:nvPr/>
-        </p:nvSpPr>
-        <p:spPr>
-          <a:xfrm>
-            <a:off x="548640" y="2814066"/>
-            <a:ext cx="411480" cy="411480"/>
-          </a:xfrm>
-          <a:prstGeom prst="ellipse">
-            <a:avLst/>
-          </a:prstGeom>
-          <a:solidFill>
-            <a:srgbClr val="33C17A"/>
-          </a:solidFill>
-          <a:ln>
-            <a:noFill/>
-          </a:ln>
-          <a:effectLst/>
-        </p:spPr>
-        <p:style>
-          <a:lnRef idx="1">
-            <a:schemeClr val="accent1"/>
-          </a:lnRef>
-          <a:fillRef idx="3">
-            <a:schemeClr val="accent1"/>
-          </a:fillRef>
-          <a:effectRef idx="2">
-            <a:schemeClr val="accent1"/>
-          </a:effectRef>
-          <a:fontRef idx="minor">
-            <a:schemeClr val="lt1"/>
-          </a:fontRef>
-        </p:style>
-        <p:txBody>
-          <a:bodyPr rtlCol="0" anchor="ctr" lIns="0" rIns="0" tIns="0" bIns="0"/>
-          <a:lstStyle/>
-          <a:p>
-            <a:pPr algn="ctr"/>
-            <a:r>
-              <a:rPr sz="1400" b="1">
-                <a:solidFill>
-                  <a:srgbClr val="202122"/>
-                </a:solidFill>
-                <a:latin typeface="Calibri"/>
-              </a:rPr>
-              <a:t>2</a:t>
-            </a:r>
-          </a:p>
-        </p:txBody>
-      </p:sp>
-      <p:sp>
-        <p:nvSpPr>
-          <p:cNvPr id="9" name="TextBox 8"/>
-          <p:cNvSpPr txBox="1"/>
-          <p:nvPr/>
-        </p:nvSpPr>
-        <p:spPr>
-          <a:xfrm>
-            <a:off x="1234440" y="2795778"/>
-            <a:ext cx="10408615" cy="1030986"/>
+              <a:rPr sz="1300" b="1" i="0">
+                <a:solidFill>
+                  <a:srgbClr val="A9C8F0"/>
+                </a:solidFill>
+                <a:latin typeface="Calibri"/>
+              </a:rPr>
+              <a:t>EXAMPLE</a:t>
+            </a:r>
+          </a:p>
+        </p:txBody>
+      </p:sp>
+      <p:sp>
+        <p:nvSpPr>
+          <p:cNvPr id="10" name="TextBox 9"/>
+          <p:cNvSpPr txBox="1"/>
+          <p:nvPr/>
+        </p:nvSpPr>
+        <p:spPr>
+          <a:xfrm>
+            <a:off x="8046720" y="2971800"/>
+            <a:ext cx="3291840" cy="2971800"/>
           </a:xfrm>
           <a:prstGeom prst="rect">
             <a:avLst/>
@@ -7186,185 +10133,13 @@
           <a:p>
             <a:pPr algn="l"/>
             <a:r>
-              <a:rPr sz="2200" b="0" i="0">
-                <a:solidFill>
-                  <a:srgbClr val="202122"/>
-                </a:solidFill>
-                <a:latin typeface="Calibri"/>
-              </a:rPr>
-              <a:t>In TDD, what comes first: the test or the code?</a:t>
-            </a:r>
-          </a:p>
-        </p:txBody>
-      </p:sp>
-      <p:sp>
-        <p:nvSpPr>
-          <p:cNvPr id="10" name="Oval 9"/>
-          <p:cNvSpPr/>
-          <p:nvPr/>
-        </p:nvSpPr>
-        <p:spPr>
-          <a:xfrm>
-            <a:off x="548640" y="4009644"/>
-            <a:ext cx="411480" cy="411480"/>
-          </a:xfrm>
-          <a:prstGeom prst="ellipse">
-            <a:avLst/>
-          </a:prstGeom>
-          <a:solidFill>
-            <a:srgbClr val="33C17A"/>
-          </a:solidFill>
-          <a:ln>
-            <a:noFill/>
-          </a:ln>
-          <a:effectLst/>
-        </p:spPr>
-        <p:style>
-          <a:lnRef idx="1">
-            <a:schemeClr val="accent1"/>
-          </a:lnRef>
-          <a:fillRef idx="3">
-            <a:schemeClr val="accent1"/>
-          </a:fillRef>
-          <a:effectRef idx="2">
-            <a:schemeClr val="accent1"/>
-          </a:effectRef>
-          <a:fontRef idx="minor">
-            <a:schemeClr val="lt1"/>
-          </a:fontRef>
-        </p:style>
-        <p:txBody>
-          <a:bodyPr rtlCol="0" anchor="ctr" lIns="0" rIns="0" tIns="0" bIns="0"/>
-          <a:lstStyle/>
-          <a:p>
-            <a:pPr algn="ctr"/>
-            <a:r>
-              <a:rPr sz="1400" b="1">
-                <a:solidFill>
-                  <a:srgbClr val="202122"/>
-                </a:solidFill>
-                <a:latin typeface="Calibri"/>
-              </a:rPr>
-              <a:t>3</a:t>
-            </a:r>
-          </a:p>
-        </p:txBody>
-      </p:sp>
-      <p:sp>
-        <p:nvSpPr>
-          <p:cNvPr id="11" name="TextBox 10"/>
-          <p:cNvSpPr txBox="1"/>
-          <p:nvPr/>
-        </p:nvSpPr>
-        <p:spPr>
-          <a:xfrm>
-            <a:off x="1234440" y="3991356"/>
-            <a:ext cx="10408615" cy="1030986"/>
-          </a:xfrm>
-          <a:prstGeom prst="rect">
-            <a:avLst/>
-          </a:prstGeom>
-          <a:noFill/>
-        </p:spPr>
-        <p:txBody>
-          <a:bodyPr wrap="square" anchor="t" lIns="0" rIns="0" tIns="0" bIns="0"/>
-          <a:lstStyle/>
-          <a:p>
-            <a:pPr algn="l"/>
-            <a:r>
-              <a:rPr sz="2200" b="0" i="0">
-                <a:solidFill>
-                  <a:srgbClr val="202122"/>
-                </a:solidFill>
-                <a:latin typeface="Calibri"/>
-              </a:rPr>
-              <a:t>What is a higher-order function?</a:t>
-            </a:r>
-          </a:p>
-        </p:txBody>
-      </p:sp>
-      <p:sp>
-        <p:nvSpPr>
-          <p:cNvPr id="12" name="Oval 11"/>
-          <p:cNvSpPr/>
-          <p:nvPr/>
-        </p:nvSpPr>
-        <p:spPr>
-          <a:xfrm>
-            <a:off x="548640" y="5205221"/>
-            <a:ext cx="411480" cy="411480"/>
-          </a:xfrm>
-          <a:prstGeom prst="ellipse">
-            <a:avLst/>
-          </a:prstGeom>
-          <a:solidFill>
-            <a:srgbClr val="33C17A"/>
-          </a:solidFill>
-          <a:ln>
-            <a:noFill/>
-          </a:ln>
-          <a:effectLst/>
-        </p:spPr>
-        <p:style>
-          <a:lnRef idx="1">
-            <a:schemeClr val="accent1"/>
-          </a:lnRef>
-          <a:fillRef idx="3">
-            <a:schemeClr val="accent1"/>
-          </a:fillRef>
-          <a:effectRef idx="2">
-            <a:schemeClr val="accent1"/>
-          </a:effectRef>
-          <a:fontRef idx="minor">
-            <a:schemeClr val="lt1"/>
-          </a:fontRef>
-        </p:style>
-        <p:txBody>
-          <a:bodyPr rtlCol="0" anchor="ctr" lIns="0" rIns="0" tIns="0" bIns="0"/>
-          <a:lstStyle/>
-          <a:p>
-            <a:pPr algn="ctr"/>
-            <a:r>
-              <a:rPr sz="1400" b="1">
-                <a:solidFill>
-                  <a:srgbClr val="202122"/>
-                </a:solidFill>
-                <a:latin typeface="Calibri"/>
-              </a:rPr>
-              <a:t>4</a:t>
-            </a:r>
-          </a:p>
-        </p:txBody>
-      </p:sp>
-      <p:sp>
-        <p:nvSpPr>
-          <p:cNvPr id="13" name="TextBox 12"/>
-          <p:cNvSpPr txBox="1"/>
-          <p:nvPr/>
-        </p:nvSpPr>
-        <p:spPr>
-          <a:xfrm>
-            <a:off x="1234440" y="5186933"/>
-            <a:ext cx="10408615" cy="1030986"/>
-          </a:xfrm>
-          <a:prstGeom prst="rect">
-            <a:avLst/>
-          </a:prstGeom>
-          <a:noFill/>
-        </p:spPr>
-        <p:txBody>
-          <a:bodyPr wrap="square" anchor="t" lIns="0" rIns="0" tIns="0" bIns="0"/>
-          <a:lstStyle/>
-          <a:p>
-            <a:pPr algn="l"/>
-            <a:r>
-              <a:rPr sz="2200" b="0" i="0">
-                <a:solidFill>
-                  <a:srgbClr val="202122"/>
-                </a:solidFill>
-                <a:latin typeface="Calibri"/>
-              </a:rPr>
-              <a:t>Which tools support data model design?</a:t>
+              <a:rPr sz="1900" b="0" i="0">
+                <a:solidFill>
+                  <a:srgbClr val="FFFFFF"/>
+                </a:solidFill>
+                <a:latin typeface="Cambria"/>
+              </a:rPr>
+              <a:t>Test: grade(85) should return 'A'. It fails. Write the grade function. It passes. Add the next test: grade(40) returns 'U'.</a:t>
             </a:r>
           </a:p>
         </p:txBody>
@@ -7456,7 +10231,7 @@
                 </a:solidFill>
                 <a:latin typeface="Cambria"/>
               </a:rPr>
-              <a:t>Answers</a:t>
+              <a:t>Test-driven development (TDD)</a:t>
             </a:r>
           </a:p>
         </p:txBody>
@@ -7529,14 +10304,56 @@
       </p:sp>
       <p:sp>
         <p:nvSpPr>
-          <p:cNvPr id="6" name="Oval 5"/>
+          <p:cNvPr id="6" name="Rectangle 5"/>
           <p:cNvSpPr/>
           <p:nvPr/>
         </p:nvSpPr>
         <p:spPr>
           <a:xfrm>
-            <a:off x="548640" y="1618488"/>
-            <a:ext cx="411480" cy="411480"/>
+            <a:off x="1603217" y="2793492"/>
+            <a:ext cx="8985260" cy="36576"/>
+          </a:xfrm>
+          <a:prstGeom prst="rect">
+            <a:avLst/>
+          </a:prstGeom>
+          <a:solidFill>
+            <a:srgbClr val="A9C8F0"/>
+          </a:solidFill>
+          <a:ln>
+            <a:noFill/>
+          </a:ln>
+          <a:effectLst/>
+        </p:spPr>
+        <p:style>
+          <a:lnRef idx="1">
+            <a:schemeClr val="accent1"/>
+          </a:lnRef>
+          <a:fillRef idx="3">
+            <a:schemeClr val="accent1"/>
+          </a:fillRef>
+          <a:effectRef idx="2">
+            <a:schemeClr val="accent1"/>
+          </a:effectRef>
+          <a:fontRef idx="minor">
+            <a:schemeClr val="lt1"/>
+          </a:fontRef>
+        </p:style>
+        <p:txBody>
+          <a:bodyPr rtlCol="0" anchor="ctr"/>
+          <a:lstStyle/>
+          <a:p/>
+        </p:txBody>
+      </p:sp>
+      <p:sp>
+        <p:nvSpPr>
+          <p:cNvPr id="7" name="Oval 6"/>
+          <p:cNvSpPr/>
+          <p:nvPr/>
+        </p:nvSpPr>
+        <p:spPr>
+          <a:xfrm>
+            <a:off x="1283177" y="2491740"/>
+            <a:ext cx="640080" cy="640080"/>
           </a:xfrm>
           <a:prstGeom prst="ellipse">
             <a:avLst/>
@@ -7569,7 +10386,7 @@
           <a:p>
             <a:pPr algn="ctr"/>
             <a:r>
-              <a:rPr sz="1400" b="1">
+              <a:rPr sz="2000" b="1">
                 <a:solidFill>
                   <a:srgbClr val="202122"/>
                 </a:solidFill>
@@ -7582,14 +10399,14 @@
       </p:sp>
       <p:sp>
         <p:nvSpPr>
-          <p:cNvPr id="7" name="TextBox 6"/>
-          <p:cNvSpPr txBox="1"/>
-          <p:nvPr/>
-        </p:nvSpPr>
-        <p:spPr>
-          <a:xfrm>
-            <a:off x="1234440" y="1600200"/>
-            <a:ext cx="10408615" cy="1030986"/>
+          <p:cNvPr id="8" name="TextBox 7"/>
+          <p:cNvSpPr txBox="1"/>
+          <p:nvPr/>
+        </p:nvSpPr>
+        <p:spPr>
+          <a:xfrm>
+            <a:off x="548640" y="3268979"/>
+            <a:ext cx="2109155" cy="731520"/>
           </a:xfrm>
           <a:prstGeom prst="rect">
             <a:avLst/>
@@ -7600,40 +10417,106 @@
           <a:bodyPr wrap="square" anchor="t" lIns="0" rIns="0" tIns="0" bIns="0"/>
           <a:lstStyle/>
           <a:p>
+            <a:pPr algn="ctr"/>
+            <a:r>
+              <a:rPr sz="1700" b="1" i="0">
+                <a:solidFill>
+                  <a:srgbClr val="03306E"/>
+                </a:solidFill>
+                <a:latin typeface="Calibri"/>
+              </a:rPr>
+              <a:t>Add a test</a:t>
+            </a:r>
+          </a:p>
+        </p:txBody>
+      </p:sp>
+      <p:sp>
+        <p:nvSpPr>
+          <p:cNvPr id="9" name="Rounded Rectangle 8"/>
+          <p:cNvSpPr/>
+          <p:nvPr/>
+        </p:nvSpPr>
+        <p:spPr>
+          <a:xfrm>
+            <a:off x="548640" y="4046220"/>
+            <a:ext cx="2109155" cy="1234439"/>
+          </a:xfrm>
+          <a:prstGeom prst="roundRect">
+            <a:avLst>
+              <a:gd name="adj" fmla="val 6000"/>
+            </a:avLst>
+          </a:prstGeom>
+          <a:solidFill>
+            <a:srgbClr val="EAF3FF"/>
+          </a:solidFill>
+          <a:ln>
+            <a:noFill/>
+          </a:ln>
+          <a:effectLst/>
+        </p:spPr>
+        <p:style>
+          <a:lnRef idx="1">
+            <a:schemeClr val="accent1"/>
+          </a:lnRef>
+          <a:fillRef idx="3">
+            <a:schemeClr val="accent1"/>
+          </a:fillRef>
+          <a:effectRef idx="2">
+            <a:schemeClr val="accent1"/>
+          </a:effectRef>
+          <a:fontRef idx="minor">
+            <a:schemeClr val="lt1"/>
+          </a:fontRef>
+        </p:style>
+        <p:txBody>
+          <a:bodyPr rtlCol="0" anchor="ctr"/>
+          <a:lstStyle/>
+          <a:p/>
+        </p:txBody>
+      </p:sp>
+      <p:sp>
+        <p:nvSpPr>
+          <p:cNvPr id="10" name="TextBox 9"/>
+          <p:cNvSpPr txBox="1"/>
+          <p:nvPr/>
+        </p:nvSpPr>
+        <p:spPr>
+          <a:xfrm>
+            <a:off x="685800" y="4183380"/>
+            <a:ext cx="1834835" cy="960119"/>
+          </a:xfrm>
+          <a:prstGeom prst="rect">
+            <a:avLst/>
+          </a:prstGeom>
+          <a:noFill/>
+        </p:spPr>
+        <p:txBody>
+          <a:bodyPr wrap="square" anchor="t" lIns="0" rIns="0" tIns="0" bIns="0"/>
+          <a:lstStyle/>
+          <a:p>
             <a:pPr algn="l"/>
             <a:r>
               <a:rPr sz="1800" b="0" i="0">
                 <a:solidFill>
-                  <a:srgbClr val="54595D"/>
-                </a:solidFill>
-                <a:latin typeface="Calibri"/>
-              </a:rPr>
-              <a:t>What are the four characteristics of OOP?</a:t>
-            </a:r>
-          </a:p>
-          <a:p>
-            <a:r>
-              <a:rPr sz="1800" b="1">
-                <a:solidFill>
-                  <a:srgbClr val="03306E"/>
-                </a:solidFill>
-                <a:latin typeface="Calibri"/>
-              </a:rPr>
-              <a:t>Encapsulation, data abstraction, polymorphism, inheritance.</a:t>
-            </a:r>
-          </a:p>
-        </p:txBody>
-      </p:sp>
-      <p:sp>
-        <p:nvSpPr>
-          <p:cNvPr id="8" name="Oval 7"/>
+                  <a:srgbClr val="202122"/>
+                </a:solidFill>
+                <a:latin typeface="Calibri"/>
+              </a:rPr>
+              <a:t>Define what the feature should do.</a:t>
+            </a:r>
+          </a:p>
+        </p:txBody>
+      </p:sp>
+      <p:sp>
+        <p:nvSpPr>
+          <p:cNvPr id="11" name="Oval 10"/>
           <p:cNvSpPr/>
           <p:nvPr/>
         </p:nvSpPr>
         <p:spPr>
           <a:xfrm>
-            <a:off x="548640" y="2814066"/>
-            <a:ext cx="411480" cy="411480"/>
+            <a:off x="3529492" y="2491740"/>
+            <a:ext cx="640080" cy="640080"/>
           </a:xfrm>
           <a:prstGeom prst="ellipse">
             <a:avLst/>
@@ -7666,7 +10549,7 @@
           <a:p>
             <a:pPr algn="ctr"/>
             <a:r>
-              <a:rPr sz="1400" b="1">
+              <a:rPr sz="2000" b="1">
                 <a:solidFill>
                   <a:srgbClr val="202122"/>
                 </a:solidFill>
@@ -7679,14 +10562,14 @@
       </p:sp>
       <p:sp>
         <p:nvSpPr>
-          <p:cNvPr id="9" name="TextBox 8"/>
-          <p:cNvSpPr txBox="1"/>
-          <p:nvPr/>
-        </p:nvSpPr>
-        <p:spPr>
-          <a:xfrm>
-            <a:off x="1234440" y="2795778"/>
-            <a:ext cx="10408615" cy="1030986"/>
+          <p:cNvPr id="12" name="TextBox 11"/>
+          <p:cNvSpPr txBox="1"/>
+          <p:nvPr/>
+        </p:nvSpPr>
+        <p:spPr>
+          <a:xfrm>
+            <a:off x="2794955" y="3268979"/>
+            <a:ext cx="2109155" cy="731520"/>
           </a:xfrm>
           <a:prstGeom prst="rect">
             <a:avLst/>
@@ -7697,40 +10580,106 @@
           <a:bodyPr wrap="square" anchor="t" lIns="0" rIns="0" tIns="0" bIns="0"/>
           <a:lstStyle/>
           <a:p>
+            <a:pPr algn="ctr"/>
+            <a:r>
+              <a:rPr sz="1700" b="1" i="0">
+                <a:solidFill>
+                  <a:srgbClr val="03306E"/>
+                </a:solidFill>
+                <a:latin typeface="Calibri"/>
+              </a:rPr>
+              <a:t>Run tests</a:t>
+            </a:r>
+          </a:p>
+        </p:txBody>
+      </p:sp>
+      <p:sp>
+        <p:nvSpPr>
+          <p:cNvPr id="13" name="Rounded Rectangle 12"/>
+          <p:cNvSpPr/>
+          <p:nvPr/>
+        </p:nvSpPr>
+        <p:spPr>
+          <a:xfrm>
+            <a:off x="2794955" y="4046220"/>
+            <a:ext cx="2109155" cy="1234439"/>
+          </a:xfrm>
+          <a:prstGeom prst="roundRect">
+            <a:avLst>
+              <a:gd name="adj" fmla="val 6000"/>
+            </a:avLst>
+          </a:prstGeom>
+          <a:solidFill>
+            <a:srgbClr val="EAF3FF"/>
+          </a:solidFill>
+          <a:ln>
+            <a:noFill/>
+          </a:ln>
+          <a:effectLst/>
+        </p:spPr>
+        <p:style>
+          <a:lnRef idx="1">
+            <a:schemeClr val="accent1"/>
+          </a:lnRef>
+          <a:fillRef idx="3">
+            <a:schemeClr val="accent1"/>
+          </a:fillRef>
+          <a:effectRef idx="2">
+            <a:schemeClr val="accent1"/>
+          </a:effectRef>
+          <a:fontRef idx="minor">
+            <a:schemeClr val="lt1"/>
+          </a:fontRef>
+        </p:style>
+        <p:txBody>
+          <a:bodyPr rtlCol="0" anchor="ctr"/>
+          <a:lstStyle/>
+          <a:p/>
+        </p:txBody>
+      </p:sp>
+      <p:sp>
+        <p:nvSpPr>
+          <p:cNvPr id="14" name="TextBox 13"/>
+          <p:cNvSpPr txBox="1"/>
+          <p:nvPr/>
+        </p:nvSpPr>
+        <p:spPr>
+          <a:xfrm>
+            <a:off x="2932115" y="4183380"/>
+            <a:ext cx="1834835" cy="960119"/>
+          </a:xfrm>
+          <a:prstGeom prst="rect">
+            <a:avLst/>
+          </a:prstGeom>
+          <a:noFill/>
+        </p:spPr>
+        <p:txBody>
+          <a:bodyPr wrap="square" anchor="t" lIns="0" rIns="0" tIns="0" bIns="0"/>
+          <a:lstStyle/>
+          <a:p>
             <a:pPr algn="l"/>
             <a:r>
               <a:rPr sz="1800" b="0" i="0">
                 <a:solidFill>
-                  <a:srgbClr val="54595D"/>
-                </a:solidFill>
-                <a:latin typeface="Calibri"/>
-              </a:rPr>
-              <a:t>In TDD, what comes first: the test or the code?</a:t>
-            </a:r>
-          </a:p>
-          <a:p>
-            <a:r>
-              <a:rPr sz="1800" b="1">
-                <a:solidFill>
-                  <a:srgbClr val="03306E"/>
-                </a:solidFill>
-                <a:latin typeface="Calibri"/>
-              </a:rPr>
-              <a:t>The test.</a:t>
-            </a:r>
-          </a:p>
-        </p:txBody>
-      </p:sp>
-      <p:sp>
-        <p:nvSpPr>
-          <p:cNvPr id="10" name="Oval 9"/>
+                  <a:srgbClr val="202122"/>
+                </a:solidFill>
+                <a:latin typeface="Calibri"/>
+              </a:rPr>
+              <a:t>The new test fails.</a:t>
+            </a:r>
+          </a:p>
+        </p:txBody>
+      </p:sp>
+      <p:sp>
+        <p:nvSpPr>
+          <p:cNvPr id="15" name="Oval 14"/>
           <p:cNvSpPr/>
           <p:nvPr/>
         </p:nvSpPr>
         <p:spPr>
           <a:xfrm>
-            <a:off x="548640" y="4009644"/>
-            <a:ext cx="411480" cy="411480"/>
+            <a:off x="5775807" y="2491740"/>
+            <a:ext cx="640080" cy="640080"/>
           </a:xfrm>
           <a:prstGeom prst="ellipse">
             <a:avLst/>
@@ -7763,7 +10712,7 @@
           <a:p>
             <a:pPr algn="ctr"/>
             <a:r>
-              <a:rPr sz="1400" b="1">
+              <a:rPr sz="2000" b="1">
                 <a:solidFill>
                   <a:srgbClr val="202122"/>
                 </a:solidFill>
@@ -7776,14 +10725,14 @@
       </p:sp>
       <p:sp>
         <p:nvSpPr>
-          <p:cNvPr id="11" name="TextBox 10"/>
-          <p:cNvSpPr txBox="1"/>
-          <p:nvPr/>
-        </p:nvSpPr>
-        <p:spPr>
-          <a:xfrm>
-            <a:off x="1234440" y="3991356"/>
-            <a:ext cx="10408615" cy="1030986"/>
+          <p:cNvPr id="16" name="TextBox 15"/>
+          <p:cNvSpPr txBox="1"/>
+          <p:nvPr/>
+        </p:nvSpPr>
+        <p:spPr>
+          <a:xfrm>
+            <a:off x="5041270" y="3268979"/>
+            <a:ext cx="2109155" cy="731520"/>
           </a:xfrm>
           <a:prstGeom prst="rect">
             <a:avLst/>
@@ -7794,40 +10743,106 @@
           <a:bodyPr wrap="square" anchor="t" lIns="0" rIns="0" tIns="0" bIns="0"/>
           <a:lstStyle/>
           <a:p>
+            <a:pPr algn="ctr"/>
+            <a:r>
+              <a:rPr sz="1700" b="1" i="0">
+                <a:solidFill>
+                  <a:srgbClr val="03306E"/>
+                </a:solidFill>
+                <a:latin typeface="Calibri"/>
+              </a:rPr>
+              <a:t>Write code</a:t>
+            </a:r>
+          </a:p>
+        </p:txBody>
+      </p:sp>
+      <p:sp>
+        <p:nvSpPr>
+          <p:cNvPr id="17" name="Rounded Rectangle 16"/>
+          <p:cNvSpPr/>
+          <p:nvPr/>
+        </p:nvSpPr>
+        <p:spPr>
+          <a:xfrm>
+            <a:off x="5041270" y="4046220"/>
+            <a:ext cx="2109155" cy="1234439"/>
+          </a:xfrm>
+          <a:prstGeom prst="roundRect">
+            <a:avLst>
+              <a:gd name="adj" fmla="val 6000"/>
+            </a:avLst>
+          </a:prstGeom>
+          <a:solidFill>
+            <a:srgbClr val="EAF3FF"/>
+          </a:solidFill>
+          <a:ln>
+            <a:noFill/>
+          </a:ln>
+          <a:effectLst/>
+        </p:spPr>
+        <p:style>
+          <a:lnRef idx="1">
+            <a:schemeClr val="accent1"/>
+          </a:lnRef>
+          <a:fillRef idx="3">
+            <a:schemeClr val="accent1"/>
+          </a:fillRef>
+          <a:effectRef idx="2">
+            <a:schemeClr val="accent1"/>
+          </a:effectRef>
+          <a:fontRef idx="minor">
+            <a:schemeClr val="lt1"/>
+          </a:fontRef>
+        </p:style>
+        <p:txBody>
+          <a:bodyPr rtlCol="0" anchor="ctr"/>
+          <a:lstStyle/>
+          <a:p/>
+        </p:txBody>
+      </p:sp>
+      <p:sp>
+        <p:nvSpPr>
+          <p:cNvPr id="18" name="TextBox 17"/>
+          <p:cNvSpPr txBox="1"/>
+          <p:nvPr/>
+        </p:nvSpPr>
+        <p:spPr>
+          <a:xfrm>
+            <a:off x="5178430" y="4183380"/>
+            <a:ext cx="1834835" cy="960119"/>
+          </a:xfrm>
+          <a:prstGeom prst="rect">
+            <a:avLst/>
+          </a:prstGeom>
+          <a:noFill/>
+        </p:spPr>
+        <p:txBody>
+          <a:bodyPr wrap="square" anchor="t" lIns="0" rIns="0" tIns="0" bIns="0"/>
+          <a:lstStyle/>
+          <a:p>
             <a:pPr algn="l"/>
             <a:r>
               <a:rPr sz="1800" b="0" i="0">
                 <a:solidFill>
-                  <a:srgbClr val="54595D"/>
-                </a:solidFill>
-                <a:latin typeface="Calibri"/>
-              </a:rPr>
-              <a:t>What is a higher-order function?</a:t>
-            </a:r>
-          </a:p>
-          <a:p>
-            <a:r>
-              <a:rPr sz="1800" b="1">
-                <a:solidFill>
-                  <a:srgbClr val="03306E"/>
-                </a:solidFill>
-                <a:latin typeface="Calibri"/>
-              </a:rPr>
-              <a:t>A function that takes or returns another function.</a:t>
-            </a:r>
-          </a:p>
-        </p:txBody>
-      </p:sp>
-      <p:sp>
-        <p:nvSpPr>
-          <p:cNvPr id="12" name="Oval 11"/>
+                  <a:srgbClr val="202122"/>
+                </a:solidFill>
+                <a:latin typeface="Calibri"/>
+              </a:rPr>
+              <a:t>Just enough to pass.</a:t>
+            </a:r>
+          </a:p>
+        </p:txBody>
+      </p:sp>
+      <p:sp>
+        <p:nvSpPr>
+          <p:cNvPr id="19" name="Oval 18"/>
           <p:cNvSpPr/>
           <p:nvPr/>
         </p:nvSpPr>
         <p:spPr>
           <a:xfrm>
-            <a:off x="548640" y="5205221"/>
-            <a:ext cx="411480" cy="411480"/>
+            <a:off x="8022122" y="2491740"/>
+            <a:ext cx="640080" cy="640080"/>
           </a:xfrm>
           <a:prstGeom prst="ellipse">
             <a:avLst/>
@@ -7860,7 +10875,7 @@
           <a:p>
             <a:pPr algn="ctr"/>
             <a:r>
-              <a:rPr sz="1400" b="1">
+              <a:rPr sz="2000" b="1">
                 <a:solidFill>
                   <a:srgbClr val="202122"/>
                 </a:solidFill>
@@ -7873,14 +10888,14 @@
       </p:sp>
       <p:sp>
         <p:nvSpPr>
-          <p:cNvPr id="13" name="TextBox 12"/>
-          <p:cNvSpPr txBox="1"/>
-          <p:nvPr/>
-        </p:nvSpPr>
-        <p:spPr>
-          <a:xfrm>
-            <a:off x="1234440" y="5186933"/>
-            <a:ext cx="10408615" cy="1030986"/>
+          <p:cNvPr id="20" name="TextBox 19"/>
+          <p:cNvSpPr txBox="1"/>
+          <p:nvPr/>
+        </p:nvSpPr>
+        <p:spPr>
+          <a:xfrm>
+            <a:off x="7287585" y="3268979"/>
+            <a:ext cx="2109155" cy="731520"/>
           </a:xfrm>
           <a:prstGeom prst="rect">
             <a:avLst/>
@@ -7891,26 +10906,255 @@
           <a:bodyPr wrap="square" anchor="t" lIns="0" rIns="0" tIns="0" bIns="0"/>
           <a:lstStyle/>
           <a:p>
+            <a:pPr algn="ctr"/>
+            <a:r>
+              <a:rPr sz="1700" b="1" i="0">
+                <a:solidFill>
+                  <a:srgbClr val="03306E"/>
+                </a:solidFill>
+                <a:latin typeface="Calibri"/>
+              </a:rPr>
+              <a:t>Refactor</a:t>
+            </a:r>
+          </a:p>
+        </p:txBody>
+      </p:sp>
+      <p:sp>
+        <p:nvSpPr>
+          <p:cNvPr id="21" name="Rounded Rectangle 20"/>
+          <p:cNvSpPr/>
+          <p:nvPr/>
+        </p:nvSpPr>
+        <p:spPr>
+          <a:xfrm>
+            <a:off x="7287585" y="4046220"/>
+            <a:ext cx="2109155" cy="1234439"/>
+          </a:xfrm>
+          <a:prstGeom prst="roundRect">
+            <a:avLst>
+              <a:gd name="adj" fmla="val 6000"/>
+            </a:avLst>
+          </a:prstGeom>
+          <a:solidFill>
+            <a:srgbClr val="EAF3FF"/>
+          </a:solidFill>
+          <a:ln>
+            <a:noFill/>
+          </a:ln>
+          <a:effectLst/>
+        </p:spPr>
+        <p:style>
+          <a:lnRef idx="1">
+            <a:schemeClr val="accent1"/>
+          </a:lnRef>
+          <a:fillRef idx="3">
+            <a:schemeClr val="accent1"/>
+          </a:fillRef>
+          <a:effectRef idx="2">
+            <a:schemeClr val="accent1"/>
+          </a:effectRef>
+          <a:fontRef idx="minor">
+            <a:schemeClr val="lt1"/>
+          </a:fontRef>
+        </p:style>
+        <p:txBody>
+          <a:bodyPr rtlCol="0" anchor="ctr"/>
+          <a:lstStyle/>
+          <a:p/>
+        </p:txBody>
+      </p:sp>
+      <p:sp>
+        <p:nvSpPr>
+          <p:cNvPr id="22" name="TextBox 21"/>
+          <p:cNvSpPr txBox="1"/>
+          <p:nvPr/>
+        </p:nvSpPr>
+        <p:spPr>
+          <a:xfrm>
+            <a:off x="7424745" y="4183380"/>
+            <a:ext cx="1834835" cy="960119"/>
+          </a:xfrm>
+          <a:prstGeom prst="rect">
+            <a:avLst/>
+          </a:prstGeom>
+          <a:noFill/>
+        </p:spPr>
+        <p:txBody>
+          <a:bodyPr wrap="square" anchor="t" lIns="0" rIns="0" tIns="0" bIns="0"/>
+          <a:lstStyle/>
+          <a:p>
             <a:pPr algn="l"/>
             <a:r>
               <a:rPr sz="1800" b="0" i="0">
                 <a:solidFill>
-                  <a:srgbClr val="54595D"/>
-                </a:solidFill>
-                <a:latin typeface="Calibri"/>
-              </a:rPr>
-              <a:t>Which tools support data model design?</a:t>
-            </a:r>
-          </a:p>
-          <a:p>
-            <a:r>
-              <a:rPr sz="1800" b="1">
+                  <a:srgbClr val="202122"/>
+                </a:solidFill>
+                <a:latin typeface="Calibri"/>
+              </a:rPr>
+              <a:t>Run tests and tidy the code.</a:t>
+            </a:r>
+          </a:p>
+        </p:txBody>
+      </p:sp>
+      <p:sp>
+        <p:nvSpPr>
+          <p:cNvPr id="23" name="Oval 22"/>
+          <p:cNvSpPr/>
+          <p:nvPr/>
+        </p:nvSpPr>
+        <p:spPr>
+          <a:xfrm>
+            <a:off x="10268437" y="2491740"/>
+            <a:ext cx="640080" cy="640080"/>
+          </a:xfrm>
+          <a:prstGeom prst="ellipse">
+            <a:avLst/>
+          </a:prstGeom>
+          <a:solidFill>
+            <a:srgbClr val="33C17A"/>
+          </a:solidFill>
+          <a:ln>
+            <a:noFill/>
+          </a:ln>
+          <a:effectLst/>
+        </p:spPr>
+        <p:style>
+          <a:lnRef idx="1">
+            <a:schemeClr val="accent1"/>
+          </a:lnRef>
+          <a:fillRef idx="3">
+            <a:schemeClr val="accent1"/>
+          </a:fillRef>
+          <a:effectRef idx="2">
+            <a:schemeClr val="accent1"/>
+          </a:effectRef>
+          <a:fontRef idx="minor">
+            <a:schemeClr val="lt1"/>
+          </a:fontRef>
+        </p:style>
+        <p:txBody>
+          <a:bodyPr rtlCol="0" anchor="ctr" lIns="0" rIns="0" tIns="0" bIns="0"/>
+          <a:lstStyle/>
+          <a:p>
+            <a:pPr algn="ctr"/>
+            <a:r>
+              <a:rPr sz="2000" b="1">
+                <a:solidFill>
+                  <a:srgbClr val="202122"/>
+                </a:solidFill>
+                <a:latin typeface="Calibri"/>
+              </a:rPr>
+              <a:t>5</a:t>
+            </a:r>
+          </a:p>
+        </p:txBody>
+      </p:sp>
+      <p:sp>
+        <p:nvSpPr>
+          <p:cNvPr id="24" name="TextBox 23"/>
+          <p:cNvSpPr txBox="1"/>
+          <p:nvPr/>
+        </p:nvSpPr>
+        <p:spPr>
+          <a:xfrm>
+            <a:off x="9533900" y="3268979"/>
+            <a:ext cx="2109155" cy="731520"/>
+          </a:xfrm>
+          <a:prstGeom prst="rect">
+            <a:avLst/>
+          </a:prstGeom>
+          <a:noFill/>
+        </p:spPr>
+        <p:txBody>
+          <a:bodyPr wrap="square" anchor="t" lIns="0" rIns="0" tIns="0" bIns="0"/>
+          <a:lstStyle/>
+          <a:p>
+            <a:pPr algn="ctr"/>
+            <a:r>
+              <a:rPr sz="1700" b="1" i="0">
                 <a:solidFill>
                   <a:srgbClr val="03306E"/>
                 </a:solidFill>
                 <a:latin typeface="Calibri"/>
               </a:rPr>
-              <a:t>E-R models and UML.</a:t>
+              <a:t>Repeat</a:t>
+            </a:r>
+          </a:p>
+        </p:txBody>
+      </p:sp>
+      <p:sp>
+        <p:nvSpPr>
+          <p:cNvPr id="25" name="Rounded Rectangle 24"/>
+          <p:cNvSpPr/>
+          <p:nvPr/>
+        </p:nvSpPr>
+        <p:spPr>
+          <a:xfrm>
+            <a:off x="9533900" y="4046220"/>
+            <a:ext cx="2109155" cy="1234439"/>
+          </a:xfrm>
+          <a:prstGeom prst="roundRect">
+            <a:avLst>
+              <a:gd name="adj" fmla="val 6000"/>
+            </a:avLst>
+          </a:prstGeom>
+          <a:solidFill>
+            <a:srgbClr val="EAF3FF"/>
+          </a:solidFill>
+          <a:ln>
+            <a:noFill/>
+          </a:ln>
+          <a:effectLst/>
+        </p:spPr>
+        <p:style>
+          <a:lnRef idx="1">
+            <a:schemeClr val="accent1"/>
+          </a:lnRef>
+          <a:fillRef idx="3">
+            <a:schemeClr val="accent1"/>
+          </a:fillRef>
+          <a:effectRef idx="2">
+            <a:schemeClr val="accent1"/>
+          </a:effectRef>
+          <a:fontRef idx="minor">
+            <a:schemeClr val="lt1"/>
+          </a:fontRef>
+        </p:style>
+        <p:txBody>
+          <a:bodyPr rtlCol="0" anchor="ctr"/>
+          <a:lstStyle/>
+          <a:p/>
+        </p:txBody>
+      </p:sp>
+      <p:sp>
+        <p:nvSpPr>
+          <p:cNvPr id="26" name="TextBox 25"/>
+          <p:cNvSpPr txBox="1"/>
+          <p:nvPr/>
+        </p:nvSpPr>
+        <p:spPr>
+          <a:xfrm>
+            <a:off x="9671060" y="4183380"/>
+            <a:ext cx="1834835" cy="960119"/>
+          </a:xfrm>
+          <a:prstGeom prst="rect">
+            <a:avLst/>
+          </a:prstGeom>
+          <a:noFill/>
+        </p:spPr>
+        <p:txBody>
+          <a:bodyPr wrap="square" anchor="t" lIns="0" rIns="0" tIns="0" bIns="0"/>
+          <a:lstStyle/>
+          <a:p>
+            <a:pPr algn="l"/>
+            <a:r>
+              <a:rPr sz="1800" b="0" i="0">
+                <a:solidFill>
+                  <a:srgbClr val="202122"/>
+                </a:solidFill>
+                <a:latin typeface="Calibri"/>
+              </a:rPr>
+              <a:t>Next feature.</a:t>
             </a:r>
           </a:p>
         </p:txBody>
@@ -8002,7 +11246,7 @@
                 </a:solidFill>
                 <a:latin typeface="Cambria"/>
               </a:rPr>
-              <a:t>Activity: TDD kata</a:t>
+              <a:t>Quick check: Test-driven development (TDD)</a:t>
             </a:r>
           </a:p>
         </p:txBody>
@@ -8075,19 +11319,17 @@
       </p:sp>
       <p:sp>
         <p:nvSpPr>
-          <p:cNvPr id="6" name="Rounded Rectangle 5"/>
+          <p:cNvPr id="6" name="Oval 5"/>
           <p:cNvSpPr/>
           <p:nvPr/>
         </p:nvSpPr>
         <p:spPr>
           <a:xfrm>
-            <a:off x="548640" y="1508760"/>
-            <a:ext cx="2011680" cy="457200"/>
-          </a:xfrm>
-          <a:prstGeom prst="roundRect">
-            <a:avLst>
-              <a:gd name="adj" fmla="val 50000"/>
-            </a:avLst>
+            <a:off x="548640" y="1691640"/>
+            <a:ext cx="502920" cy="502920"/>
+          </a:xfrm>
+          <a:prstGeom prst="ellipse">
+            <a:avLst/>
           </a:prstGeom>
           <a:solidFill>
             <a:srgbClr val="33C17A"/>
@@ -8112,9 +11354,20 @@
           </a:fontRef>
         </p:style>
         <p:txBody>
-          <a:bodyPr rtlCol="0" anchor="ctr"/>
-          <a:lstStyle/>
-          <a:p/>
+          <a:bodyPr rtlCol="0" anchor="ctr" lIns="0" rIns="0" tIns="0" bIns="0"/>
+          <a:lstStyle/>
+          <a:p>
+            <a:pPr algn="ctr"/>
+            <a:r>
+              <a:rPr sz="1600" b="1">
+                <a:solidFill>
+                  <a:srgbClr val="202122"/>
+                </a:solidFill>
+                <a:latin typeface="Calibri"/>
+              </a:rPr>
+              <a:t>1</a:t>
+            </a:r>
+          </a:p>
         </p:txBody>
       </p:sp>
       <p:sp>
@@ -8125,80 +11378,47 @@
         </p:nvSpPr>
         <p:spPr>
           <a:xfrm>
-            <a:off x="548640" y="1508760"/>
-            <a:ext cx="2011680" cy="457200"/>
-          </a:xfrm>
-          <a:prstGeom prst="rect">
-            <a:avLst/>
-          </a:prstGeom>
-          <a:noFill/>
-        </p:spPr>
-        <p:txBody>
-          <a:bodyPr wrap="square" anchor="ctr" lIns="0" rIns="0" tIns="0" bIns="0"/>
-          <a:lstStyle/>
-          <a:p>
-            <a:pPr algn="ctr"/>
-            <a:r>
-              <a:rPr sz="1400" b="1" i="0">
+            <a:off x="1371600" y="1645920"/>
+            <a:ext cx="10271455" cy="1188720"/>
+          </a:xfrm>
+          <a:prstGeom prst="rect">
+            <a:avLst/>
+          </a:prstGeom>
+          <a:noFill/>
+        </p:spPr>
+        <p:txBody>
+          <a:bodyPr wrap="square" anchor="t" lIns="0" rIns="0" tIns="0" bIns="0"/>
+          <a:lstStyle/>
+          <a:p>
+            <a:pPr algn="l"/>
+            <a:r>
+              <a:rPr sz="2400" b="0" i="0">
                 <a:solidFill>
                   <a:srgbClr val="202122"/>
                 </a:solidFill>
                 <a:latin typeface="Calibri"/>
               </a:rPr>
-              <a:t>30 minutes</a:t>
-            </a:r>
-          </a:p>
-        </p:txBody>
-      </p:sp>
-      <p:sp>
-        <p:nvSpPr>
-          <p:cNvPr id="8" name="TextBox 7"/>
-          <p:cNvSpPr txBox="1"/>
-          <p:nvPr/>
-        </p:nvSpPr>
-        <p:spPr>
-          <a:xfrm>
-            <a:off x="2743200" y="1508760"/>
-            <a:ext cx="4754880" cy="457200"/>
-          </a:xfrm>
-          <a:prstGeom prst="rect">
-            <a:avLst/>
-          </a:prstGeom>
-          <a:noFill/>
-        </p:spPr>
-        <p:txBody>
-          <a:bodyPr wrap="square" anchor="ctr" lIns="0" rIns="0" tIns="0" bIns="0"/>
-          <a:lstStyle/>
-          <a:p>
-            <a:pPr algn="l"/>
-            <a:r>
-              <a:rPr sz="1400" b="0" i="1">
-                <a:solidFill>
-                  <a:srgbClr val="54595D"/>
-                </a:solidFill>
-                <a:latin typeface="Calibri"/>
-              </a:rPr>
-              <a:t>Pairs, in Python</a:t>
-            </a:r>
-          </a:p>
-        </p:txBody>
-      </p:sp>
-      <p:sp>
-        <p:nvSpPr>
-          <p:cNvPr id="9" name="Oval 8"/>
+              <a:t>In TDD, what is written first?</a:t>
+            </a:r>
+          </a:p>
+        </p:txBody>
+      </p:sp>
+      <p:sp>
+        <p:nvSpPr>
+          <p:cNvPr id="8" name="Oval 7"/>
           <p:cNvSpPr/>
           <p:nvPr/>
         </p:nvSpPr>
         <p:spPr>
           <a:xfrm>
-            <a:off x="548640" y="2482596"/>
-            <a:ext cx="384048" cy="384048"/>
+            <a:off x="548640" y="3108960"/>
+            <a:ext cx="502920" cy="502920"/>
           </a:xfrm>
           <a:prstGeom prst="ellipse">
             <a:avLst/>
           </a:prstGeom>
           <a:solidFill>
-            <a:srgbClr val="0645AD"/>
+            <a:srgbClr val="33C17A"/>
           </a:solidFill>
           <a:ln>
             <a:noFill/>
@@ -8225,66 +11445,66 @@
           <a:p>
             <a:pPr algn="ctr"/>
             <a:r>
-              <a:rPr sz="1300" b="1">
-                <a:solidFill>
-                  <a:srgbClr val="FFFFFF"/>
-                </a:solidFill>
-                <a:latin typeface="Calibri"/>
-              </a:rPr>
-              <a:t>1</a:t>
-            </a:r>
-          </a:p>
-        </p:txBody>
-      </p:sp>
-      <p:sp>
-        <p:nvSpPr>
-          <p:cNvPr id="10" name="TextBox 9"/>
-          <p:cNvSpPr txBox="1"/>
-          <p:nvPr/>
-        </p:nvSpPr>
-        <p:spPr>
-          <a:xfrm>
-            <a:off x="1143000" y="2240280"/>
-            <a:ext cx="5943600" cy="868680"/>
-          </a:xfrm>
-          <a:prstGeom prst="rect">
-            <a:avLst/>
-          </a:prstGeom>
-          <a:noFill/>
-        </p:spPr>
-        <p:txBody>
-          <a:bodyPr wrap="square" anchor="ctr" lIns="0" rIns="0" tIns="0" bIns="0"/>
+              <a:rPr sz="1600" b="1">
+                <a:solidFill>
+                  <a:srgbClr val="202122"/>
+                </a:solidFill>
+                <a:latin typeface="Calibri"/>
+              </a:rPr>
+              <a:t>2</a:t>
+            </a:r>
+          </a:p>
+        </p:txBody>
+      </p:sp>
+      <p:sp>
+        <p:nvSpPr>
+          <p:cNvPr id="9" name="TextBox 8"/>
+          <p:cNvSpPr txBox="1"/>
+          <p:nvPr/>
+        </p:nvSpPr>
+        <p:spPr>
+          <a:xfrm>
+            <a:off x="1371600" y="3063240"/>
+            <a:ext cx="10271455" cy="1188720"/>
+          </a:xfrm>
+          <a:prstGeom prst="rect">
+            <a:avLst/>
+          </a:prstGeom>
+          <a:noFill/>
+        </p:spPr>
+        <p:txBody>
+          <a:bodyPr wrap="square" anchor="t" lIns="0" rIns="0" tIns="0" bIns="0"/>
           <a:lstStyle/>
           <a:p>
             <a:pPr algn="l"/>
             <a:r>
-              <a:rPr sz="1700" b="0" i="0">
+              <a:rPr sz="2400" b="0" i="0">
                 <a:solidFill>
                   <a:srgbClr val="202122"/>
                 </a:solidFill>
                 <a:latin typeface="Calibri"/>
               </a:rPr>
-              <a:t>Build a function that grades a mark: A, B, C or U.</a:t>
-            </a:r>
-          </a:p>
-        </p:txBody>
-      </p:sp>
-      <p:sp>
-        <p:nvSpPr>
-          <p:cNvPr id="11" name="Oval 10"/>
+              <a:t>Why should a new test fail at first?</a:t>
+            </a:r>
+          </a:p>
+        </p:txBody>
+      </p:sp>
+      <p:sp>
+        <p:nvSpPr>
+          <p:cNvPr id="10" name="Oval 9"/>
           <p:cNvSpPr/>
           <p:nvPr/>
         </p:nvSpPr>
         <p:spPr>
           <a:xfrm>
-            <a:off x="548640" y="3461004"/>
-            <a:ext cx="384048" cy="384048"/>
+            <a:off x="548640" y="4526280"/>
+            <a:ext cx="502920" cy="502920"/>
           </a:xfrm>
           <a:prstGeom prst="ellipse">
             <a:avLst/>
           </a:prstGeom>
           <a:solidFill>
-            <a:srgbClr val="0645AD"/>
+            <a:srgbClr val="33C17A"/>
           </a:solidFill>
           <a:ln>
             <a:noFill/>
@@ -8311,13 +11531,46 @@
           <a:p>
             <a:pPr algn="ctr"/>
             <a:r>
-              <a:rPr sz="1300" b="1">
-                <a:solidFill>
-                  <a:srgbClr val="FFFFFF"/>
-                </a:solidFill>
-                <a:latin typeface="Calibri"/>
-              </a:rPr>
-              <a:t>2</a:t>
+              <a:rPr sz="1600" b="1">
+                <a:solidFill>
+                  <a:srgbClr val="202122"/>
+                </a:solidFill>
+                <a:latin typeface="Calibri"/>
+              </a:rPr>
+              <a:t>3</a:t>
+            </a:r>
+          </a:p>
+        </p:txBody>
+      </p:sp>
+      <p:sp>
+        <p:nvSpPr>
+          <p:cNvPr id="11" name="TextBox 10"/>
+          <p:cNvSpPr txBox="1"/>
+          <p:nvPr/>
+        </p:nvSpPr>
+        <p:spPr>
+          <a:xfrm>
+            <a:off x="1371600" y="4480560"/>
+            <a:ext cx="10271455" cy="1188720"/>
+          </a:xfrm>
+          <a:prstGeom prst="rect">
+            <a:avLst/>
+          </a:prstGeom>
+          <a:noFill/>
+        </p:spPr>
+        <p:txBody>
+          <a:bodyPr wrap="square" anchor="t" lIns="0" rIns="0" tIns="0" bIns="0"/>
+          <a:lstStyle/>
+          <a:p>
+            <a:pPr algn="l"/>
+            <a:r>
+              <a:rPr sz="2400" b="0" i="0">
+                <a:solidFill>
+                  <a:srgbClr val="202122"/>
+                </a:solidFill>
+                <a:latin typeface="Calibri"/>
+              </a:rPr>
+              <a:t>What is refactoring?</a:t>
             </a:r>
           </a:p>
         </p:txBody>
@@ -8330,362 +11583,27 @@
         </p:nvSpPr>
         <p:spPr>
           <a:xfrm>
-            <a:off x="1143000" y="3218688"/>
-            <a:ext cx="5943600" cy="868680"/>
-          </a:xfrm>
-          <a:prstGeom prst="rect">
-            <a:avLst/>
-          </a:prstGeom>
-          <a:noFill/>
-        </p:spPr>
-        <p:txBody>
-          <a:bodyPr wrap="square" anchor="ctr" lIns="0" rIns="0" tIns="0" bIns="0"/>
+            <a:off x="548640" y="5852160"/>
+            <a:ext cx="11094415" cy="365760"/>
+          </a:xfrm>
+          <a:prstGeom prst="rect">
+            <a:avLst/>
+          </a:prstGeom>
+          <a:noFill/>
+        </p:spPr>
+        <p:txBody>
+          <a:bodyPr wrap="square" anchor="t" lIns="0" rIns="0" tIns="0" bIns="0"/>
           <a:lstStyle/>
           <a:p>
             <a:pPr algn="l"/>
             <a:r>
-              <a:rPr sz="1700" b="0" i="0">
-                <a:solidFill>
-                  <a:srgbClr val="202122"/>
-                </a:solidFill>
-                <a:latin typeface="Calibri"/>
-              </a:rPr>
-              <a:t>Write one failing test first.</a:t>
-            </a:r>
-          </a:p>
-        </p:txBody>
-      </p:sp>
-      <p:sp>
-        <p:nvSpPr>
-          <p:cNvPr id="13" name="Oval 12"/>
-          <p:cNvSpPr/>
-          <p:nvPr/>
-        </p:nvSpPr>
-        <p:spPr>
-          <a:xfrm>
-            <a:off x="548640" y="4439412"/>
-            <a:ext cx="384048" cy="384048"/>
-          </a:xfrm>
-          <a:prstGeom prst="ellipse">
-            <a:avLst/>
-          </a:prstGeom>
-          <a:solidFill>
-            <a:srgbClr val="0645AD"/>
-          </a:solidFill>
-          <a:ln>
-            <a:noFill/>
-          </a:ln>
-          <a:effectLst/>
-        </p:spPr>
-        <p:style>
-          <a:lnRef idx="1">
-            <a:schemeClr val="accent1"/>
-          </a:lnRef>
-          <a:fillRef idx="3">
-            <a:schemeClr val="accent1"/>
-          </a:fillRef>
-          <a:effectRef idx="2">
-            <a:schemeClr val="accent1"/>
-          </a:effectRef>
-          <a:fontRef idx="minor">
-            <a:schemeClr val="lt1"/>
-          </a:fontRef>
-        </p:style>
-        <p:txBody>
-          <a:bodyPr rtlCol="0" anchor="ctr" lIns="0" rIns="0" tIns="0" bIns="0"/>
-          <a:lstStyle/>
-          <a:p>
-            <a:pPr algn="ctr"/>
-            <a:r>
-              <a:rPr sz="1300" b="1">
-                <a:solidFill>
-                  <a:srgbClr val="FFFFFF"/>
-                </a:solidFill>
-                <a:latin typeface="Calibri"/>
-              </a:rPr>
-              <a:t>3</a:t>
-            </a:r>
-          </a:p>
-        </p:txBody>
-      </p:sp>
-      <p:sp>
-        <p:nvSpPr>
-          <p:cNvPr id="14" name="TextBox 13"/>
-          <p:cNvSpPr txBox="1"/>
-          <p:nvPr/>
-        </p:nvSpPr>
-        <p:spPr>
-          <a:xfrm>
-            <a:off x="1143000" y="4197096"/>
-            <a:ext cx="5943600" cy="868680"/>
-          </a:xfrm>
-          <a:prstGeom prst="rect">
-            <a:avLst/>
-          </a:prstGeom>
-          <a:noFill/>
-        </p:spPr>
-        <p:txBody>
-          <a:bodyPr wrap="square" anchor="ctr" lIns="0" rIns="0" tIns="0" bIns="0"/>
-          <a:lstStyle/>
-          <a:p>
-            <a:pPr algn="l"/>
-            <a:r>
-              <a:rPr sz="1700" b="0" i="0">
-                <a:solidFill>
-                  <a:srgbClr val="202122"/>
-                </a:solidFill>
-                <a:latin typeface="Calibri"/>
-              </a:rPr>
-              <a:t>Write just enough code to pass it.</a:t>
-            </a:r>
-          </a:p>
-        </p:txBody>
-      </p:sp>
-      <p:sp>
-        <p:nvSpPr>
-          <p:cNvPr id="15" name="Oval 14"/>
-          <p:cNvSpPr/>
-          <p:nvPr/>
-        </p:nvSpPr>
-        <p:spPr>
-          <a:xfrm>
-            <a:off x="548640" y="5417820"/>
-            <a:ext cx="384048" cy="384048"/>
-          </a:xfrm>
-          <a:prstGeom prst="ellipse">
-            <a:avLst/>
-          </a:prstGeom>
-          <a:solidFill>
-            <a:srgbClr val="0645AD"/>
-          </a:solidFill>
-          <a:ln>
-            <a:noFill/>
-          </a:ln>
-          <a:effectLst/>
-        </p:spPr>
-        <p:style>
-          <a:lnRef idx="1">
-            <a:schemeClr val="accent1"/>
-          </a:lnRef>
-          <a:fillRef idx="3">
-            <a:schemeClr val="accent1"/>
-          </a:fillRef>
-          <a:effectRef idx="2">
-            <a:schemeClr val="accent1"/>
-          </a:effectRef>
-          <a:fontRef idx="minor">
-            <a:schemeClr val="lt1"/>
-          </a:fontRef>
-        </p:style>
-        <p:txBody>
-          <a:bodyPr rtlCol="0" anchor="ctr" lIns="0" rIns="0" tIns="0" bIns="0"/>
-          <a:lstStyle/>
-          <a:p>
-            <a:pPr algn="ctr"/>
-            <a:r>
-              <a:rPr sz="1300" b="1">
-                <a:solidFill>
-                  <a:srgbClr val="FFFFFF"/>
-                </a:solidFill>
-                <a:latin typeface="Calibri"/>
-              </a:rPr>
-              <a:t>4</a:t>
-            </a:r>
-          </a:p>
-        </p:txBody>
-      </p:sp>
-      <p:sp>
-        <p:nvSpPr>
-          <p:cNvPr id="16" name="TextBox 15"/>
-          <p:cNvSpPr txBox="1"/>
-          <p:nvPr/>
-        </p:nvSpPr>
-        <p:spPr>
-          <a:xfrm>
-            <a:off x="1143000" y="5175504"/>
-            <a:ext cx="5943600" cy="868680"/>
-          </a:xfrm>
-          <a:prstGeom prst="rect">
-            <a:avLst/>
-          </a:prstGeom>
-          <a:noFill/>
-        </p:spPr>
-        <p:txBody>
-          <a:bodyPr wrap="square" anchor="ctr" lIns="0" rIns="0" tIns="0" bIns="0"/>
-          <a:lstStyle/>
-          <a:p>
-            <a:pPr algn="l"/>
-            <a:r>
-              <a:rPr sz="1700" b="0" i="0">
-                <a:solidFill>
-                  <a:srgbClr val="202122"/>
-                </a:solidFill>
-                <a:latin typeface="Calibri"/>
-              </a:rPr>
-              <a:t>Repeat until every boundary is tested, then refactor.</a:t>
-            </a:r>
-          </a:p>
-        </p:txBody>
-      </p:sp>
-      <p:sp>
-        <p:nvSpPr>
-          <p:cNvPr id="17" name="Rounded Rectangle 16"/>
-          <p:cNvSpPr/>
-          <p:nvPr/>
-        </p:nvSpPr>
-        <p:spPr>
-          <a:xfrm>
-            <a:off x="7772400" y="1508760"/>
-            <a:ext cx="3867912" cy="4572000"/>
-          </a:xfrm>
-          <a:prstGeom prst="roundRect">
-            <a:avLst>
-              <a:gd name="adj" fmla="val 8000"/>
-            </a:avLst>
-          </a:prstGeom>
-          <a:solidFill>
-            <a:srgbClr val="EAF3FF"/>
-          </a:solidFill>
-          <a:ln>
-            <a:noFill/>
-          </a:ln>
-          <a:effectLst/>
-        </p:spPr>
-        <p:style>
-          <a:lnRef idx="1">
-            <a:schemeClr val="accent1"/>
-          </a:lnRef>
-          <a:fillRef idx="3">
-            <a:schemeClr val="accent1"/>
-          </a:fillRef>
-          <a:effectRef idx="2">
-            <a:schemeClr val="accent1"/>
-          </a:effectRef>
-          <a:fontRef idx="minor">
-            <a:schemeClr val="lt1"/>
-          </a:fontRef>
-        </p:style>
-        <p:txBody>
-          <a:bodyPr rtlCol="0" anchor="ctr"/>
-          <a:lstStyle/>
-          <a:p/>
-        </p:txBody>
-      </p:sp>
-      <p:sp>
-        <p:nvSpPr>
-          <p:cNvPr id="18" name="TextBox 17"/>
-          <p:cNvSpPr txBox="1"/>
-          <p:nvPr/>
-        </p:nvSpPr>
-        <p:spPr>
-          <a:xfrm>
-            <a:off x="8046720" y="1737360"/>
-            <a:ext cx="3291840" cy="365760"/>
-          </a:xfrm>
-          <a:prstGeom prst="rect">
-            <a:avLst/>
-          </a:prstGeom>
-          <a:noFill/>
-        </p:spPr>
-        <p:txBody>
-          <a:bodyPr wrap="square" anchor="t" lIns="0" rIns="0" tIns="0" bIns="0"/>
-          <a:lstStyle/>
-          <a:p>
-            <a:pPr algn="l"/>
-            <a:r>
-              <a:rPr sz="1300" b="1" i="0">
-                <a:solidFill>
-                  <a:srgbClr val="0645AD"/>
-                </a:solidFill>
-                <a:latin typeface="Calibri"/>
-              </a:rPr>
-              <a:t>SUCCESS CRITERIA</a:t>
-            </a:r>
-          </a:p>
-        </p:txBody>
-      </p:sp>
-      <p:sp>
-        <p:nvSpPr>
-          <p:cNvPr id="19" name="TextBox 18"/>
-          <p:cNvSpPr txBox="1"/>
-          <p:nvPr/>
-        </p:nvSpPr>
-        <p:spPr>
-          <a:xfrm>
-            <a:off x="8046720" y="2240280"/>
-            <a:ext cx="3337560" cy="3657600"/>
-          </a:xfrm>
-          <a:prstGeom prst="rect">
-            <a:avLst/>
-          </a:prstGeom>
-          <a:noFill/>
-        </p:spPr>
-        <p:txBody>
-          <a:bodyPr wrap="square" lIns="0" rIns="0" tIns="0" bIns="0">
-            <a:spAutoFit/>
-          </a:bodyPr>
-          <a:lstStyle/>
-          <a:p>
-            <a:pPr marL="274320" indent="-274320">
-              <a:spcAft>
-                <a:spcPts val="810"/>
-              </a:spcAft>
-              <a:buClr>
-                <a:srgbClr val="0645AD"/>
-              </a:buClr>
-              <a:buFont typeface="Arial"/>
-              <a:buChar char="•"/>
-            </a:pPr>
-            <a:r>
-              <a:rPr sz="1800" b="0">
-                <a:solidFill>
-                  <a:srgbClr val="202122"/>
-                </a:solidFill>
-                <a:latin typeface="Calibri"/>
-              </a:rPr>
-              <a:t>Tests written before code</a:t>
-            </a:r>
-          </a:p>
-          <a:p>
-            <a:pPr marL="274320" indent="-274320">
-              <a:spcAft>
-                <a:spcPts val="810"/>
-              </a:spcAft>
-              <a:buClr>
-                <a:srgbClr val="0645AD"/>
-              </a:buClr>
-              <a:buFont typeface="Arial"/>
-              <a:buChar char="•"/>
-            </a:pPr>
-            <a:r>
-              <a:rPr sz="1800" b="0">
-                <a:solidFill>
-                  <a:srgbClr val="202122"/>
-                </a:solidFill>
-                <a:latin typeface="Calibri"/>
-              </a:rPr>
-              <a:t>Boundaries tested</a:t>
-            </a:r>
-          </a:p>
-          <a:p>
-            <a:pPr marL="274320" indent="-274320">
-              <a:spcAft>
-                <a:spcPts val="810"/>
-              </a:spcAft>
-              <a:buClr>
-                <a:srgbClr val="0645AD"/>
-              </a:buClr>
-              <a:buFont typeface="Arial"/>
-              <a:buChar char="•"/>
-            </a:pPr>
-            <a:r>
-              <a:rPr sz="1800" b="0">
-                <a:solidFill>
-                  <a:srgbClr val="202122"/>
-                </a:solidFill>
-                <a:latin typeface="Calibri"/>
-              </a:rPr>
-              <a:t>Code refactored with tests still passing</a:t>
+              <a:rPr sz="1300" b="0" i="1">
+                <a:solidFill>
+                  <a:srgbClr val="54595D"/>
+                </a:solidFill>
+                <a:latin typeface="Calibri"/>
+              </a:rPr>
+              <a:t>Answer on mini whiteboards or in your book. Answers are in the speaker notes.</a:t>
             </a:r>
           </a:p>
         </p:txBody>
@@ -8704,7 +11622,7 @@
     <p:bg>
       <p:bgPr>
         <a:solidFill>
-          <a:srgbClr val="03306E"/>
+          <a:srgbClr val="FFFFFF"/>
         </a:solidFill>
         <a:effectLst/>
       </p:bgPr>
@@ -8740,7 +11658,7 @@
             <a:r>
               <a:rPr sz="1100" b="1" i="0">
                 <a:solidFill>
-                  <a:srgbClr val="A9C8F0"/>
+                  <a:srgbClr val="54595D"/>
                 </a:solidFill>
                 <a:latin typeface="Calibri"/>
               </a:rPr>
@@ -8773,25 +11691,190 @@
             <a:r>
               <a:rPr sz="3200" b="1" i="0">
                 <a:solidFill>
-                  <a:srgbClr val="FFFFFF"/>
+                  <a:srgbClr val="03306E"/>
                 </a:solidFill>
                 <a:latin typeface="Cambria"/>
               </a:rPr>
-              <a:t>Exit ticket</a:t>
-            </a:r>
-          </a:p>
-        </p:txBody>
-      </p:sp>
-      <p:sp>
-        <p:nvSpPr>
-          <p:cNvPr id="4" name="Oval 3"/>
+              <a:t>BDD and functional design</a:t>
+            </a:r>
+          </a:p>
+        </p:txBody>
+      </p:sp>
+      <p:sp>
+        <p:nvSpPr>
+          <p:cNvPr id="4" name="TextBox 3"/>
+          <p:cNvSpPr txBox="1"/>
+          <p:nvPr/>
+        </p:nvSpPr>
+        <p:spPr>
+          <a:xfrm>
+            <a:off x="548640" y="6446520"/>
+            <a:ext cx="8229600" cy="274320"/>
+          </a:xfrm>
+          <a:prstGeom prst="rect">
+            <a:avLst/>
+          </a:prstGeom>
+          <a:noFill/>
+        </p:spPr>
+        <p:txBody>
+          <a:bodyPr wrap="square" anchor="t" lIns="0" rIns="0" tIns="0" bIns="0"/>
+          <a:lstStyle/>
+          <a:p>
+            <a:pPr algn="l"/>
+            <a:r>
+              <a:rPr sz="1000" b="0" i="0">
+                <a:solidFill>
+                  <a:srgbClr val="54595D"/>
+                </a:solidFill>
+                <a:latin typeface="Calibri"/>
+              </a:rPr>
+              <a:t>Digital Software Development T Level  ·  Software Design Approaches</a:t>
+            </a:r>
+          </a:p>
+        </p:txBody>
+      </p:sp>
+      <p:sp>
+        <p:nvSpPr>
+          <p:cNvPr id="5" name="TextBox 4"/>
+          <p:cNvSpPr txBox="1"/>
+          <p:nvPr/>
+        </p:nvSpPr>
+        <p:spPr>
+          <a:xfrm>
+            <a:off x="10728655" y="6446520"/>
+            <a:ext cx="914400" cy="274320"/>
+          </a:xfrm>
+          <a:prstGeom prst="rect">
+            <a:avLst/>
+          </a:prstGeom>
+          <a:noFill/>
+        </p:spPr>
+        <p:txBody>
+          <a:bodyPr wrap="square" anchor="t" lIns="0" rIns="0" tIns="0" bIns="0"/>
+          <a:lstStyle/>
+          <a:p>
+            <a:pPr algn="r"/>
+            <a:r>
+              <a:rPr sz="1000" b="0" i="0">
+                <a:solidFill>
+                  <a:srgbClr val="54595D"/>
+                </a:solidFill>
+                <a:latin typeface="Calibri"/>
+              </a:rPr>
+              <a:t>9</a:t>
+            </a:r>
+          </a:p>
+        </p:txBody>
+      </p:sp>
+      <p:sp>
+        <p:nvSpPr>
+          <p:cNvPr id="6" name="TextBox 5"/>
+          <p:cNvSpPr txBox="1"/>
+          <p:nvPr/>
+        </p:nvSpPr>
+        <p:spPr>
+          <a:xfrm>
+            <a:off x="548640" y="1554480"/>
+            <a:ext cx="6720840" cy="4617720"/>
+          </a:xfrm>
+          <a:prstGeom prst="rect">
+            <a:avLst/>
+          </a:prstGeom>
+          <a:noFill/>
+        </p:spPr>
+        <p:txBody>
+          <a:bodyPr wrap="square" lIns="0" rIns="0" tIns="0" bIns="0">
+            <a:spAutoFit/>
+          </a:bodyPr>
+          <a:lstStyle/>
+          <a:p>
+            <a:pPr>
+              <a:spcAft>
+                <a:spcPts val="1320"/>
+              </a:spcAft>
+            </a:pPr>
+            <a:r>
+              <a:rPr sz="2200" b="0">
+                <a:solidFill>
+                  <a:srgbClr val="202122"/>
+                </a:solidFill>
+                <a:latin typeface="Calibri"/>
+              </a:rPr>
+              <a:t>Behaviour-driven development (BDD) describes the required behaviour before coding. Each behaviour must have business value and map to a requirement, and is written with a title, a narrative and acceptance criteria, often as 'Given... When... Then...'.</a:t>
+            </a:r>
+          </a:p>
+          <a:p>
+            <a:pPr>
+              <a:spcAft>
+                <a:spcPts val="1320"/>
+              </a:spcAft>
+            </a:pPr>
+            <a:r>
+              <a:rPr sz="2200" b="0">
+                <a:solidFill>
+                  <a:srgbClr val="202122"/>
+                </a:solidFill>
+                <a:latin typeface="Calibri"/>
+              </a:rPr>
+              <a:t>Functional design structures a program as modules that each perform one function. It uses features such as recursion (a function calling itself), closures, first-class and higher-order functions (functions passed as values), anonymous functions (lambdas) and currying.</a:t>
+            </a:r>
+          </a:p>
+        </p:txBody>
+      </p:sp>
+      <p:sp>
+        <p:nvSpPr>
+          <p:cNvPr id="7" name="Rounded Rectangle 6"/>
           <p:cNvSpPr/>
           <p:nvPr/>
         </p:nvSpPr>
         <p:spPr>
           <a:xfrm>
-            <a:off x="548640" y="1737360"/>
-            <a:ext cx="502920" cy="502920"/>
+            <a:off x="7772400" y="1554480"/>
+            <a:ext cx="3867912" cy="4526280"/>
+          </a:xfrm>
+          <a:prstGeom prst="roundRect">
+            <a:avLst>
+              <a:gd name="adj" fmla="val 8000"/>
+            </a:avLst>
+          </a:prstGeom>
+          <a:solidFill>
+            <a:srgbClr val="03306E"/>
+          </a:solidFill>
+          <a:ln>
+            <a:noFill/>
+          </a:ln>
+          <a:effectLst/>
+        </p:spPr>
+        <p:style>
+          <a:lnRef idx="1">
+            <a:schemeClr val="accent1"/>
+          </a:lnRef>
+          <a:fillRef idx="3">
+            <a:schemeClr val="accent1"/>
+          </a:fillRef>
+          <a:effectRef idx="2">
+            <a:schemeClr val="accent1"/>
+          </a:effectRef>
+          <a:fontRef idx="minor">
+            <a:schemeClr val="lt1"/>
+          </a:fontRef>
+        </p:style>
+        <p:txBody>
+          <a:bodyPr rtlCol="0" anchor="ctr"/>
+          <a:lstStyle/>
+          <a:p/>
+        </p:txBody>
+      </p:sp>
+      <p:sp>
+        <p:nvSpPr>
+          <p:cNvPr id="8" name="Oval 7"/>
+          <p:cNvSpPr/>
+          <p:nvPr/>
+        </p:nvSpPr>
+        <p:spPr>
+          <a:xfrm>
+            <a:off x="8046720" y="1828800"/>
+            <a:ext cx="548640" cy="548640"/>
           </a:xfrm>
           <a:prstGeom prst="ellipse">
             <a:avLst/>
@@ -8824,394 +11907,79 @@
           <a:p>
             <a:pPr algn="ctr"/>
             <a:r>
-              <a:rPr sz="1700" b="1">
+              <a:rPr sz="1300" b="1">
                 <a:solidFill>
                   <a:srgbClr val="202122"/>
                 </a:solidFill>
                 <a:latin typeface="Calibri"/>
               </a:rPr>
-              <a:t>1</a:t>
-            </a:r>
-          </a:p>
-        </p:txBody>
-      </p:sp>
-      <p:sp>
-        <p:nvSpPr>
-          <p:cNvPr id="5" name="TextBox 4"/>
-          <p:cNvSpPr txBox="1"/>
-          <p:nvPr/>
-        </p:nvSpPr>
-        <p:spPr>
-          <a:xfrm>
-            <a:off x="1325880" y="1645920"/>
-            <a:ext cx="6583680" cy="822960"/>
-          </a:xfrm>
-          <a:prstGeom prst="rect">
-            <a:avLst/>
-          </a:prstGeom>
-          <a:noFill/>
-        </p:spPr>
-        <p:txBody>
-          <a:bodyPr wrap="square" anchor="ctr" lIns="0" rIns="0" tIns="0" bIns="0"/>
+              <a:t>e.g.</a:t>
+            </a:r>
+          </a:p>
+        </p:txBody>
+      </p:sp>
+      <p:sp>
+        <p:nvSpPr>
+          <p:cNvPr id="9" name="TextBox 8"/>
+          <p:cNvSpPr txBox="1"/>
+          <p:nvPr/>
+        </p:nvSpPr>
+        <p:spPr>
+          <a:xfrm>
+            <a:off x="8046720" y="2560320"/>
+            <a:ext cx="3291840" cy="365760"/>
+          </a:xfrm>
+          <a:prstGeom prst="rect">
+            <a:avLst/>
+          </a:prstGeom>
+          <a:noFill/>
+        </p:spPr>
+        <p:txBody>
+          <a:bodyPr wrap="square" anchor="t" lIns="0" rIns="0" tIns="0" bIns="0"/>
           <a:lstStyle/>
           <a:p>
             <a:pPr algn="l"/>
             <a:r>
-              <a:rPr sz="2000" b="0" i="0">
+              <a:rPr sz="1300" b="1" i="0">
+                <a:solidFill>
+                  <a:srgbClr val="A9C8F0"/>
+                </a:solidFill>
+                <a:latin typeface="Calibri"/>
+              </a:rPr>
+              <a:t>EXAMPLE</a:t>
+            </a:r>
+          </a:p>
+        </p:txBody>
+      </p:sp>
+      <p:sp>
+        <p:nvSpPr>
+          <p:cNvPr id="10" name="TextBox 9"/>
+          <p:cNvSpPr txBox="1"/>
+          <p:nvPr/>
+        </p:nvSpPr>
+        <p:spPr>
+          <a:xfrm>
+            <a:off x="8046720" y="2971800"/>
+            <a:ext cx="3291840" cy="2971800"/>
+          </a:xfrm>
+          <a:prstGeom prst="rect">
+            <a:avLst/>
+          </a:prstGeom>
+          <a:noFill/>
+        </p:spPr>
+        <p:txBody>
+          <a:bodyPr wrap="square" anchor="t" lIns="0" rIns="0" tIns="0" bIns="0"/>
+          <a:lstStyle/>
+          <a:p>
+            <a:pPr algn="l"/>
+            <a:r>
+              <a:rPr sz="1900" b="0" i="0">
                 <a:solidFill>
                   <a:srgbClr val="FFFFFF"/>
                 </a:solidFill>
-                <a:latin typeface="Calibri"/>
-              </a:rPr>
-              <a:t>Which design approach suits a game with many similar characters?</a:t>
-            </a:r>
-          </a:p>
-        </p:txBody>
-      </p:sp>
-      <p:sp>
-        <p:nvSpPr>
-          <p:cNvPr id="6" name="Oval 5"/>
-          <p:cNvSpPr/>
-          <p:nvPr/>
-        </p:nvSpPr>
-        <p:spPr>
-          <a:xfrm>
-            <a:off x="548640" y="2697480"/>
-            <a:ext cx="502920" cy="502920"/>
-          </a:xfrm>
-          <a:prstGeom prst="ellipse">
-            <a:avLst/>
-          </a:prstGeom>
-          <a:solidFill>
-            <a:srgbClr val="33C17A"/>
-          </a:solidFill>
-          <a:ln>
-            <a:noFill/>
-          </a:ln>
-          <a:effectLst/>
-        </p:spPr>
-        <p:style>
-          <a:lnRef idx="1">
-            <a:schemeClr val="accent1"/>
-          </a:lnRef>
-          <a:fillRef idx="3">
-            <a:schemeClr val="accent1"/>
-          </a:fillRef>
-          <a:effectRef idx="2">
-            <a:schemeClr val="accent1"/>
-          </a:effectRef>
-          <a:fontRef idx="minor">
-            <a:schemeClr val="lt1"/>
-          </a:fontRef>
-        </p:style>
-        <p:txBody>
-          <a:bodyPr rtlCol="0" anchor="ctr" lIns="0" rIns="0" tIns="0" bIns="0"/>
-          <a:lstStyle/>
-          <a:p>
-            <a:pPr algn="ctr"/>
-            <a:r>
-              <a:rPr sz="1700" b="1">
-                <a:solidFill>
-                  <a:srgbClr val="202122"/>
-                </a:solidFill>
-                <a:latin typeface="Calibri"/>
-              </a:rPr>
-              <a:t>2</a:t>
-            </a:r>
-          </a:p>
-        </p:txBody>
-      </p:sp>
-      <p:sp>
-        <p:nvSpPr>
-          <p:cNvPr id="7" name="TextBox 6"/>
-          <p:cNvSpPr txBox="1"/>
-          <p:nvPr/>
-        </p:nvSpPr>
-        <p:spPr>
-          <a:xfrm>
-            <a:off x="1325880" y="2606040"/>
-            <a:ext cx="6583680" cy="822960"/>
-          </a:xfrm>
-          <a:prstGeom prst="rect">
-            <a:avLst/>
-          </a:prstGeom>
-          <a:noFill/>
-        </p:spPr>
-        <p:txBody>
-          <a:bodyPr wrap="square" anchor="ctr" lIns="0" rIns="0" tIns="0" bIns="0"/>
-          <a:lstStyle/>
-          <a:p>
-            <a:pPr algn="l"/>
-            <a:r>
-              <a:rPr sz="2000" b="0" i="0">
-                <a:solidFill>
-                  <a:srgbClr val="FFFFFF"/>
-                </a:solidFill>
-                <a:latin typeface="Calibri"/>
-              </a:rPr>
-              <a:t>Why does TDD reduce bugs?</a:t>
-            </a:r>
-          </a:p>
-        </p:txBody>
-      </p:sp>
-      <p:sp>
-        <p:nvSpPr>
-          <p:cNvPr id="8" name="Oval 7"/>
-          <p:cNvSpPr/>
-          <p:nvPr/>
-        </p:nvSpPr>
-        <p:spPr>
-          <a:xfrm>
-            <a:off x="548640" y="3657600"/>
-            <a:ext cx="502920" cy="502920"/>
-          </a:xfrm>
-          <a:prstGeom prst="ellipse">
-            <a:avLst/>
-          </a:prstGeom>
-          <a:solidFill>
-            <a:srgbClr val="33C17A"/>
-          </a:solidFill>
-          <a:ln>
-            <a:noFill/>
-          </a:ln>
-          <a:effectLst/>
-        </p:spPr>
-        <p:style>
-          <a:lnRef idx="1">
-            <a:schemeClr val="accent1"/>
-          </a:lnRef>
-          <a:fillRef idx="3">
-            <a:schemeClr val="accent1"/>
-          </a:fillRef>
-          <a:effectRef idx="2">
-            <a:schemeClr val="accent1"/>
-          </a:effectRef>
-          <a:fontRef idx="minor">
-            <a:schemeClr val="lt1"/>
-          </a:fontRef>
-        </p:style>
-        <p:txBody>
-          <a:bodyPr rtlCol="0" anchor="ctr" lIns="0" rIns="0" tIns="0" bIns="0"/>
-          <a:lstStyle/>
-          <a:p>
-            <a:pPr algn="ctr"/>
-            <a:r>
-              <a:rPr sz="1700" b="1">
-                <a:solidFill>
-                  <a:srgbClr val="202122"/>
-                </a:solidFill>
-                <a:latin typeface="Calibri"/>
-              </a:rPr>
-              <a:t>3</a:t>
-            </a:r>
-          </a:p>
-        </p:txBody>
-      </p:sp>
-      <p:sp>
-        <p:nvSpPr>
-          <p:cNvPr id="9" name="TextBox 8"/>
-          <p:cNvSpPr txBox="1"/>
-          <p:nvPr/>
-        </p:nvSpPr>
-        <p:spPr>
-          <a:xfrm>
-            <a:off x="1325880" y="3566160"/>
-            <a:ext cx="6583680" cy="822960"/>
-          </a:xfrm>
-          <a:prstGeom prst="rect">
-            <a:avLst/>
-          </a:prstGeom>
-          <a:noFill/>
-        </p:spPr>
-        <p:txBody>
-          <a:bodyPr wrap="square" anchor="ctr" lIns="0" rIns="0" tIns="0" bIns="0"/>
-          <a:lstStyle/>
-          <a:p>
-            <a:pPr algn="l"/>
-            <a:r>
-              <a:rPr sz="2000" b="0" i="0">
-                <a:solidFill>
-                  <a:srgbClr val="FFFFFF"/>
-                </a:solidFill>
-                <a:latin typeface="Calibri"/>
-              </a:rPr>
-              <a:t>What is inheritance?</a:t>
-            </a:r>
-          </a:p>
-        </p:txBody>
-      </p:sp>
-      <p:sp>
-        <p:nvSpPr>
-          <p:cNvPr id="10" name="Rounded Rectangle 9"/>
-          <p:cNvSpPr/>
-          <p:nvPr/>
-        </p:nvSpPr>
-        <p:spPr>
-          <a:xfrm>
-            <a:off x="8229600" y="1645920"/>
-            <a:ext cx="3410712" cy="2926080"/>
-          </a:xfrm>
-          <a:prstGeom prst="roundRect">
-            <a:avLst>
-              <a:gd name="adj" fmla="val 8000"/>
-            </a:avLst>
-          </a:prstGeom>
-          <a:solidFill>
-            <a:srgbClr val="0645AD"/>
-          </a:solidFill>
-          <a:ln>
-            <a:noFill/>
-          </a:ln>
-          <a:effectLst/>
-        </p:spPr>
-        <p:style>
-          <a:lnRef idx="1">
-            <a:schemeClr val="accent1"/>
-          </a:lnRef>
-          <a:fillRef idx="3">
-            <a:schemeClr val="accent1"/>
-          </a:fillRef>
-          <a:effectRef idx="2">
-            <a:schemeClr val="accent1"/>
-          </a:effectRef>
-          <a:fontRef idx="minor">
-            <a:schemeClr val="lt1"/>
-          </a:fontRef>
-        </p:style>
-        <p:txBody>
-          <a:bodyPr rtlCol="0" anchor="ctr"/>
-          <a:lstStyle/>
-          <a:p/>
-        </p:txBody>
-      </p:sp>
-      <p:sp>
-        <p:nvSpPr>
-          <p:cNvPr id="11" name="TextBox 10"/>
-          <p:cNvSpPr txBox="1"/>
-          <p:nvPr/>
-        </p:nvSpPr>
-        <p:spPr>
-          <a:xfrm>
-            <a:off x="8503920" y="1874519"/>
-            <a:ext cx="2926080" cy="365760"/>
-          </a:xfrm>
-          <a:prstGeom prst="rect">
-            <a:avLst/>
-          </a:prstGeom>
-          <a:noFill/>
-        </p:spPr>
-        <p:txBody>
-          <a:bodyPr wrap="square" anchor="t" lIns="0" rIns="0" tIns="0" bIns="0"/>
-          <a:lstStyle/>
-          <a:p>
-            <a:pPr algn="l"/>
-            <a:r>
-              <a:rPr sz="1300" b="1" i="0">
-                <a:solidFill>
-                  <a:srgbClr val="A9C8F0"/>
-                </a:solidFill>
-                <a:latin typeface="Calibri"/>
-              </a:rPr>
-              <a:t>REVISE THIS TOPIC</a:t>
-            </a:r>
-          </a:p>
-        </p:txBody>
-      </p:sp>
-      <p:sp>
-        <p:nvSpPr>
-          <p:cNvPr id="12" name="TextBox 11"/>
-          <p:cNvSpPr txBox="1"/>
-          <p:nvPr/>
-        </p:nvSpPr>
-        <p:spPr>
-          <a:xfrm>
-            <a:off x="8503920" y="2286000"/>
-            <a:ext cx="2926080" cy="548640"/>
-          </a:xfrm>
-          <a:prstGeom prst="rect">
-            <a:avLst/>
-          </a:prstGeom>
-          <a:noFill/>
-        </p:spPr>
-        <p:txBody>
-          <a:bodyPr wrap="square" anchor="t" lIns="0" rIns="0" tIns="0" bIns="0"/>
-          <a:lstStyle/>
-          <a:p>
-            <a:pPr algn="l"/>
-            <a:r>
-              <a:rPr sz="1400" b="0" i="0">
-                <a:solidFill>
-                  <a:srgbClr val="FFFFFF"/>
-                </a:solidFill>
-                <a:latin typeface="Calibri"/>
-              </a:rPr>
-              <a:t>Revision notes for this lesson are on the study wiki:</a:t>
-            </a:r>
-          </a:p>
-        </p:txBody>
-      </p:sp>
-      <p:sp>
-        <p:nvSpPr>
-          <p:cNvPr id="13" name="TextBox 12"/>
-          <p:cNvSpPr txBox="1"/>
-          <p:nvPr/>
-        </p:nvSpPr>
-        <p:spPr>
-          <a:xfrm>
-            <a:off x="8503920" y="2926080"/>
-            <a:ext cx="2926080" cy="1463040"/>
-          </a:xfrm>
-          <a:prstGeom prst="rect">
-            <a:avLst/>
-          </a:prstGeom>
-          <a:noFill/>
-        </p:spPr>
-        <p:txBody>
-          <a:bodyPr wrap="square" anchor="t" lIns="0" rIns="0" tIns="0" bIns="0"/>
-          <a:lstStyle/>
-          <a:p>
-            <a:pPr algn="l"/>
-            <a:r>
-              <a:rPr sz="2000" b="1" i="0">
-                <a:solidFill>
-                  <a:srgbClr val="FFFFFF"/>
-                </a:solidFill>
                 <a:latin typeface="Cambria"/>
               </a:rPr>
-              <a:t>Design</a:t>
-            </a:r>
-          </a:p>
-        </p:txBody>
-      </p:sp>
-      <p:sp>
-        <p:nvSpPr>
-          <p:cNvPr id="14" name="TextBox 13"/>
-          <p:cNvSpPr txBox="1"/>
-          <p:nvPr/>
-        </p:nvSpPr>
-        <p:spPr>
-          <a:xfrm>
-            <a:off x="548640" y="5669280"/>
-            <a:ext cx="11094415" cy="548640"/>
-          </a:xfrm>
-          <a:prstGeom prst="rect">
-            <a:avLst/>
-          </a:prstGeom>
-          <a:noFill/>
-        </p:spPr>
-        <p:txBody>
-          <a:bodyPr wrap="square" anchor="t" lIns="0" rIns="0" tIns="0" bIns="0"/>
-          <a:lstStyle/>
-          <a:p>
-            <a:pPr algn="l"/>
-            <a:r>
-              <a:rPr sz="1200" b="0" i="0">
-                <a:solidFill>
-                  <a:srgbClr val="A9C8F0"/>
-                </a:solidFill>
-                <a:latin typeface="Calibri"/>
-              </a:rPr>
-              <a:t>https://lana6478.github.io/T-level-Digital-Software-Development/#/02-occupational-specialism/04-design.md</a:t>
+              <a:t>BDD: Given a user has items in their basket, When they click Checkout, Then they see the payment page.</a:t>
             </a:r>
           </a:p>
         </p:txBody>
